--- a/lessons/lesson-14/slides.pptx
+++ b/lessons/lesson-14/slides.pptx
@@ -413,7 +413,7 @@
           </a:p>
           <a:p xmlns:a="http://schemas.openxmlformats.org/drawingml/2006/main">
             <a:r>
-              <a:t>讲义位置：本课讲义；见逐页母稿映射表</a:t>
+              <a:t>讲述与校准：</a:t>
             </a:r>
           </a:p>
           <a:p xmlns:a="http://schemas.openxmlformats.org/drawingml/2006/main">
@@ -423,27 +423,17 @@
           </a:p>
           <a:p xmlns:a="http://schemas.openxmlformats.org/drawingml/2006/main">
             <a:r>
-              <a:t>屏显核对：</a:t>
-            </a:r>
-          </a:p>
-          <a:p xmlns:a="http://schemas.openxmlformats.org/drawingml/2006/main">
-            <a:r>
-              <a:t>第14讲 论文式表达与回写</a:t>
-            </a:r>
-          </a:p>
-          <a:p xmlns:a="http://schemas.openxmlformats.org/drawingml/2006/main">
-            <a:r>
               <a:t/>
             </a:r>
           </a:p>
           <a:p xmlns:a="http://schemas.openxmlformats.org/drawingml/2006/main">
             <a:r>
-              <a:t>教师讲述：</a:t>
-            </a:r>
-          </a:p>
-          <a:p xmlns:a="http://schemas.openxmlformats.org/drawingml/2006/main">
-            <a:r>
-              <a:t>承接第 13 课评价报告。本课不是写作理论综述，也不是正式提交门。学生打开自己的一个关键结果。</a:t>
+              <a:t>学生动作：</a:t>
+            </a:r>
+          </a:p>
+          <a:p xmlns:a="http://schemas.openxmlformats.org/drawingml/2006/main">
+            <a:r>
+              <a:t>依据本页方法检查本人项目；按需参考。</a:t>
             </a:r>
           </a:p>
           <a:p xmlns:a="http://schemas.openxmlformats.org/drawingml/2006/main">
@@ -453,7 +443,7 @@
           </a:p>
           <a:p xmlns:a="http://schemas.openxmlformats.org/drawingml/2006/main">
             <a:r>
-              <a:t>学生动作：</a:t>
+              <a:t>课堂安排：按本稿下方 90 分钟教学路由安排；此页不另占独立时段。</a:t>
             </a:r>
           </a:p>
           <a:p xmlns:a="http://schemas.openxmlformats.org/drawingml/2006/main">
@@ -463,62 +453,12 @@
           </a:p>
           <a:p xmlns:a="http://schemas.openxmlformats.org/drawingml/2006/main">
             <a:r>
-              <a:t/>
-            </a:r>
-          </a:p>
-          <a:p xmlns:a="http://schemas.openxmlformats.org/drawingml/2006/main">
-            <a:r>
-              <a:t>来源与边界：</a:t>
-            </a:r>
-          </a:p>
-          <a:p xmlns:a="http://schemas.openxmlformats.org/drawingml/2006/main">
-            <a:r>
-              <a:t>讲义导读；`assignments.md` 第 14 课。</a:t>
-            </a:r>
-          </a:p>
-          <a:p xmlns:a="http://schemas.openxmlformats.org/drawingml/2006/main">
-            <a:r>
-              <a:t/>
-            </a:r>
-          </a:p>
-          <a:p xmlns:a="http://schemas.openxmlformats.org/drawingml/2006/main">
-            <a:r>
               <a:t>[Sources]</a:t>
             </a:r>
           </a:p>
           <a:p xmlns:a="http://schemas.openxmlformats.org/drawingml/2006/main">
             <a:r>
-              <a:t/>
-            </a:r>
-          </a:p>
-          <a:p xmlns:a="http://schemas.openxmlformats.org/drawingml/2006/main">
-            <a:r>
-              <a:t>- https://press.uchicago.edu/ucp/books/book/chicago/C/bo215874008</a:t>
-            </a:r>
-          </a:p>
-          <a:p xmlns:a="http://schemas.openxmlformats.org/drawingml/2006/main">
-            <a:r>
-              <a:t/>
-            </a:r>
-          </a:p>
-          <a:p xmlns:a="http://schemas.openxmlformats.org/drawingml/2006/main">
-            <a:r>
-              <a:t>- 本课 handout.md 与 slides.md</a:t>
-            </a:r>
-          </a:p>
-          <a:p xmlns:a="http://schemas.openxmlformats.org/drawingml/2006/main">
-            <a:r>
-              <a:t/>
-            </a:r>
-          </a:p>
-          <a:p xmlns:a="http://schemas.openxmlformats.org/drawingml/2006/main">
-            <a:r>
-              <a:t>- ../../course/reading-card-case.md</a:t>
-            </a:r>
-          </a:p>
-          <a:p xmlns:a="http://schemas.openxmlformats.org/drawingml/2006/main">
-            <a:r>
-              <a:t/>
+              <a:t>本课 handout.md、judgment-task.md；../../course/judgment-path.md。</a:t>
             </a:r>
           </a:p>
           <a:p xmlns:a="http://schemas.openxmlformats.org/drawingml/2006/main">
@@ -603,7 +543,12 @@
           </a:p>
           <a:p xmlns:a="http://schemas.openxmlformats.org/drawingml/2006/main">
             <a:r>
-              <a:t>讲义位置：handout.md §六、贯穿案例：从验证门材料到论文式短文初版</a:t>
+              <a:t>讲述与校准：</a:t>
+            </a:r>
+          </a:p>
+          <a:p xmlns:a="http://schemas.openxmlformats.org/drawingml/2006/main">
+            <a:r>
+              <a:t>沿记录倒着点开，不能只填一个看似真实的exp编号。教师包路径见讲义；个人项目使用自己的实际记录。</a:t>
             </a:r>
           </a:p>
           <a:p xmlns:a="http://schemas.openxmlformats.org/drawingml/2006/main">
@@ -613,32 +558,12 @@
           </a:p>
           <a:p xmlns:a="http://schemas.openxmlformats.org/drawingml/2006/main">
             <a:r>
-              <a:t>屏显核对：</a:t>
-            </a:r>
-          </a:p>
-          <a:p xmlns:a="http://schemas.openxmlformats.org/drawingml/2006/main">
-            <a:r>
-              <a:t>主张：本构造包的汇总比较。</a:t>
-            </a:r>
-          </a:p>
-          <a:p xmlns:a="http://schemas.openxmlformats.org/drawingml/2006/main">
-            <a:r>
-              <a:t>证据：evaluation.json → annotations.json。</a:t>
-            </a:r>
-          </a:p>
-          <a:p xmlns:a="http://schemas.openxmlformats.org/drawingml/2006/main">
-            <a:r>
-              <a:t>原始材料：T01–T03 的源文本与输出原句。</a:t>
-            </a:r>
-          </a:p>
-          <a:p xmlns:a="http://schemas.openxmlformats.org/drawingml/2006/main">
-            <a:r>
-              <a:t>判断：Q1方向一致；H1/A2未决。</a:t>
-            </a:r>
-          </a:p>
-          <a:p xmlns:a="http://schemas.openxmlformats.org/drawingml/2006/main">
-            <a:r>
-              <a:t>反例与缺口：T03；其他质量未测。</a:t>
+              <a:t>学生动作：</a:t>
+            </a:r>
+          </a:p>
+          <a:p xmlns:a="http://schemas.openxmlformats.org/drawingml/2006/main">
+            <a:r>
+              <a:t>同伴从段落选一个数字，完成一次反查。</a:t>
             </a:r>
           </a:p>
           <a:p xmlns:a="http://schemas.openxmlformats.org/drawingml/2006/main">
@@ -648,12 +573,7 @@
           </a:p>
           <a:p xmlns:a="http://schemas.openxmlformats.org/drawingml/2006/main">
             <a:r>
-              <a:t>教师讲述：</a:t>
-            </a:r>
-          </a:p>
-          <a:p xmlns:a="http://schemas.openxmlformats.org/drawingml/2006/main">
-            <a:r>
-              <a:t>沿记录倒着点开，不能只填一个看似真实的exp编号。教师包路径见讲义；个人项目使用自己的实际记录。</a:t>
+              <a:t>课堂安排：按本稿下方 90 分钟教学路由安排；此页不另占独立时段。</a:t>
             </a:r>
           </a:p>
           <a:p xmlns:a="http://schemas.openxmlformats.org/drawingml/2006/main">
@@ -663,12 +583,12 @@
           </a:p>
           <a:p xmlns:a="http://schemas.openxmlformats.org/drawingml/2006/main">
             <a:r>
-              <a:t>学生动作：</a:t>
-            </a:r>
-          </a:p>
-          <a:p xmlns:a="http://schemas.openxmlformats.org/drawingml/2006/main">
-            <a:r>
-              <a:t>同伴从段落选一个数字，完成一次反查。</a:t>
+              <a:t>[Sources]</a:t>
+            </a:r>
+          </a:p>
+          <a:p xmlns:a="http://schemas.openxmlformats.org/drawingml/2006/main">
+            <a:r>
+              <a:t>./handout.md；课堂示例与构造数据见 ../../course/reading-card-case.md</a:t>
             </a:r>
           </a:p>
           <a:p xmlns:a="http://schemas.openxmlformats.org/drawingml/2006/main">
@@ -678,57 +598,7 @@
           </a:p>
           <a:p xmlns:a="http://schemas.openxmlformats.org/drawingml/2006/main">
             <a:r>
-              <a:t>来源与边界：</a:t>
-            </a:r>
-          </a:p>
-          <a:p xmlns:a="http://schemas.openxmlformats.org/drawingml/2006/main">
-            <a:r>
-              <a:t>./handout.md；课堂示例与构造数据见 ../../course/reading-card-case.md</a:t>
-            </a:r>
-          </a:p>
-          <a:p xmlns:a="http://schemas.openxmlformats.org/drawingml/2006/main">
-            <a:r>
-              <a:t/>
-            </a:r>
-          </a:p>
-          <a:p xmlns:a="http://schemas.openxmlformats.org/drawingml/2006/main">
-            <a:r>
-              <a:t>[Sources]</a:t>
-            </a:r>
-          </a:p>
-          <a:p xmlns:a="http://schemas.openxmlformats.org/drawingml/2006/main">
-            <a:r>
-              <a:t/>
-            </a:r>
-          </a:p>
-          <a:p xmlns:a="http://schemas.openxmlformats.org/drawingml/2006/main">
-            <a:r>
-              <a:t>- https://press.uchicago.edu/ucp/books/book/chicago/C/bo215874008</a:t>
-            </a:r>
-          </a:p>
-          <a:p xmlns:a="http://schemas.openxmlformats.org/drawingml/2006/main">
-            <a:r>
-              <a:t/>
-            </a:r>
-          </a:p>
-          <a:p xmlns:a="http://schemas.openxmlformats.org/drawingml/2006/main">
-            <a:r>
-              <a:t>- 本课 handout.md 与 slides.md</a:t>
-            </a:r>
-          </a:p>
-          <a:p xmlns:a="http://schemas.openxmlformats.org/drawingml/2006/main">
-            <a:r>
-              <a:t/>
-            </a:r>
-          </a:p>
-          <a:p xmlns:a="http://schemas.openxmlformats.org/drawingml/2006/main">
-            <a:r>
-              <a:t>- ../../course/reading-card-case.md</a:t>
-            </a:r>
-          </a:p>
-          <a:p xmlns:a="http://schemas.openxmlformats.org/drawingml/2006/main">
-            <a:r>
-              <a:t/>
+              <a:t>本课 handout.md、judgment-task.md；../../course/judgment-path.md。</a:t>
             </a:r>
           </a:p>
           <a:p xmlns:a="http://schemas.openxmlformats.org/drawingml/2006/main">
@@ -813,7 +683,12 @@
           </a:p>
           <a:p xmlns:a="http://schemas.openxmlformats.org/drawingml/2006/main">
             <a:r>
-              <a:t>讲义位置：handout.md §六、贯穿案例：从验证门材料到论文式短文初版</a:t>
+              <a:t>讲述与校准：</a:t>
+            </a:r>
+          </a:p>
+          <a:p xmlns:a="http://schemas.openxmlformats.org/drawingml/2006/main">
+            <a:r>
+              <a:t>不要为了填满披露模板虚构模型或版本。教师包的构造 provenance 不等于学生自己的AI使用日志。把执行记录与写作辅助记录分开。</a:t>
             </a:r>
           </a:p>
           <a:p xmlns:a="http://schemas.openxmlformats.org/drawingml/2006/main">
@@ -823,27 +698,12 @@
           </a:p>
           <a:p xmlns:a="http://schemas.openxmlformats.org/drawingml/2006/main">
             <a:r>
-              <a:t>屏显核对：</a:t>
-            </a:r>
-          </a:p>
-          <a:p xmlns:a="http://schemas.openxmlformats.org/drawingml/2006/main">
-            <a:r>
-              <a:t>本示范回放预置输出，没有课堂模型调用。</a:t>
-            </a:r>
-          </a:p>
-          <a:p xmlns:a="http://schemas.openxmlformats.org/drawingml/2006/main">
-            <a:r>
-              <a:t>若使用AI辅助写作：另记工具、版本/日期、用途与提示要点。</a:t>
-            </a:r>
-          </a:p>
-          <a:p xmlns:a="http://schemas.openxmlformats.org/drawingml/2006/main">
-            <a:r>
-              <a:t>人工核验：数据、原句、范围、失败与引用。</a:t>
-            </a:r>
-          </a:p>
-          <a:p xmlns:a="http://schemas.openxmlformats.org/drawingml/2006/main">
-            <a:r>
-              <a:t>输出用途：哪些候选实际进入报告。</a:t>
+              <a:t>学生动作：</a:t>
+            </a:r>
+          </a:p>
+          <a:p xmlns:a="http://schemas.openxmlformats.org/drawingml/2006/main">
+            <a:r>
+              <a:t>从已有日志抽取一项真实用途和人工核验动作。</a:t>
             </a:r>
           </a:p>
           <a:p xmlns:a="http://schemas.openxmlformats.org/drawingml/2006/main">
@@ -853,12 +713,7 @@
           </a:p>
           <a:p xmlns:a="http://schemas.openxmlformats.org/drawingml/2006/main">
             <a:r>
-              <a:t>教师讲述：</a:t>
-            </a:r>
-          </a:p>
-          <a:p xmlns:a="http://schemas.openxmlformats.org/drawingml/2006/main">
-            <a:r>
-              <a:t>不要为了填满披露模板虚构模型或版本。教师包的构造 provenance 不等于学生自己的AI使用日志。把执行记录与写作辅助记录分开。</a:t>
+              <a:t>课堂安排：按本稿下方 90 分钟教学路由安排；此页不另占独立时段。</a:t>
             </a:r>
           </a:p>
           <a:p xmlns:a="http://schemas.openxmlformats.org/drawingml/2006/main">
@@ -868,12 +723,12 @@
           </a:p>
           <a:p xmlns:a="http://schemas.openxmlformats.org/drawingml/2006/main">
             <a:r>
-              <a:t>学生动作：</a:t>
-            </a:r>
-          </a:p>
-          <a:p xmlns:a="http://schemas.openxmlformats.org/drawingml/2006/main">
-            <a:r>
-              <a:t>从已有日志抽取一项真实用途和人工核验动作。</a:t>
+              <a:t>[Sources]</a:t>
+            </a:r>
+          </a:p>
+          <a:p xmlns:a="http://schemas.openxmlformats.org/drawingml/2006/main">
+            <a:r>
+              <a:t>./handout.md；课堂示例与构造数据见 ../../course/reading-card-case.md</a:t>
             </a:r>
           </a:p>
           <a:p xmlns:a="http://schemas.openxmlformats.org/drawingml/2006/main">
@@ -883,57 +738,7 @@
           </a:p>
           <a:p xmlns:a="http://schemas.openxmlformats.org/drawingml/2006/main">
             <a:r>
-              <a:t>来源与边界：</a:t>
-            </a:r>
-          </a:p>
-          <a:p xmlns:a="http://schemas.openxmlformats.org/drawingml/2006/main">
-            <a:r>
-              <a:t>./handout.md；课堂示例与构造数据见 ../../course/reading-card-case.md</a:t>
-            </a:r>
-          </a:p>
-          <a:p xmlns:a="http://schemas.openxmlformats.org/drawingml/2006/main">
-            <a:r>
-              <a:t/>
-            </a:r>
-          </a:p>
-          <a:p xmlns:a="http://schemas.openxmlformats.org/drawingml/2006/main">
-            <a:r>
-              <a:t>[Sources]</a:t>
-            </a:r>
-          </a:p>
-          <a:p xmlns:a="http://schemas.openxmlformats.org/drawingml/2006/main">
-            <a:r>
-              <a:t/>
-            </a:r>
-          </a:p>
-          <a:p xmlns:a="http://schemas.openxmlformats.org/drawingml/2006/main">
-            <a:r>
-              <a:t>- https://press.uchicago.edu/ucp/books/book/chicago/C/bo215874008</a:t>
-            </a:r>
-          </a:p>
-          <a:p xmlns:a="http://schemas.openxmlformats.org/drawingml/2006/main">
-            <a:r>
-              <a:t/>
-            </a:r>
-          </a:p>
-          <a:p xmlns:a="http://schemas.openxmlformats.org/drawingml/2006/main">
-            <a:r>
-              <a:t>- 本课 handout.md 与 slides.md</a:t>
-            </a:r>
-          </a:p>
-          <a:p xmlns:a="http://schemas.openxmlformats.org/drawingml/2006/main">
-            <a:r>
-              <a:t/>
-            </a:r>
-          </a:p>
-          <a:p xmlns:a="http://schemas.openxmlformats.org/drawingml/2006/main">
-            <a:r>
-              <a:t>- ../../course/reading-card-case.md</a:t>
-            </a:r>
-          </a:p>
-          <a:p xmlns:a="http://schemas.openxmlformats.org/drawingml/2006/main">
-            <a:r>
-              <a:t/>
+              <a:t>本课 handout.md、judgment-task.md；../../course/judgment-path.md。</a:t>
             </a:r>
           </a:p>
           <a:p xmlns:a="http://schemas.openxmlformats.org/drawingml/2006/main">
@@ -1018,7 +823,7 @@
           </a:p>
           <a:p xmlns:a="http://schemas.openxmlformats.org/drawingml/2006/main">
             <a:r>
-              <a:t>讲义位置：本课讲义；见逐页母稿映射表</a:t>
+              <a:t>讲述与校准：</a:t>
             </a:r>
           </a:p>
           <a:p xmlns:a="http://schemas.openxmlformats.org/drawingml/2006/main">
@@ -1028,32 +833,17 @@
           </a:p>
           <a:p xmlns:a="http://schemas.openxmlformats.org/drawingml/2006/main">
             <a:r>
-              <a:t>屏显核对：</a:t>
-            </a:r>
-          </a:p>
-          <a:p xmlns:a="http://schemas.openxmlformats.org/drawingml/2006/main">
-            <a:r>
-              <a:t>打开 report.md、结论追踪记录与 ai-usage-log.md。</a:t>
-            </a:r>
-          </a:p>
-          <a:p xmlns:a="http://schemas.openxmlformats.org/drawingml/2006/main">
-            <a:r>
               <a:t/>
             </a:r>
           </a:p>
           <a:p xmlns:a="http://schemas.openxmlformats.org/drawingml/2006/main">
             <a:r>
-              <a:t>追踪：C1 → 评价报告 → 逐项标注 → 源文本与输出。</a:t>
-            </a:r>
-          </a:p>
-          <a:p xmlns:a="http://schemas.openxmlformats.org/drawingml/2006/main">
-            <a:r>
-              <a:t>强度：Q1 包内方向一致；H1/A2 未决，T03 负向。</a:t>
-            </a:r>
-          </a:p>
-          <a:p xmlns:a="http://schemas.openxmlformats.org/drawingml/2006/main">
-            <a:r>
-              <a:t>披露：固定输出回放；其他 AI 辅助使用另据实记录。</a:t>
+              <a:t>学生动作：</a:t>
+            </a:r>
+          </a:p>
+          <a:p xmlns:a="http://schemas.openxmlformats.org/drawingml/2006/main">
+            <a:r>
+              <a:t>依据本页方法检查本人项目；按需参考。</a:t>
             </a:r>
           </a:p>
           <a:p xmlns:a="http://schemas.openxmlformats.org/drawingml/2006/main">
@@ -1063,7 +853,7 @@
           </a:p>
           <a:p xmlns:a="http://schemas.openxmlformats.org/drawingml/2006/main">
             <a:r>
-              <a:t>完成标志：同伴能沿主张反查一次。</a:t>
+              <a:t>课堂安排：按本稿下方 90 分钟教学路由安排；此页不另占独立时段。</a:t>
             </a:r>
           </a:p>
           <a:p xmlns:a="http://schemas.openxmlformats.org/drawingml/2006/main">
@@ -1073,87 +863,12 @@
           </a:p>
           <a:p xmlns:a="http://schemas.openxmlformats.org/drawingml/2006/main">
             <a:r>
-              <a:t>教师讲述：</a:t>
-            </a:r>
-          </a:p>
-          <a:p xmlns:a="http://schemas.openxmlformats.org/drawingml/2006/main">
-            <a:r>
-              <a:t>实践停留页。个人实践结束前提醒学生保存文件。</a:t>
-            </a:r>
-          </a:p>
-          <a:p xmlns:a="http://schemas.openxmlformats.org/drawingml/2006/main">
-            <a:r>
-              <a:t/>
-            </a:r>
-          </a:p>
-          <a:p xmlns:a="http://schemas.openxmlformats.org/drawingml/2006/main">
-            <a:r>
-              <a:t>学生动作：</a:t>
-            </a:r>
-          </a:p>
-          <a:p xmlns:a="http://schemas.openxmlformats.org/drawingml/2006/main">
-            <a:r>
-              <a:t/>
-            </a:r>
-          </a:p>
-          <a:p xmlns:a="http://schemas.openxmlformats.org/drawingml/2006/main">
-            <a:r>
-              <a:t/>
-            </a:r>
-          </a:p>
-          <a:p xmlns:a="http://schemas.openxmlformats.org/drawingml/2006/main">
-            <a:r>
-              <a:t>来源与边界：</a:t>
-            </a:r>
-          </a:p>
-          <a:p xmlns:a="http://schemas.openxmlformats.org/drawingml/2006/main">
-            <a:r>
-              <a:t>讲义 §三—四、§八练习。</a:t>
-            </a:r>
-          </a:p>
-          <a:p xmlns:a="http://schemas.openxmlformats.org/drawingml/2006/main">
-            <a:r>
-              <a:t/>
-            </a:r>
-          </a:p>
-          <a:p xmlns:a="http://schemas.openxmlformats.org/drawingml/2006/main">
-            <a:r>
               <a:t>[Sources]</a:t>
             </a:r>
           </a:p>
           <a:p xmlns:a="http://schemas.openxmlformats.org/drawingml/2006/main">
             <a:r>
-              <a:t/>
-            </a:r>
-          </a:p>
-          <a:p xmlns:a="http://schemas.openxmlformats.org/drawingml/2006/main">
-            <a:r>
-              <a:t>- https://press.uchicago.edu/ucp/books/book/chicago/C/bo215874008</a:t>
-            </a:r>
-          </a:p>
-          <a:p xmlns:a="http://schemas.openxmlformats.org/drawingml/2006/main">
-            <a:r>
-              <a:t/>
-            </a:r>
-          </a:p>
-          <a:p xmlns:a="http://schemas.openxmlformats.org/drawingml/2006/main">
-            <a:r>
-              <a:t>- 本课 handout.md 与 slides.md</a:t>
-            </a:r>
-          </a:p>
-          <a:p xmlns:a="http://schemas.openxmlformats.org/drawingml/2006/main">
-            <a:r>
-              <a:t/>
-            </a:r>
-          </a:p>
-          <a:p xmlns:a="http://schemas.openxmlformats.org/drawingml/2006/main">
-            <a:r>
-              <a:t>- ../../course/reading-card-case.md</a:t>
-            </a:r>
-          </a:p>
-          <a:p xmlns:a="http://schemas.openxmlformats.org/drawingml/2006/main">
-            <a:r>
-              <a:t/>
+              <a:t>本课 handout.md、judgment-task.md；../../course/judgment-path.md。</a:t>
             </a:r>
           </a:p>
           <a:p xmlns:a="http://schemas.openxmlformats.org/drawingml/2006/main">
@@ -1238,7 +953,7 @@
           </a:p>
           <a:p xmlns:a="http://schemas.openxmlformats.org/drawingml/2006/main">
             <a:r>
-              <a:t>讲义位置：本课讲义；见逐页母稿映射表</a:t>
+              <a:t>讲述与校准：</a:t>
             </a:r>
           </a:p>
           <a:p xmlns:a="http://schemas.openxmlformats.org/drawingml/2006/main">
@@ -1248,22 +963,17 @@
           </a:p>
           <a:p xmlns:a="http://schemas.openxmlformats.org/drawingml/2006/main">
             <a:r>
-              <a:t>屏显核对：</a:t>
-            </a:r>
-          </a:p>
-          <a:p xmlns:a="http://schemas.openxmlformats.org/drawingml/2006/main">
-            <a:r>
-              <a:t>主张 → 证据／运行记录 → 上游判断</a:t>
-            </a:r>
-          </a:p>
-          <a:p xmlns:a="http://schemas.openxmlformats.org/drawingml/2006/main">
-            <a:r>
               <a:t/>
             </a:r>
           </a:p>
           <a:p xmlns:a="http://schemas.openxmlformats.org/drawingml/2006/main">
             <a:r>
-              <a:t>能否找到？有没有越界？是否遗漏失败、冲突或 AI 核验？</a:t>
+              <a:t>学生动作：</a:t>
+            </a:r>
+          </a:p>
+          <a:p xmlns:a="http://schemas.openxmlformats.org/drawingml/2006/main">
+            <a:r>
+              <a:t>依据本页方法检查本人项目；按需参考。</a:t>
             </a:r>
           </a:p>
           <a:p xmlns:a="http://schemas.openxmlformats.org/drawingml/2006/main">
@@ -1273,7 +983,7 @@
           </a:p>
           <a:p xmlns:a="http://schemas.openxmlformats.org/drawingml/2006/main">
             <a:r>
-              <a:t>作者记录处理决定与真实理由；采纳、澄清、补证、保留异议或暂缓，不凑类别。</a:t>
+              <a:t>课堂安排：按本稿下方 90 分钟教学路由安排；此页不另占独立时段。</a:t>
             </a:r>
           </a:p>
           <a:p xmlns:a="http://schemas.openxmlformats.org/drawingml/2006/main">
@@ -1283,87 +993,12 @@
           </a:p>
           <a:p xmlns:a="http://schemas.openxmlformats.org/drawingml/2006/main">
             <a:r>
-              <a:t>教师讲述：</a:t>
-            </a:r>
-          </a:p>
-          <a:p xmlns:a="http://schemas.openxmlformats.org/drawingml/2006/main">
-            <a:r>
-              <a:t>两人互查。反馈可以采纳、澄清、补证、保留异议或暂缓，但必须指出具体位置。</a:t>
-            </a:r>
-          </a:p>
-          <a:p xmlns:a="http://schemas.openxmlformats.org/drawingml/2006/main">
-            <a:r>
-              <a:t/>
-            </a:r>
-          </a:p>
-          <a:p xmlns:a="http://schemas.openxmlformats.org/drawingml/2006/main">
-            <a:r>
-              <a:t>学生动作：</a:t>
-            </a:r>
-          </a:p>
-          <a:p xmlns:a="http://schemas.openxmlformats.org/drawingml/2006/main">
-            <a:r>
-              <a:t/>
-            </a:r>
-          </a:p>
-          <a:p xmlns:a="http://schemas.openxmlformats.org/drawingml/2006/main">
-            <a:r>
-              <a:t/>
-            </a:r>
-          </a:p>
-          <a:p xmlns:a="http://schemas.openxmlformats.org/drawingml/2006/main">
-            <a:r>
-              <a:t>来源与边界：</a:t>
-            </a:r>
-          </a:p>
-          <a:p xmlns:a="http://schemas.openxmlformats.org/drawingml/2006/main">
-            <a:r>
-              <a:t>讲义练习；assignments.md 第 15 课反馈口径。</a:t>
-            </a:r>
-          </a:p>
-          <a:p xmlns:a="http://schemas.openxmlformats.org/drawingml/2006/main">
-            <a:r>
-              <a:t/>
-            </a:r>
-          </a:p>
-          <a:p xmlns:a="http://schemas.openxmlformats.org/drawingml/2006/main">
-            <a:r>
               <a:t>[Sources]</a:t>
             </a:r>
           </a:p>
           <a:p xmlns:a="http://schemas.openxmlformats.org/drawingml/2006/main">
             <a:r>
-              <a:t/>
-            </a:r>
-          </a:p>
-          <a:p xmlns:a="http://schemas.openxmlformats.org/drawingml/2006/main">
-            <a:r>
-              <a:t>- https://press.uchicago.edu/ucp/books/book/chicago/C/bo215874008</a:t>
-            </a:r>
-          </a:p>
-          <a:p xmlns:a="http://schemas.openxmlformats.org/drawingml/2006/main">
-            <a:r>
-              <a:t/>
-            </a:r>
-          </a:p>
-          <a:p xmlns:a="http://schemas.openxmlformats.org/drawingml/2006/main">
-            <a:r>
-              <a:t>- 本课 handout.md 与 slides.md</a:t>
-            </a:r>
-          </a:p>
-          <a:p xmlns:a="http://schemas.openxmlformats.org/drawingml/2006/main">
-            <a:r>
-              <a:t/>
-            </a:r>
-          </a:p>
-          <a:p xmlns:a="http://schemas.openxmlformats.org/drawingml/2006/main">
-            <a:r>
-              <a:t>- ../../course/reading-card-case.md</a:t>
-            </a:r>
-          </a:p>
-          <a:p xmlns:a="http://schemas.openxmlformats.org/drawingml/2006/main">
-            <a:r>
-              <a:t/>
+              <a:t>本课 handout.md、judgment-task.md；../../course/judgment-path.md。</a:t>
             </a:r>
           </a:p>
           <a:p xmlns:a="http://schemas.openxmlformats.org/drawingml/2006/main">
@@ -1448,7 +1083,7 @@
           </a:p>
           <a:p xmlns:a="http://schemas.openxmlformats.org/drawingml/2006/main">
             <a:r>
-              <a:t>讲义位置：本课讲义；见逐页母稿映射表</a:t>
+              <a:t>讲述与校准：</a:t>
             </a:r>
           </a:p>
           <a:p xmlns:a="http://schemas.openxmlformats.org/drawingml/2006/main">
@@ -1458,22 +1093,17 @@
           </a:p>
           <a:p xmlns:a="http://schemas.openxmlformats.org/drawingml/2006/main">
             <a:r>
-              <a:t>屏显核对：</a:t>
-            </a:r>
-          </a:p>
-          <a:p xmlns:a="http://schemas.openxmlformats.org/drawingml/2006/main">
-            <a:r>
-              <a:t>结果 → 主张 → 证据 → 推理 → 边界</a:t>
-            </a:r>
-          </a:p>
-          <a:p xmlns:a="http://schemas.openxmlformats.org/drawingml/2006/main">
-            <a:r>
               <a:t/>
             </a:r>
           </a:p>
           <a:p xmlns:a="http://schemas.openxmlformats.org/drawingml/2006/main">
             <a:r>
-              <a:t>写作可以重组事实，不能扩大证据支持范围。</a:t>
+              <a:t>学生动作：</a:t>
+            </a:r>
+          </a:p>
+          <a:p xmlns:a="http://schemas.openxmlformats.org/drawingml/2006/main">
+            <a:r>
+              <a:t>依据本页方法检查本人项目；按需参考。</a:t>
             </a:r>
           </a:p>
           <a:p xmlns:a="http://schemas.openxmlformats.org/drawingml/2006/main">
@@ -1483,7 +1113,7 @@
           </a:p>
           <a:p xmlns:a="http://schemas.openxmlformats.org/drawingml/2006/main">
             <a:r>
-              <a:t>反查：运行记录、上游判断与替代解释。</a:t>
+              <a:t>课堂安排：按本稿下方 90 分钟教学路由安排；此页不另占独立时段。</a:t>
             </a:r>
           </a:p>
           <a:p xmlns:a="http://schemas.openxmlformats.org/drawingml/2006/main">
@@ -1493,87 +1123,12 @@
           </a:p>
           <a:p xmlns:a="http://schemas.openxmlformats.org/drawingml/2006/main">
             <a:r>
-              <a:t>教师讲述：</a:t>
-            </a:r>
-          </a:p>
-          <a:p xmlns:a="http://schemas.openxmlformats.org/drawingml/2006/main">
-            <a:r>
-              <a:t>退出动作：学生说出本稿最需要补的一处证据或边界。</a:t>
-            </a:r>
-          </a:p>
-          <a:p xmlns:a="http://schemas.openxmlformats.org/drawingml/2006/main">
-            <a:r>
-              <a:t/>
-            </a:r>
-          </a:p>
-          <a:p xmlns:a="http://schemas.openxmlformats.org/drawingml/2006/main">
-            <a:r>
-              <a:t>学生动作：</a:t>
-            </a:r>
-          </a:p>
-          <a:p xmlns:a="http://schemas.openxmlformats.org/drawingml/2006/main">
-            <a:r>
-              <a:t/>
-            </a:r>
-          </a:p>
-          <a:p xmlns:a="http://schemas.openxmlformats.org/drawingml/2006/main">
-            <a:r>
-              <a:t/>
-            </a:r>
-          </a:p>
-          <a:p xmlns:a="http://schemas.openxmlformats.org/drawingml/2006/main">
-            <a:r>
-              <a:t>来源与边界：</a:t>
-            </a:r>
-          </a:p>
-          <a:p xmlns:a="http://schemas.openxmlformats.org/drawingml/2006/main">
-            <a:r>
-              <a:t>Booth et al.；AGENTS.md；讲义总结。</a:t>
-            </a:r>
-          </a:p>
-          <a:p xmlns:a="http://schemas.openxmlformats.org/drawingml/2006/main">
-            <a:r>
-              <a:t/>
-            </a:r>
-          </a:p>
-          <a:p xmlns:a="http://schemas.openxmlformats.org/drawingml/2006/main">
-            <a:r>
               <a:t>[Sources]</a:t>
             </a:r>
           </a:p>
           <a:p xmlns:a="http://schemas.openxmlformats.org/drawingml/2006/main">
             <a:r>
-              <a:t/>
-            </a:r>
-          </a:p>
-          <a:p xmlns:a="http://schemas.openxmlformats.org/drawingml/2006/main">
-            <a:r>
-              <a:t>- https://press.uchicago.edu/ucp/books/book/chicago/C/bo215874008</a:t>
-            </a:r>
-          </a:p>
-          <a:p xmlns:a="http://schemas.openxmlformats.org/drawingml/2006/main">
-            <a:r>
-              <a:t/>
-            </a:r>
-          </a:p>
-          <a:p xmlns:a="http://schemas.openxmlformats.org/drawingml/2006/main">
-            <a:r>
-              <a:t>- 本课 handout.md 与 slides.md</a:t>
-            </a:r>
-          </a:p>
-          <a:p xmlns:a="http://schemas.openxmlformats.org/drawingml/2006/main">
-            <a:r>
-              <a:t/>
-            </a:r>
-          </a:p>
-          <a:p xmlns:a="http://schemas.openxmlformats.org/drawingml/2006/main">
-            <a:r>
-              <a:t>- ../../course/reading-card-case.md</a:t>
-            </a:r>
-          </a:p>
-          <a:p xmlns:a="http://schemas.openxmlformats.org/drawingml/2006/main">
-            <a:r>
-              <a:t/>
+              <a:t>本课 handout.md、judgment-task.md；../../course/judgment-path.md。</a:t>
             </a:r>
           </a:p>
           <a:p xmlns:a="http://schemas.openxmlformats.org/drawingml/2006/main">
@@ -1658,7 +1213,7 @@
           </a:p>
           <a:p xmlns:a="http://schemas.openxmlformats.org/drawingml/2006/main">
             <a:r>
-              <a:t>讲义位置：本课讲义；见逐页母稿映射表</a:t>
+              <a:t>讲述与校准：</a:t>
             </a:r>
           </a:p>
           <a:p xmlns:a="http://schemas.openxmlformats.org/drawingml/2006/main">
@@ -1668,22 +1223,17 @@
           </a:p>
           <a:p xmlns:a="http://schemas.openxmlformats.org/drawingml/2006/main">
             <a:r>
-              <a:t>屏显核对：</a:t>
-            </a:r>
-          </a:p>
-          <a:p xmlns:a="http://schemas.openxmlformats.org/drawingml/2006/main">
-            <a:r>
-              <a:t>report.md：问题／方法／结果／讨论。</a:t>
-            </a:r>
-          </a:p>
-          <a:p xmlns:a="http://schemas.openxmlformats.org/drawingml/2006/main">
-            <a:r>
               <a:t/>
             </a:r>
           </a:p>
           <a:p xmlns:a="http://schemas.openxmlformats.org/drawingml/2006/main">
             <a:r>
-              <a:t>用 IMRaD 或等价结构安排已有材料，写清一至两条可信贡献；核验引用和 AI 披露，保留失败、冲突与待验证状态。</a:t>
+              <a:t>学生动作：</a:t>
+            </a:r>
+          </a:p>
+          <a:p xmlns:a="http://schemas.openxmlformats.org/drawingml/2006/main">
+            <a:r>
+              <a:t>依据本页方法检查本人项目；按需参考。</a:t>
             </a:r>
           </a:p>
           <a:p xmlns:a="http://schemas.openxmlformats.org/drawingml/2006/main">
@@ -1693,7 +1243,7 @@
           </a:p>
           <a:p xmlns:a="http://schemas.openxmlformats.org/drawingml/2006/main">
             <a:r>
-              <a:t>课后补全，不新增独立作业。</a:t>
+              <a:t>课堂安排：按本稿下方 90 分钟教学路由安排；此页不另占独立时段。</a:t>
             </a:r>
           </a:p>
           <a:p xmlns:a="http://schemas.openxmlformats.org/drawingml/2006/main">
@@ -1703,87 +1253,12 @@
           </a:p>
           <a:p xmlns:a="http://schemas.openxmlformats.org/drawingml/2006/main">
             <a:r>
-              <a:t>教师讲述：</a:t>
-            </a:r>
-          </a:p>
-          <a:p xmlns:a="http://schemas.openxmlformats.org/drawingml/2006/main">
-            <a:r>
-              <a:t>删减内容不全部转成必读。学生只列一项最优先补全动作。</a:t>
-            </a:r>
-          </a:p>
-          <a:p xmlns:a="http://schemas.openxmlformats.org/drawingml/2006/main">
-            <a:r>
-              <a:t/>
-            </a:r>
-          </a:p>
-          <a:p xmlns:a="http://schemas.openxmlformats.org/drawingml/2006/main">
-            <a:r>
-              <a:t>学生动作：</a:t>
-            </a:r>
-          </a:p>
-          <a:p xmlns:a="http://schemas.openxmlformats.org/drawingml/2006/main">
-            <a:r>
-              <a:t/>
-            </a:r>
-          </a:p>
-          <a:p xmlns:a="http://schemas.openxmlformats.org/drawingml/2006/main">
-            <a:r>
-              <a:t/>
-            </a:r>
-          </a:p>
-          <a:p xmlns:a="http://schemas.openxmlformats.org/drawingml/2006/main">
-            <a:r>
-              <a:t>来源与边界：</a:t>
-            </a:r>
-          </a:p>
-          <a:p xmlns:a="http://schemas.openxmlformats.org/drawingml/2006/main">
-            <a:r>
-              <a:t>讲义 §二—七；assignments.md。</a:t>
-            </a:r>
-          </a:p>
-          <a:p xmlns:a="http://schemas.openxmlformats.org/drawingml/2006/main">
-            <a:r>
-              <a:t/>
-            </a:r>
-          </a:p>
-          <a:p xmlns:a="http://schemas.openxmlformats.org/drawingml/2006/main">
-            <a:r>
               <a:t>[Sources]</a:t>
             </a:r>
           </a:p>
           <a:p xmlns:a="http://schemas.openxmlformats.org/drawingml/2006/main">
             <a:r>
-              <a:t/>
-            </a:r>
-          </a:p>
-          <a:p xmlns:a="http://schemas.openxmlformats.org/drawingml/2006/main">
-            <a:r>
-              <a:t>- https://press.uchicago.edu/ucp/books/book/chicago/C/bo215874008</a:t>
-            </a:r>
-          </a:p>
-          <a:p xmlns:a="http://schemas.openxmlformats.org/drawingml/2006/main">
-            <a:r>
-              <a:t/>
-            </a:r>
-          </a:p>
-          <a:p xmlns:a="http://schemas.openxmlformats.org/drawingml/2006/main">
-            <a:r>
-              <a:t>- 本课 handout.md 与 slides.md</a:t>
-            </a:r>
-          </a:p>
-          <a:p xmlns:a="http://schemas.openxmlformats.org/drawingml/2006/main">
-            <a:r>
-              <a:t/>
-            </a:r>
-          </a:p>
-          <a:p xmlns:a="http://schemas.openxmlformats.org/drawingml/2006/main">
-            <a:r>
-              <a:t>- ../../course/reading-card-case.md</a:t>
-            </a:r>
-          </a:p>
-          <a:p xmlns:a="http://schemas.openxmlformats.org/drawingml/2006/main">
-            <a:r>
-              <a:t/>
+              <a:t>本课 handout.md、judgment-task.md；../../course/judgment-path.md。</a:t>
             </a:r>
           </a:p>
           <a:p xmlns:a="http://schemas.openxmlformats.org/drawingml/2006/main">
@@ -1858,7 +1333,7 @@
           <a:lstStyle xmlns:a="http://schemas.openxmlformats.org/drawingml/2006/main"/>
           <a:p xmlns:a="http://schemas.openxmlformats.org/drawingml/2006/main">
             <a:r>
-              <a:t>页面：P16 带着这份初稿进入真实评审</a:t>
+              <a:t>页面：P16 保留本课决定，准备下一课输入</a:t>
             </a:r>
           </a:p>
           <a:p xmlns:a="http://schemas.openxmlformats.org/drawingml/2006/main">
@@ -1868,7 +1343,12 @@
           </a:p>
           <a:p xmlns:a="http://schemas.openxmlformats.org/drawingml/2006/main">
             <a:r>
-              <a:t>讲义位置：本课讲义；见逐页母稿映射表</a:t>
+              <a:t>讲述与校准：</a:t>
+            </a:r>
+          </a:p>
+          <a:p xmlns:a="http://schemas.openxmlformats.org/drawingml/2006/main">
+            <a:r>
+              <a:t>用已有材料填入短报告骨架、修一个证据缺口；不另做实验或长篇背景综述。 每课课外最多60分钟；详见讲义。</a:t>
             </a:r>
           </a:p>
           <a:p xmlns:a="http://schemas.openxmlformats.org/drawingml/2006/main">
@@ -1878,12 +1358,12 @@
           </a:p>
           <a:p xmlns:a="http://schemas.openxmlformats.org/drawingml/2006/main">
             <a:r>
-              <a:t>屏显核对：</a:t>
-            </a:r>
-          </a:p>
-          <a:p xmlns:a="http://schemas.openxmlformats.org/drawingml/2006/main">
-            <a:r>
-              <a:t>第 15 课输入：report.md 初版、结论追踪记录、AI 使用披露摘要、可定位证据与运行记录。</a:t>
+              <a:t>学生动作：</a:t>
+            </a:r>
+          </a:p>
+          <a:p xmlns:a="http://schemas.openxmlformats.org/drawingml/2006/main">
+            <a:r>
+              <a:t>定位实际工件与下一项动作；按既定预算收口。</a:t>
             </a:r>
           </a:p>
           <a:p xmlns:a="http://schemas.openxmlformats.org/drawingml/2006/main">
@@ -1893,7 +1373,7 @@
           </a:p>
           <a:p xmlns:a="http://schemas.openxmlformats.org/drawingml/2006/main">
             <a:r>
-              <a:t>评审对象是论证链。请确认同伴能够打开这些材料。</a:t>
+              <a:t>课堂安排：按本稿下方 90 分钟教学路由安排；此页不另占独立时段。</a:t>
             </a:r>
           </a:p>
           <a:p xmlns:a="http://schemas.openxmlformats.org/drawingml/2006/main">
@@ -1903,87 +1383,12 @@
           </a:p>
           <a:p xmlns:a="http://schemas.openxmlformats.org/drawingml/2006/main">
             <a:r>
-              <a:t>教师讲述：</a:t>
-            </a:r>
-          </a:p>
-          <a:p xmlns:a="http://schemas.openxmlformats.org/drawingml/2006/main">
-            <a:r>
-              <a:t>明确第 14 课输出可直接作为第 15 课输入。</a:t>
-            </a:r>
-          </a:p>
-          <a:p xmlns:a="http://schemas.openxmlformats.org/drawingml/2006/main">
-            <a:r>
-              <a:t/>
-            </a:r>
-          </a:p>
-          <a:p xmlns:a="http://schemas.openxmlformats.org/drawingml/2006/main">
-            <a:r>
-              <a:t>学生动作：</a:t>
-            </a:r>
-          </a:p>
-          <a:p xmlns:a="http://schemas.openxmlformats.org/drawingml/2006/main">
-            <a:r>
-              <a:t/>
-            </a:r>
-          </a:p>
-          <a:p xmlns:a="http://schemas.openxmlformats.org/drawingml/2006/main">
-            <a:r>
-              <a:t/>
-            </a:r>
-          </a:p>
-          <a:p xmlns:a="http://schemas.openxmlformats.org/drawingml/2006/main">
-            <a:r>
-              <a:t>来源与边界：</a:t>
-            </a:r>
-          </a:p>
-          <a:p xmlns:a="http://schemas.openxmlformats.org/drawingml/2006/main">
-            <a:r>
-              <a:t>第 15 课 handout；assignments.md。</a:t>
-            </a:r>
-          </a:p>
-          <a:p xmlns:a="http://schemas.openxmlformats.org/drawingml/2006/main">
-            <a:r>
-              <a:t/>
-            </a:r>
-          </a:p>
-          <a:p xmlns:a="http://schemas.openxmlformats.org/drawingml/2006/main">
-            <a:r>
               <a:t>[Sources]</a:t>
             </a:r>
           </a:p>
           <a:p xmlns:a="http://schemas.openxmlformats.org/drawingml/2006/main">
             <a:r>
-              <a:t/>
-            </a:r>
-          </a:p>
-          <a:p xmlns:a="http://schemas.openxmlformats.org/drawingml/2006/main">
-            <a:r>
-              <a:t>- https://press.uchicago.edu/ucp/books/book/chicago/C/bo215874008</a:t>
-            </a:r>
-          </a:p>
-          <a:p xmlns:a="http://schemas.openxmlformats.org/drawingml/2006/main">
-            <a:r>
-              <a:t/>
-            </a:r>
-          </a:p>
-          <a:p xmlns:a="http://schemas.openxmlformats.org/drawingml/2006/main">
-            <a:r>
-              <a:t>- 本课 handout.md 与 slides.md</a:t>
-            </a:r>
-          </a:p>
-          <a:p xmlns:a="http://schemas.openxmlformats.org/drawingml/2006/main">
-            <a:r>
-              <a:t/>
-            </a:r>
-          </a:p>
-          <a:p xmlns:a="http://schemas.openxmlformats.org/drawingml/2006/main">
-            <a:r>
-              <a:t>- ../../course/reading-card-case.md</a:t>
-            </a:r>
-          </a:p>
-          <a:p xmlns:a="http://schemas.openxmlformats.org/drawingml/2006/main">
-            <a:r>
-              <a:t/>
+              <a:t>本课 handout.md、judgment-task.md；../../course/judgment-path.md。教学构造仅用于方法判断；本人结果以实际记录为准。</a:t>
             </a:r>
           </a:p>
           <a:p xmlns:a="http://schemas.openxmlformats.org/drawingml/2006/main">
@@ -2068,7 +1473,7 @@
           </a:p>
           <a:p xmlns:a="http://schemas.openxmlformats.org/drawingml/2006/main">
             <a:r>
-              <a:t>讲义位置：本课讲义；见逐页母稿映射表</a:t>
+              <a:t>讲述与校准：</a:t>
             </a:r>
           </a:p>
           <a:p xmlns:a="http://schemas.openxmlformats.org/drawingml/2006/main">
@@ -2078,22 +1483,17 @@
           </a:p>
           <a:p xmlns:a="http://schemas.openxmlformats.org/drawingml/2006/main">
             <a:r>
-              <a:t>屏显核对：</a:t>
-            </a:r>
-          </a:p>
-          <a:p xmlns:a="http://schemas.openxmlformats.org/drawingml/2006/main">
-            <a:r>
-              <a:t>一个论证段 → 一条结论追踪记录 → 一段 AI 披露摘要</a:t>
-            </a:r>
-          </a:p>
-          <a:p xmlns:a="http://schemas.openxmlformats.org/drawingml/2006/main">
-            <a:r>
               <a:t/>
             </a:r>
           </a:p>
           <a:p xmlns:a="http://schemas.openxmlformats.org/drawingml/2006/main">
             <a:r>
-              <a:t>课堂：完成最小工件；课后：补全 report.md；第 16 课：检查论证门。</a:t>
+              <a:t>学生动作：</a:t>
+            </a:r>
+          </a:p>
+          <a:p xmlns:a="http://schemas.openxmlformats.org/drawingml/2006/main">
+            <a:r>
+              <a:t>依据本页方法检查本人项目；按需参考。</a:t>
             </a:r>
           </a:p>
           <a:p xmlns:a="http://schemas.openxmlformats.org/drawingml/2006/main">
@@ -2103,12 +1503,7 @@
           </a:p>
           <a:p xmlns:a="http://schemas.openxmlformats.org/drawingml/2006/main">
             <a:r>
-              <a:t>教师讲述：</a:t>
-            </a:r>
-          </a:p>
-          <a:p xmlns:a="http://schemas.openxmlformats.org/drawingml/2006/main">
-            <a:r>
-              <a:t>让学生写下本课选择的结果编号或文件位置。</a:t>
+              <a:t>课堂安排：按本稿下方 90 分钟教学路由安排；此页不另占独立时段。</a:t>
             </a:r>
           </a:p>
           <a:p xmlns:a="http://schemas.openxmlformats.org/drawingml/2006/main">
@@ -2118,127 +1513,12 @@
           </a:p>
           <a:p xmlns:a="http://schemas.openxmlformats.org/drawingml/2006/main">
             <a:r>
-              <a:t>学生动作：</a:t>
-            </a:r>
-          </a:p>
-          <a:p xmlns:a="http://schemas.openxmlformats.org/drawingml/2006/main">
-            <a:r>
-              <a:t/>
-            </a:r>
-          </a:p>
-          <a:p xmlns:a="http://schemas.openxmlformats.org/drawingml/2006/main">
-            <a:r>
-              <a:t/>
-            </a:r>
-          </a:p>
-          <a:p xmlns:a="http://schemas.openxmlformats.org/drawingml/2006/main">
-            <a:r>
-              <a:t>本课板书、诊断与串词：</a:t>
-            </a:r>
-          </a:p>
-          <a:p xmlns:a="http://schemas.openxmlformats.org/drawingml/2006/main">
-            <a:r>
-              <a:t>本节替换同类口头提示，不增加既有时段。开场诊断嵌入现有开场/回顾，后续再沿原实践时段操作。</a:t>
-            </a:r>
-          </a:p>
-          <a:p xmlns:a="http://schemas.openxmlformats.org/drawingml/2006/main">
-            <a:r>
-              <a:t/>
-            </a:r>
-          </a:p>
-          <a:p xmlns:a="http://schemas.openxmlformats.org/drawingml/2006/main">
-            <a:r>
-              <a:t>- **板书主线**：主张 → 证据 → 推理 → 边界；反向追踪。</a:t>
-            </a:r>
-          </a:p>
-          <a:p xmlns:a="http://schemas.openxmlformats.org/drawingml/2006/main">
-            <a:r>
-              <a:t>- **诊断问题**：两个总数允许写“机制已证明”吗？</a:t>
-            </a:r>
-          </a:p>
-          <a:p xmlns:a="http://schemas.openxmlformats.org/drawingml/2006/main">
-            <a:r>
-              <a:t>- **预期回答**：只支持构造包内结果方向，机制未决。</a:t>
-            </a:r>
-          </a:p>
-          <a:p xmlns:a="http://schemas.openxmlformats.org/drawingml/2006/main">
-            <a:r>
-              <a:t>- **常见误答后的追问**：先修改越界主句，不能仅追加“待验证”作尾注。</a:t>
-            </a:r>
-          </a:p>
-          <a:p xmlns:a="http://schemas.openxmlformats.org/drawingml/2006/main">
-            <a:r>
-              <a:t>- **过渡串词**：“这份带证据和缺口的初稿，才是下一课真实评审对象。”</a:t>
-            </a:r>
-          </a:p>
-          <a:p xmlns:a="http://schemas.openxmlformats.org/drawingml/2006/main">
-            <a:r>
-              <a:t>- **当堂最小产出**：一个四句段落、一条追踪记录、一段真实披露。</a:t>
-            </a:r>
-          </a:p>
-          <a:p xmlns:a="http://schemas.openxmlformats.org/drawingml/2006/main">
-            <a:r>
-              <a:t>- **退出记录**：写“已完成的动作、本人项目仍缺的证据/工件、下次补齐位置”。使用教师包时标明课堂方法练习，不能据此宣称本人研究门通过；正式提交课次仍为第 6、9、13、16 课。</a:t>
-            </a:r>
-          </a:p>
-          <a:p xmlns:a="http://schemas.openxmlformats.org/drawingml/2006/main">
-            <a:r>
-              <a:t/>
-            </a:r>
-          </a:p>
-          <a:p xmlns:a="http://schemas.openxmlformats.org/drawingml/2006/main">
-            <a:r>
-              <a:t>来源与边界：</a:t>
-            </a:r>
-          </a:p>
-          <a:p xmlns:a="http://schemas.openxmlformats.org/drawingml/2006/main">
-            <a:r>
-              <a:t>讲义“本课、课后与研究门的边界”。</a:t>
-            </a:r>
-          </a:p>
-          <a:p xmlns:a="http://schemas.openxmlformats.org/drawingml/2006/main">
-            <a:r>
-              <a:t/>
-            </a:r>
-          </a:p>
-          <a:p xmlns:a="http://schemas.openxmlformats.org/drawingml/2006/main">
-            <a:r>
               <a:t>[Sources]</a:t>
             </a:r>
           </a:p>
           <a:p xmlns:a="http://schemas.openxmlformats.org/drawingml/2006/main">
             <a:r>
-              <a:t/>
-            </a:r>
-          </a:p>
-          <a:p xmlns:a="http://schemas.openxmlformats.org/drawingml/2006/main">
-            <a:r>
-              <a:t>- https://press.uchicago.edu/ucp/books/book/chicago/C/bo215874008</a:t>
-            </a:r>
-          </a:p>
-          <a:p xmlns:a="http://schemas.openxmlformats.org/drawingml/2006/main">
-            <a:r>
-              <a:t/>
-            </a:r>
-          </a:p>
-          <a:p xmlns:a="http://schemas.openxmlformats.org/drawingml/2006/main">
-            <a:r>
-              <a:t>- 本课 handout.md 与 slides.md</a:t>
-            </a:r>
-          </a:p>
-          <a:p xmlns:a="http://schemas.openxmlformats.org/drawingml/2006/main">
-            <a:r>
-              <a:t/>
-            </a:r>
-          </a:p>
-          <a:p xmlns:a="http://schemas.openxmlformats.org/drawingml/2006/main">
-            <a:r>
-              <a:t>- ../../course/reading-card-case.md</a:t>
-            </a:r>
-          </a:p>
-          <a:p xmlns:a="http://schemas.openxmlformats.org/drawingml/2006/main">
-            <a:r>
-              <a:t/>
+              <a:t>本课 handout.md、judgment-task.md；../../course/judgment-path.md。</a:t>
             </a:r>
           </a:p>
           <a:p xmlns:a="http://schemas.openxmlformats.org/drawingml/2006/main">
@@ -2313,7 +1593,7 @@
           <a:lstStyle xmlns:a="http://schemas.openxmlformats.org/drawingml/2006/main"/>
           <a:p xmlns:a="http://schemas.openxmlformats.org/drawingml/2006/main">
             <a:r>
-              <a:t>页面：P03 先选一个能反查的结果</a:t>
+              <a:t>页面：P03 结果表述与证据强度</a:t>
             </a:r>
           </a:p>
           <a:p xmlns:a="http://schemas.openxmlformats.org/drawingml/2006/main">
@@ -2323,7 +1603,12 @@
           </a:p>
           <a:p xmlns:a="http://schemas.openxmlformats.org/drawingml/2006/main">
             <a:r>
-              <a:t>讲义位置：handout.md §六、贯穿案例：从验证门材料到论文式短文初版</a:t>
+              <a:t>讲述与校准：</a:t>
+            </a:r>
+          </a:p>
+          <a:p xmlns:a="http://schemas.openxmlformats.org/drawingml/2006/main">
+            <a:r>
+              <a:t>先独立作答，再同伴比较；以下依据只在校准时揭示。</a:t>
             </a:r>
           </a:p>
           <a:p xmlns:a="http://schemas.openxmlformats.org/drawingml/2006/main">
@@ -2333,27 +1618,7 @@
           </a:p>
           <a:p xmlns:a="http://schemas.openxmlformats.org/drawingml/2006/main">
             <a:r>
-              <a:t>屏显核对：</a:t>
-            </a:r>
-          </a:p>
-          <a:p xmlns:a="http://schemas.openxmlformats.org/drawingml/2006/main">
-            <a:r>
-              <a:t>结果：构造小包总遗漏率 3/8 与 4/8。</a:t>
-            </a:r>
-          </a:p>
-          <a:p xmlns:a="http://schemas.openxmlformats.org/drawingml/2006/main">
-            <a:r>
-              <a:t>原始对象：T01–T03、输出原句与逐项标注。</a:t>
-            </a:r>
-          </a:p>
-          <a:p xmlns:a="http://schemas.openxmlformats.org/drawingml/2006/main">
-            <a:r>
-              <a:t>反例：T03。</a:t>
-            </a:r>
-          </a:p>
-          <a:p xmlns:a="http://schemas.openxmlformats.org/drawingml/2006/main">
-            <a:r>
-              <a:t>未决：H1/A2、其他质量与外推范围。</a:t>
+              <a:t>A 把描述扩为显著性、科研质量和机制因果，均缺证据；B 丢弃可复查的有限观察；C 范围合适但仍应补记录位置和上游选择。本人若研究校验器，应报告实际输入处理变化，而不沿用阅读卡效果措辞。</a:t>
             </a:r>
           </a:p>
           <a:p xmlns:a="http://schemas.openxmlformats.org/drawingml/2006/main">
@@ -2363,12 +1628,12 @@
           </a:p>
           <a:p xmlns:a="http://schemas.openxmlformats.org/drawingml/2006/main">
             <a:r>
-              <a:t>教师讲述：</a:t>
-            </a:r>
-          </a:p>
-          <a:p xmlns:a="http://schemas.openxmlformats.org/drawingml/2006/main">
-            <a:r>
-              <a:t>先定位结果记录再写段落。学生没有个人结果时可用教师包练习，但课后仍需迁移到本人研究。</a:t>
+              <a:t>学生动作：</a:t>
+            </a:r>
+          </a:p>
+          <a:p xmlns:a="http://schemas.openxmlformats.org/drawingml/2006/main">
+            <a:r>
+              <a:t>先独立写决定和证据，后同伴比较；校准后再回写。</a:t>
             </a:r>
           </a:p>
           <a:p xmlns:a="http://schemas.openxmlformats.org/drawingml/2006/main">
@@ -2378,12 +1643,7 @@
           </a:p>
           <a:p xmlns:a="http://schemas.openxmlformats.org/drawingml/2006/main">
             <a:r>
-              <a:t>学生动作：</a:t>
-            </a:r>
-          </a:p>
-          <a:p xmlns:a="http://schemas.openxmlformats.org/drawingml/2006/main">
-            <a:r>
-              <a:t>指出本人一个结果及其原始记录位置。</a:t>
+              <a:t>课堂安排：按本稿下方 90 分钟教学路由安排；此页不另占独立时段。</a:t>
             </a:r>
           </a:p>
           <a:p xmlns:a="http://schemas.openxmlformats.org/drawingml/2006/main">
@@ -2393,7 +1653,7 @@
           </a:p>
           <a:p xmlns:a="http://schemas.openxmlformats.org/drawingml/2006/main">
             <a:r>
-              <a:t>来源与边界：</a:t>
+              <a:t>[Sources]</a:t>
             </a:r>
           </a:p>
           <a:p xmlns:a="http://schemas.openxmlformats.org/drawingml/2006/main">
@@ -2408,42 +1668,7 @@
           </a:p>
           <a:p xmlns:a="http://schemas.openxmlformats.org/drawingml/2006/main">
             <a:r>
-              <a:t>[Sources]</a:t>
-            </a:r>
-          </a:p>
-          <a:p xmlns:a="http://schemas.openxmlformats.org/drawingml/2006/main">
-            <a:r>
-              <a:t/>
-            </a:r>
-          </a:p>
-          <a:p xmlns:a="http://schemas.openxmlformats.org/drawingml/2006/main">
-            <a:r>
-              <a:t>- https://press.uchicago.edu/ucp/books/book/chicago/C/bo215874008</a:t>
-            </a:r>
-          </a:p>
-          <a:p xmlns:a="http://schemas.openxmlformats.org/drawingml/2006/main">
-            <a:r>
-              <a:t/>
-            </a:r>
-          </a:p>
-          <a:p xmlns:a="http://schemas.openxmlformats.org/drawingml/2006/main">
-            <a:r>
-              <a:t>- 本课 handout.md 与 slides.md</a:t>
-            </a:r>
-          </a:p>
-          <a:p xmlns:a="http://schemas.openxmlformats.org/drawingml/2006/main">
-            <a:r>
-              <a:t/>
-            </a:r>
-          </a:p>
-          <a:p xmlns:a="http://schemas.openxmlformats.org/drawingml/2006/main">
-            <a:r>
-              <a:t>- ../../course/reading-card-case.md</a:t>
-            </a:r>
-          </a:p>
-          <a:p xmlns:a="http://schemas.openxmlformats.org/drawingml/2006/main">
-            <a:r>
-              <a:t/>
+              <a:t>本课 handout.md、judgment-task.md；../../course/judgment-path.md。教学构造仅用于方法判断；本人结果以实际记录为准。</a:t>
             </a:r>
           </a:p>
           <a:p xmlns:a="http://schemas.openxmlformats.org/drawingml/2006/main">
@@ -2528,7 +1753,7 @@
           </a:p>
           <a:p xmlns:a="http://schemas.openxmlformats.org/drawingml/2006/main">
             <a:r>
-              <a:t>讲义位置：本课讲义；见逐页母稿映射表</a:t>
+              <a:t>讲述与校准：</a:t>
             </a:r>
           </a:p>
           <a:p xmlns:a="http://schemas.openxmlformats.org/drawingml/2006/main">
@@ -2538,42 +1763,17 @@
           </a:p>
           <a:p xmlns:a="http://schemas.openxmlformats.org/drawingml/2006/main">
             <a:r>
-              <a:t>屏显核对：</a:t>
-            </a:r>
-          </a:p>
-          <a:p xmlns:a="http://schemas.openxmlformats.org/drawingml/2006/main">
-            <a:r>
-              <a:t>主张：本构造包中，阅读卡组总遗漏率较低。</a:t>
-            </a:r>
-          </a:p>
-          <a:p xmlns:a="http://schemas.openxmlformats.org/drawingml/2006/main">
-            <a:r>
-              <a:t>证据：3/8 与 4/8，可反查逐项标注。</a:t>
-            </a:r>
-          </a:p>
-          <a:p xmlns:a="http://schemas.openxmlformats.org/drawingml/2006/main">
-            <a:r>
-              <a:t>推理：汇总方向与 Q1 预测一致。</a:t>
-            </a:r>
-          </a:p>
-          <a:p xmlns:a="http://schemas.openxmlformats.org/drawingml/2006/main">
-            <a:r>
-              <a:t>边界：H1/A2 未区分，其他质量未测，保留 T03 负例。</a:t>
-            </a:r>
-          </a:p>
-          <a:p xmlns:a="http://schemas.openxmlformats.org/drawingml/2006/main">
-            <a:r>
               <a:t/>
             </a:r>
           </a:p>
           <a:p xmlns:a="http://schemas.openxmlformats.org/drawingml/2006/main">
             <a:r>
-              <a:t>教师讲述：</a:t>
-            </a:r>
-          </a:p>
-          <a:p xmlns:a="http://schemas.openxmlformats.org/drawingml/2006/main">
-            <a:r>
-              <a:t>IMRaD 只用于定位这些部件，不另讲一套填表规则。</a:t>
+              <a:t>学生动作：</a:t>
+            </a:r>
+          </a:p>
+          <a:p xmlns:a="http://schemas.openxmlformats.org/drawingml/2006/main">
+            <a:r>
+              <a:t>依据本页方法检查本人项目；按需参考。</a:t>
             </a:r>
           </a:p>
           <a:p xmlns:a="http://schemas.openxmlformats.org/drawingml/2006/main">
@@ -2583,7 +1783,7 @@
           </a:p>
           <a:p xmlns:a="http://schemas.openxmlformats.org/drawingml/2006/main">
             <a:r>
-              <a:t>学生动作：</a:t>
+              <a:t>课堂安排：按本稿下方 90 分钟教学路由安排；此页不另占独立时段。</a:t>
             </a:r>
           </a:p>
           <a:p xmlns:a="http://schemas.openxmlformats.org/drawingml/2006/main">
@@ -2593,62 +1793,12 @@
           </a:p>
           <a:p xmlns:a="http://schemas.openxmlformats.org/drawingml/2006/main">
             <a:r>
-              <a:t/>
-            </a:r>
-          </a:p>
-          <a:p xmlns:a="http://schemas.openxmlformats.org/drawingml/2006/main">
-            <a:r>
-              <a:t>来源与边界：</a:t>
-            </a:r>
-          </a:p>
-          <a:p xmlns:a="http://schemas.openxmlformats.org/drawingml/2006/main">
-            <a:r>
-              <a:t>Booth et al., *The Craft of Research*, Ch. 5, 7；讲义 §二。</a:t>
-            </a:r>
-          </a:p>
-          <a:p xmlns:a="http://schemas.openxmlformats.org/drawingml/2006/main">
-            <a:r>
-              <a:t/>
-            </a:r>
-          </a:p>
-          <a:p xmlns:a="http://schemas.openxmlformats.org/drawingml/2006/main">
-            <a:r>
               <a:t>[Sources]</a:t>
             </a:r>
           </a:p>
           <a:p xmlns:a="http://schemas.openxmlformats.org/drawingml/2006/main">
             <a:r>
-              <a:t/>
-            </a:r>
-          </a:p>
-          <a:p xmlns:a="http://schemas.openxmlformats.org/drawingml/2006/main">
-            <a:r>
-              <a:t>- https://press.uchicago.edu/ucp/books/book/chicago/C/bo215874008</a:t>
-            </a:r>
-          </a:p>
-          <a:p xmlns:a="http://schemas.openxmlformats.org/drawingml/2006/main">
-            <a:r>
-              <a:t/>
-            </a:r>
-          </a:p>
-          <a:p xmlns:a="http://schemas.openxmlformats.org/drawingml/2006/main">
-            <a:r>
-              <a:t>- 本课 handout.md 与 slides.md</a:t>
-            </a:r>
-          </a:p>
-          <a:p xmlns:a="http://schemas.openxmlformats.org/drawingml/2006/main">
-            <a:r>
-              <a:t/>
-            </a:r>
-          </a:p>
-          <a:p xmlns:a="http://schemas.openxmlformats.org/drawingml/2006/main">
-            <a:r>
-              <a:t>- ../../course/reading-card-case.md</a:t>
-            </a:r>
-          </a:p>
-          <a:p xmlns:a="http://schemas.openxmlformats.org/drawingml/2006/main">
-            <a:r>
-              <a:t/>
+              <a:t>本课 handout.md、judgment-task.md；../../course/judgment-path.md。</a:t>
             </a:r>
           </a:p>
           <a:p xmlns:a="http://schemas.openxmlformats.org/drawingml/2006/main">
@@ -2733,7 +1883,12 @@
           </a:p>
           <a:p xmlns:a="http://schemas.openxmlformats.org/drawingml/2006/main">
             <a:r>
-              <a:t>讲义位置：handout.md §六、贯穿案例：从验证门材料到论文式短文初版</a:t>
+              <a:t>讲述与校准：</a:t>
+            </a:r>
+          </a:p>
+          <a:p xmlns:a="http://schemas.openxmlformats.org/drawingml/2006/main">
+            <a:r>
+              <a:t>完整方法段不能把回放写成实时模型实验，也不能声称已完成双人盲评。所写每项方法应在文件或记录中找到对应。</a:t>
             </a:r>
           </a:p>
           <a:p xmlns:a="http://schemas.openxmlformats.org/drawingml/2006/main">
@@ -2743,27 +1898,12 @@
           </a:p>
           <a:p xmlns:a="http://schemas.openxmlformats.org/drawingml/2006/main">
             <a:r>
-              <a:t>屏显核对：</a:t>
-            </a:r>
-          </a:p>
-          <a:p xmlns:a="http://schemas.openxmlformats.org/drawingml/2006/main">
-            <a:r>
-              <a:t>材料：3 份教学构造源文本。</a:t>
-            </a:r>
-          </a:p>
-          <a:p xmlns:a="http://schemas.openxmlformats.org/drawingml/2006/main">
-            <a:r>
-              <a:t>输出：每份两种预置输出，共 6 份。</a:t>
-            </a:r>
-          </a:p>
-          <a:p xmlns:a="http://schemas.openxmlformats.org/drawingml/2006/main">
-            <a:r>
-              <a:t>标注：8 项基准条件，对应 16 条核验记录。</a:t>
-            </a:r>
-          </a:p>
-          <a:p xmlns:a="http://schemas.openxmlformats.org/drawingml/2006/main">
-            <a:r>
-              <a:t>汇总：分别累计缺失数，分母均为 8。</a:t>
+              <a:t>学生动作：</a:t>
+            </a:r>
+          </a:p>
+          <a:p xmlns:a="http://schemas.openxmlformats.org/drawingml/2006/main">
+            <a:r>
+              <a:t>删掉一项没有实际发生的方法描述。</a:t>
             </a:r>
           </a:p>
           <a:p xmlns:a="http://schemas.openxmlformats.org/drawingml/2006/main">
@@ -2773,7 +1913,7 @@
           </a:p>
           <a:p xmlns:a="http://schemas.openxmlformats.org/drawingml/2006/main">
             <a:r>
-              <a:t>无模型调用、无随机重复。</a:t>
+              <a:t>课堂安排：按本稿下方 90 分钟教学路由安排；此页不另占独立时段。</a:t>
             </a:r>
           </a:p>
           <a:p xmlns:a="http://schemas.openxmlformats.org/drawingml/2006/main">
@@ -2783,12 +1923,12 @@
           </a:p>
           <a:p xmlns:a="http://schemas.openxmlformats.org/drawingml/2006/main">
             <a:r>
-              <a:t>教师讲述：</a:t>
-            </a:r>
-          </a:p>
-          <a:p xmlns:a="http://schemas.openxmlformats.org/drawingml/2006/main">
-            <a:r>
-              <a:t>完整方法段不能把回放写成实时模型实验，也不能声称已完成双人盲评。所写每项方法应在文件或记录中找到对应。</a:t>
+              <a:t>[Sources]</a:t>
+            </a:r>
+          </a:p>
+          <a:p xmlns:a="http://schemas.openxmlformats.org/drawingml/2006/main">
+            <a:r>
+              <a:t>./handout.md；课堂示例与构造数据见 ../../course/reading-card-case.md</a:t>
             </a:r>
           </a:p>
           <a:p xmlns:a="http://schemas.openxmlformats.org/drawingml/2006/main">
@@ -2798,72 +1938,7 @@
           </a:p>
           <a:p xmlns:a="http://schemas.openxmlformats.org/drawingml/2006/main">
             <a:r>
-              <a:t>学生动作：</a:t>
-            </a:r>
-          </a:p>
-          <a:p xmlns:a="http://schemas.openxmlformats.org/drawingml/2006/main">
-            <a:r>
-              <a:t>删掉一项没有实际发生的方法描述。</a:t>
-            </a:r>
-          </a:p>
-          <a:p xmlns:a="http://schemas.openxmlformats.org/drawingml/2006/main">
-            <a:r>
-              <a:t/>
-            </a:r>
-          </a:p>
-          <a:p xmlns:a="http://schemas.openxmlformats.org/drawingml/2006/main">
-            <a:r>
-              <a:t>来源与边界：</a:t>
-            </a:r>
-          </a:p>
-          <a:p xmlns:a="http://schemas.openxmlformats.org/drawingml/2006/main">
-            <a:r>
-              <a:t>./handout.md；课堂示例与构造数据见 ../../course/reading-card-case.md</a:t>
-            </a:r>
-          </a:p>
-          <a:p xmlns:a="http://schemas.openxmlformats.org/drawingml/2006/main">
-            <a:r>
-              <a:t/>
-            </a:r>
-          </a:p>
-          <a:p xmlns:a="http://schemas.openxmlformats.org/drawingml/2006/main">
-            <a:r>
-              <a:t>[Sources]</a:t>
-            </a:r>
-          </a:p>
-          <a:p xmlns:a="http://schemas.openxmlformats.org/drawingml/2006/main">
-            <a:r>
-              <a:t/>
-            </a:r>
-          </a:p>
-          <a:p xmlns:a="http://schemas.openxmlformats.org/drawingml/2006/main">
-            <a:r>
-              <a:t>- https://press.uchicago.edu/ucp/books/book/chicago/C/bo215874008</a:t>
-            </a:r>
-          </a:p>
-          <a:p xmlns:a="http://schemas.openxmlformats.org/drawingml/2006/main">
-            <a:r>
-              <a:t/>
-            </a:r>
-          </a:p>
-          <a:p xmlns:a="http://schemas.openxmlformats.org/drawingml/2006/main">
-            <a:r>
-              <a:t>- 本课 handout.md 与 slides.md</a:t>
-            </a:r>
-          </a:p>
-          <a:p xmlns:a="http://schemas.openxmlformats.org/drawingml/2006/main">
-            <a:r>
-              <a:t/>
-            </a:r>
-          </a:p>
-          <a:p xmlns:a="http://schemas.openxmlformats.org/drawingml/2006/main">
-            <a:r>
-              <a:t>- ../../course/reading-card-case.md</a:t>
-            </a:r>
-          </a:p>
-          <a:p xmlns:a="http://schemas.openxmlformats.org/drawingml/2006/main">
-            <a:r>
-              <a:t/>
+              <a:t>本课 handout.md、judgment-task.md；../../course/judgment-path.md。</a:t>
             </a:r>
           </a:p>
           <a:p xmlns:a="http://schemas.openxmlformats.org/drawingml/2006/main">
@@ -2948,7 +2023,12 @@
           </a:p>
           <a:p xmlns:a="http://schemas.openxmlformats.org/drawingml/2006/main">
             <a:r>
-              <a:t>讲义位置：handout.md §六、贯穿案例：从验证门材料到论文式短文初版</a:t>
+              <a:t>讲述与校准：</a:t>
+            </a:r>
+          </a:p>
+          <a:p xmlns:a="http://schemas.openxmlformats.org/drawingml/2006/main">
+            <a:r>
+              <a:t>图表使用真实可复算的分子分母。差值表示12.5个百分点，不是证明机制，更不是全体文本都改善。</a:t>
             </a:r>
           </a:p>
           <a:p xmlns:a="http://schemas.openxmlformats.org/drawingml/2006/main">
@@ -2958,22 +2038,12 @@
           </a:p>
           <a:p xmlns:a="http://schemas.openxmlformats.org/drawingml/2006/main">
             <a:r>
-              <a:t>屏显核对：</a:t>
-            </a:r>
-          </a:p>
-          <a:p xmlns:a="http://schemas.openxmlformats.org/drawingml/2006/main">
-            <a:r>
-              <a:t>阅读卡：3/8 = 0.375</a:t>
-            </a:r>
-          </a:p>
-          <a:p xmlns:a="http://schemas.openxmlformats.org/drawingml/2006/main">
-            <a:r>
-              <a:t>自由摘要：4/8 = 0.500</a:t>
-            </a:r>
-          </a:p>
-          <a:p xmlns:a="http://schemas.openxmlformats.org/drawingml/2006/main">
-            <a:r>
-              <a:t>差值：−0.125</a:t>
+              <a:t>学生动作：</a:t>
+            </a:r>
+          </a:p>
+          <a:p xmlns:a="http://schemas.openxmlformats.org/drawingml/2006/main">
+            <a:r>
+              <a:t>请学生指出一个可写进结果段的句子和一个不能写的句子。</a:t>
             </a:r>
           </a:p>
           <a:p xmlns:a="http://schemas.openxmlformats.org/drawingml/2006/main">
@@ -2983,12 +2053,7 @@
           </a:p>
           <a:p xmlns:a="http://schemas.openxmlformats.org/drawingml/2006/main">
             <a:r>
-              <a:t>T02 无改善；T03 更差。</a:t>
-            </a:r>
-          </a:p>
-          <a:p xmlns:a="http://schemas.openxmlformats.org/drawingml/2006/main">
-            <a:r>
-              <a:t>教学构造汇总，无误差线和显著性结论。</a:t>
+              <a:t>课堂安排：按本稿下方 90 分钟教学路由安排；此页不另占独立时段。</a:t>
             </a:r>
           </a:p>
           <a:p xmlns:a="http://schemas.openxmlformats.org/drawingml/2006/main">
@@ -2998,12 +2063,12 @@
           </a:p>
           <a:p xmlns:a="http://schemas.openxmlformats.org/drawingml/2006/main">
             <a:r>
-              <a:t>教师讲述：</a:t>
-            </a:r>
-          </a:p>
-          <a:p xmlns:a="http://schemas.openxmlformats.org/drawingml/2006/main">
-            <a:r>
-              <a:t>图表使用真实可复算的分子分母。差值表示12.5个百分点，不是证明机制，更不是全体文本都改善。</a:t>
+              <a:t>[Sources]</a:t>
+            </a:r>
+          </a:p>
+          <a:p xmlns:a="http://schemas.openxmlformats.org/drawingml/2006/main">
+            <a:r>
+              <a:t>./handout.md；课堂示例与构造数据见 ../../course/reading-card-case.md</a:t>
             </a:r>
           </a:p>
           <a:p xmlns:a="http://schemas.openxmlformats.org/drawingml/2006/main">
@@ -3013,72 +2078,7 @@
           </a:p>
           <a:p xmlns:a="http://schemas.openxmlformats.org/drawingml/2006/main">
             <a:r>
-              <a:t>学生动作：</a:t>
-            </a:r>
-          </a:p>
-          <a:p xmlns:a="http://schemas.openxmlformats.org/drawingml/2006/main">
-            <a:r>
-              <a:t>请学生指出一个可写进结果段的句子和一个不能写的句子。</a:t>
-            </a:r>
-          </a:p>
-          <a:p xmlns:a="http://schemas.openxmlformats.org/drawingml/2006/main">
-            <a:r>
-              <a:t/>
-            </a:r>
-          </a:p>
-          <a:p xmlns:a="http://schemas.openxmlformats.org/drawingml/2006/main">
-            <a:r>
-              <a:t>来源与边界：</a:t>
-            </a:r>
-          </a:p>
-          <a:p xmlns:a="http://schemas.openxmlformats.org/drawingml/2006/main">
-            <a:r>
-              <a:t>./handout.md；课堂示例与构造数据见 ../../course/reading-card-case.md</a:t>
-            </a:r>
-          </a:p>
-          <a:p xmlns:a="http://schemas.openxmlformats.org/drawingml/2006/main">
-            <a:r>
-              <a:t/>
-            </a:r>
-          </a:p>
-          <a:p xmlns:a="http://schemas.openxmlformats.org/drawingml/2006/main">
-            <a:r>
-              <a:t>[Sources]</a:t>
-            </a:r>
-          </a:p>
-          <a:p xmlns:a="http://schemas.openxmlformats.org/drawingml/2006/main">
-            <a:r>
-              <a:t/>
-            </a:r>
-          </a:p>
-          <a:p xmlns:a="http://schemas.openxmlformats.org/drawingml/2006/main">
-            <a:r>
-              <a:t>- https://press.uchicago.edu/ucp/books/book/chicago/C/bo215874008</a:t>
-            </a:r>
-          </a:p>
-          <a:p xmlns:a="http://schemas.openxmlformats.org/drawingml/2006/main">
-            <a:r>
-              <a:t/>
-            </a:r>
-          </a:p>
-          <a:p xmlns:a="http://schemas.openxmlformats.org/drawingml/2006/main">
-            <a:r>
-              <a:t>- 本课 handout.md 与 slides.md</a:t>
-            </a:r>
-          </a:p>
-          <a:p xmlns:a="http://schemas.openxmlformats.org/drawingml/2006/main">
-            <a:r>
-              <a:t/>
-            </a:r>
-          </a:p>
-          <a:p xmlns:a="http://schemas.openxmlformats.org/drawingml/2006/main">
-            <a:r>
-              <a:t>- ../../course/reading-card-case.md</a:t>
-            </a:r>
-          </a:p>
-          <a:p xmlns:a="http://schemas.openxmlformats.org/drawingml/2006/main">
-            <a:r>
-              <a:t/>
+              <a:t>本课 handout.md、judgment-task.md；../../course/judgment-path.md。</a:t>
             </a:r>
           </a:p>
           <a:p xmlns:a="http://schemas.openxmlformats.org/drawingml/2006/main">
@@ -3163,7 +2163,12 @@
           </a:p>
           <a:p xmlns:a="http://schemas.openxmlformats.org/drawingml/2006/main">
             <a:r>
-              <a:t>讲义位置：handout.md §六、贯穿案例：从验证门材料到论文式短文初版</a:t>
+              <a:t>讲述与校准：</a:t>
+            </a:r>
+          </a:p>
+          <a:p xmlns:a="http://schemas.openxmlformats.org/drawingml/2006/main">
+            <a:r>
+              <a:t>避免把四个编号并排叫“互斥假设”。先让学生说每个问题需要测什么，再决定是否追加实验或收窄主张。</a:t>
             </a:r>
           </a:p>
           <a:p xmlns:a="http://schemas.openxmlformats.org/drawingml/2006/main">
@@ -3173,22 +2178,12 @@
           </a:p>
           <a:p xmlns:a="http://schemas.openxmlformats.org/drawingml/2006/main">
             <a:r>
-              <a:t>屏显核对：</a:t>
-            </a:r>
-          </a:p>
-          <a:p xmlns:a="http://schemas.openxmlformats.org/drawingml/2006/main">
-            <a:r>
-              <a:t>H1/A2：是否区分生成机制和评分提示？尚未。</a:t>
-            </a:r>
-          </a:p>
-          <a:p xmlns:a="http://schemas.openxmlformats.org/drawingml/2006/main">
-            <a:r>
-              <a:t>A1：是否评估其他质量代价？尚未。</a:t>
-            </a:r>
-          </a:p>
-          <a:p xmlns:a="http://schemas.openxmlformats.org/drawingml/2006/main">
-            <a:r>
-              <a:t>A3：是否支持外推所有材料？不支持；保留T03。</a:t>
+              <a:t>学生动作：</a:t>
+            </a:r>
+          </a:p>
+          <a:p xmlns:a="http://schemas.openxmlformats.org/drawingml/2006/main">
+            <a:r>
+              <a:t>为最影响本人结论的一项未决问题写补证路径。</a:t>
             </a:r>
           </a:p>
           <a:p xmlns:a="http://schemas.openxmlformats.org/drawingml/2006/main">
@@ -3198,7 +2193,7 @@
           </a:p>
           <a:p xmlns:a="http://schemas.openxmlformats.org/drawingml/2006/main">
             <a:r>
-              <a:t>每个未决项对应下一项证据需求。</a:t>
+              <a:t>课堂安排：按本稿下方 90 分钟教学路由安排；此页不另占独立时段。</a:t>
             </a:r>
           </a:p>
           <a:p xmlns:a="http://schemas.openxmlformats.org/drawingml/2006/main">
@@ -3208,12 +2203,12 @@
           </a:p>
           <a:p xmlns:a="http://schemas.openxmlformats.org/drawingml/2006/main">
             <a:r>
-              <a:t>教师讲述：</a:t>
-            </a:r>
-          </a:p>
-          <a:p xmlns:a="http://schemas.openxmlformats.org/drawingml/2006/main">
-            <a:r>
-              <a:t>避免把四个编号并排叫“互斥假设”。先让学生说每个问题需要测什么，再决定是否追加实验或收窄主张。</a:t>
+              <a:t>[Sources]</a:t>
+            </a:r>
+          </a:p>
+          <a:p xmlns:a="http://schemas.openxmlformats.org/drawingml/2006/main">
+            <a:r>
+              <a:t>./handout.md；课堂示例与构造数据见 ../../course/reading-card-case.md</a:t>
             </a:r>
           </a:p>
           <a:p xmlns:a="http://schemas.openxmlformats.org/drawingml/2006/main">
@@ -3223,72 +2218,7 @@
           </a:p>
           <a:p xmlns:a="http://schemas.openxmlformats.org/drawingml/2006/main">
             <a:r>
-              <a:t>学生动作：</a:t>
-            </a:r>
-          </a:p>
-          <a:p xmlns:a="http://schemas.openxmlformats.org/drawingml/2006/main">
-            <a:r>
-              <a:t>为最影响本人结论的一项未决问题写补证路径。</a:t>
-            </a:r>
-          </a:p>
-          <a:p xmlns:a="http://schemas.openxmlformats.org/drawingml/2006/main">
-            <a:r>
-              <a:t/>
-            </a:r>
-          </a:p>
-          <a:p xmlns:a="http://schemas.openxmlformats.org/drawingml/2006/main">
-            <a:r>
-              <a:t>来源与边界：</a:t>
-            </a:r>
-          </a:p>
-          <a:p xmlns:a="http://schemas.openxmlformats.org/drawingml/2006/main">
-            <a:r>
-              <a:t>./handout.md；课堂示例与构造数据见 ../../course/reading-card-case.md</a:t>
-            </a:r>
-          </a:p>
-          <a:p xmlns:a="http://schemas.openxmlformats.org/drawingml/2006/main">
-            <a:r>
-              <a:t/>
-            </a:r>
-          </a:p>
-          <a:p xmlns:a="http://schemas.openxmlformats.org/drawingml/2006/main">
-            <a:r>
-              <a:t>[Sources]</a:t>
-            </a:r>
-          </a:p>
-          <a:p xmlns:a="http://schemas.openxmlformats.org/drawingml/2006/main">
-            <a:r>
-              <a:t/>
-            </a:r>
-          </a:p>
-          <a:p xmlns:a="http://schemas.openxmlformats.org/drawingml/2006/main">
-            <a:r>
-              <a:t>- https://press.uchicago.edu/ucp/books/book/chicago/C/bo215874008</a:t>
-            </a:r>
-          </a:p>
-          <a:p xmlns:a="http://schemas.openxmlformats.org/drawingml/2006/main">
-            <a:r>
-              <a:t/>
-            </a:r>
-          </a:p>
-          <a:p xmlns:a="http://schemas.openxmlformats.org/drawingml/2006/main">
-            <a:r>
-              <a:t>- 本课 handout.md 与 slides.md</a:t>
-            </a:r>
-          </a:p>
-          <a:p xmlns:a="http://schemas.openxmlformats.org/drawingml/2006/main">
-            <a:r>
-              <a:t/>
-            </a:r>
-          </a:p>
-          <a:p xmlns:a="http://schemas.openxmlformats.org/drawingml/2006/main">
-            <a:r>
-              <a:t>- ../../course/reading-card-case.md</a:t>
-            </a:r>
-          </a:p>
-          <a:p xmlns:a="http://schemas.openxmlformats.org/drawingml/2006/main">
-            <a:r>
-              <a:t/>
+              <a:t>本课 handout.md、judgment-task.md；../../course/judgment-path.md。</a:t>
             </a:r>
           </a:p>
           <a:p xmlns:a="http://schemas.openxmlformats.org/drawingml/2006/main">
@@ -3363,7 +2293,7 @@
           <a:lstStyle xmlns:a="http://schemas.openxmlformats.org/drawingml/2006/main"/>
           <a:p xmlns:a="http://schemas.openxmlformats.org/drawingml/2006/main">
             <a:r>
-              <a:t>页面：P08 四句话写出可追溯论证</a:t>
+              <a:t>页面：P08 本人项目：决定、核验与回写</a:t>
             </a:r>
           </a:p>
           <a:p xmlns:a="http://schemas.openxmlformats.org/drawingml/2006/main">
@@ -3373,7 +2303,12 @@
           </a:p>
           <a:p xmlns:a="http://schemas.openxmlformats.org/drawingml/2006/main">
             <a:r>
-              <a:t>讲义位置：handout.md §六、贯穿案例：从验证门材料到论文式短文初版</a:t>
+              <a:t>讲述与校准：</a:t>
+            </a:r>
+          </a:p>
+          <a:p xmlns:a="http://schemas.openxmlformats.org/drawingml/2006/main">
+            <a:r>
+              <a:t>第一段作决定并查证据；中点处理共性卡点；第二段实际回写并验证。A 把描述扩为显著性、科研质量和机制因果，均缺证据；B 丢弃可复查的有限观察；C 范围合适但仍应补记录位置和上游选择。本人若研究校验器，应报告实际输入处理变化，而不沿用阅读卡效果措辞。</a:t>
             </a:r>
           </a:p>
           <a:p xmlns:a="http://schemas.openxmlformats.org/drawingml/2006/main">
@@ -3383,27 +2318,12 @@
           </a:p>
           <a:p xmlns:a="http://schemas.openxmlformats.org/drawingml/2006/main">
             <a:r>
-              <a:t>屏显核对：</a:t>
-            </a:r>
-          </a:p>
-          <a:p xmlns:a="http://schemas.openxmlformats.org/drawingml/2006/main">
-            <a:r>
-              <a:t>主张：本构造小包中，阅读卡的总遗漏率较低。</a:t>
-            </a:r>
-          </a:p>
-          <a:p xmlns:a="http://schemas.openxmlformats.org/drawingml/2006/main">
-            <a:r>
-              <a:t>证据：阅读卡3/8，自由摘要4/8，见逐项标注。</a:t>
-            </a:r>
-          </a:p>
-          <a:p xmlns:a="http://schemas.openxmlformats.org/drawingml/2006/main">
-            <a:r>
-              <a:t>推理：同口径汇总与Q1方向一致，不能识别机制。</a:t>
-            </a:r>
-          </a:p>
-          <a:p xmlns:a="http://schemas.openxmlformats.org/drawingml/2006/main">
-            <a:r>
-              <a:t>边界：T03负向，H1/A2未区分，其他质量未测。</a:t>
+              <a:t>学生动作：</a:t>
+            </a:r>
+          </a:p>
+          <a:p xmlns:a="http://schemas.openxmlformats.org/drawingml/2006/main">
+            <a:r>
+              <a:t>用本人真实比较写一个论证段，附一条结论追踪和实际 AI 披露；把已积累的问题、方法、评价、局限直接组织成短报告初稿。</a:t>
             </a:r>
           </a:p>
           <a:p xmlns:a="http://schemas.openxmlformats.org/drawingml/2006/main">
@@ -3413,12 +2333,7 @@
           </a:p>
           <a:p xmlns:a="http://schemas.openxmlformats.org/drawingml/2006/main">
             <a:r>
-              <a:t>教师讲述：</a:t>
-            </a:r>
-          </a:p>
-          <a:p xmlns:a="http://schemas.openxmlformats.org/drawingml/2006/main">
-            <a:r>
-              <a:t>四句分别承担一个功能，先写出可核验的最小段落。完整可复制段落见讲义§六。把“模型证明了”改为实际数据允许的表述。</a:t>
+              <a:t>课堂安排：按本稿下方 90 分钟教学路由安排；此页不另占独立时段。</a:t>
             </a:r>
           </a:p>
           <a:p xmlns:a="http://schemas.openxmlformats.org/drawingml/2006/main">
@@ -3428,12 +2343,12 @@
           </a:p>
           <a:p xmlns:a="http://schemas.openxmlformats.org/drawingml/2006/main">
             <a:r>
-              <a:t>学生动作：</a:t>
-            </a:r>
-          </a:p>
-          <a:p xmlns:a="http://schemas.openxmlformats.org/drawingml/2006/main">
-            <a:r>
-              <a:t>按四句结构写本人结果，标明一项具体证据位置。</a:t>
+              <a:t>[Sources]</a:t>
+            </a:r>
+          </a:p>
+          <a:p xmlns:a="http://schemas.openxmlformats.org/drawingml/2006/main">
+            <a:r>
+              <a:t>./handout.md；课堂示例与构造数据见 ../../course/reading-card-case.md</a:t>
             </a:r>
           </a:p>
           <a:p xmlns:a="http://schemas.openxmlformats.org/drawingml/2006/main">
@@ -3443,57 +2358,7 @@
           </a:p>
           <a:p xmlns:a="http://schemas.openxmlformats.org/drawingml/2006/main">
             <a:r>
-              <a:t>来源与边界：</a:t>
-            </a:r>
-          </a:p>
-          <a:p xmlns:a="http://schemas.openxmlformats.org/drawingml/2006/main">
-            <a:r>
-              <a:t>./handout.md；课堂示例与构造数据见 ../../course/reading-card-case.md</a:t>
-            </a:r>
-          </a:p>
-          <a:p xmlns:a="http://schemas.openxmlformats.org/drawingml/2006/main">
-            <a:r>
-              <a:t/>
-            </a:r>
-          </a:p>
-          <a:p xmlns:a="http://schemas.openxmlformats.org/drawingml/2006/main">
-            <a:r>
-              <a:t>[Sources]</a:t>
-            </a:r>
-          </a:p>
-          <a:p xmlns:a="http://schemas.openxmlformats.org/drawingml/2006/main">
-            <a:r>
-              <a:t/>
-            </a:r>
-          </a:p>
-          <a:p xmlns:a="http://schemas.openxmlformats.org/drawingml/2006/main">
-            <a:r>
-              <a:t>- https://press.uchicago.edu/ucp/books/book/chicago/C/bo215874008</a:t>
-            </a:r>
-          </a:p>
-          <a:p xmlns:a="http://schemas.openxmlformats.org/drawingml/2006/main">
-            <a:r>
-              <a:t/>
-            </a:r>
-          </a:p>
-          <a:p xmlns:a="http://schemas.openxmlformats.org/drawingml/2006/main">
-            <a:r>
-              <a:t>- 本课 handout.md 与 slides.md</a:t>
-            </a:r>
-          </a:p>
-          <a:p xmlns:a="http://schemas.openxmlformats.org/drawingml/2006/main">
-            <a:r>
-              <a:t/>
-            </a:r>
-          </a:p>
-          <a:p xmlns:a="http://schemas.openxmlformats.org/drawingml/2006/main">
-            <a:r>
-              <a:t>- ../../course/reading-card-case.md</a:t>
-            </a:r>
-          </a:p>
-          <a:p xmlns:a="http://schemas.openxmlformats.org/drawingml/2006/main">
-            <a:r>
-              <a:t/>
+              <a:t>本课 handout.md、judgment-task.md；../../course/judgment-path.md。教学构造仅用于方法判断；本人结果以实际记录为准。</a:t>
             </a:r>
           </a:p>
           <a:p xmlns:a="http://schemas.openxmlformats.org/drawingml/2006/main">
@@ -3578,7 +2443,12 @@
           </a:p>
           <a:p xmlns:a="http://schemas.openxmlformats.org/drawingml/2006/main">
             <a:r>
-              <a:t>讲义位置：handout.md §六、贯穿案例：从验证门材料到论文式短文初版</a:t>
+              <a:t>讲述与校准：</a:t>
+            </a:r>
+          </a:p>
+          <a:p xmlns:a="http://schemas.openxmlformats.org/drawingml/2006/main">
+            <a:r>
+              <a:t>请学生先指出从证据跳到结论的哪一步没有依据，再展示修订。不要把“待验证”加在强结论后就当修复完成；主句本身要降到证据允许的范围。</a:t>
             </a:r>
           </a:p>
           <a:p xmlns:a="http://schemas.openxmlformats.org/drawingml/2006/main">
@@ -3588,17 +2458,12 @@
           </a:p>
           <a:p xmlns:a="http://schemas.openxmlformats.org/drawingml/2006/main">
             <a:r>
-              <a:t>屏显核对：</a:t>
-            </a:r>
-          </a:p>
-          <a:p xmlns:a="http://schemas.openxmlformats.org/drawingml/2006/main">
-            <a:r>
-              <a:t>错误一：“总分较好，所以H1成立。”</a:t>
-            </a:r>
-          </a:p>
-          <a:p xmlns:a="http://schemas.openxmlformats.org/drawingml/2006/main">
-            <a:r>
-              <a:t>修订：结果与Q1方向一致，机制尚未区分。</a:t>
+              <a:t>学生动作：</a:t>
+            </a:r>
+          </a:p>
+          <a:p xmlns:a="http://schemas.openxmlformats.org/drawingml/2006/main">
+            <a:r>
+              <a:t>修订自己段落里一个越界词，如证明、所有或必然。</a:t>
             </a:r>
           </a:p>
           <a:p xmlns:a="http://schemas.openxmlformats.org/drawingml/2006/main">
@@ -3608,12 +2473,7 @@
           </a:p>
           <a:p xmlns:a="http://schemas.openxmlformats.org/drawingml/2006/main">
             <a:r>
-              <a:t>错误二：“因此适用于所有文本。”</a:t>
-            </a:r>
-          </a:p>
-          <a:p xmlns:a="http://schemas.openxmlformats.org/drawingml/2006/main">
-            <a:r>
-              <a:t>修订：本构造包范围内汇总较好，但T03为负例。</a:t>
+              <a:t>课堂安排：按本稿下方 90 分钟教学路由安排；此页不另占独立时段。</a:t>
             </a:r>
           </a:p>
           <a:p xmlns:a="http://schemas.openxmlformats.org/drawingml/2006/main">
@@ -3623,12 +2483,12 @@
           </a:p>
           <a:p xmlns:a="http://schemas.openxmlformats.org/drawingml/2006/main">
             <a:r>
-              <a:t>教师讲述：</a:t>
-            </a:r>
-          </a:p>
-          <a:p xmlns:a="http://schemas.openxmlformats.org/drawingml/2006/main">
-            <a:r>
-              <a:t>请学生先指出从证据跳到结论的哪一步没有依据，再展示修订。不要把“待验证”加在强结论后就当修复完成；主句本身要降到证据允许的范围。</a:t>
+              <a:t>[Sources]</a:t>
+            </a:r>
+          </a:p>
+          <a:p xmlns:a="http://schemas.openxmlformats.org/drawingml/2006/main">
+            <a:r>
+              <a:t>./handout.md；课堂示例与构造数据见 ../../course/reading-card-case.md</a:t>
             </a:r>
           </a:p>
           <a:p xmlns:a="http://schemas.openxmlformats.org/drawingml/2006/main">
@@ -3638,72 +2498,7 @@
           </a:p>
           <a:p xmlns:a="http://schemas.openxmlformats.org/drawingml/2006/main">
             <a:r>
-              <a:t>学生动作：</a:t>
-            </a:r>
-          </a:p>
-          <a:p xmlns:a="http://schemas.openxmlformats.org/drawingml/2006/main">
-            <a:r>
-              <a:t>修订自己段落里一个越界词，如证明、所有或必然。</a:t>
-            </a:r>
-          </a:p>
-          <a:p xmlns:a="http://schemas.openxmlformats.org/drawingml/2006/main">
-            <a:r>
-              <a:t/>
-            </a:r>
-          </a:p>
-          <a:p xmlns:a="http://schemas.openxmlformats.org/drawingml/2006/main">
-            <a:r>
-              <a:t>来源与边界：</a:t>
-            </a:r>
-          </a:p>
-          <a:p xmlns:a="http://schemas.openxmlformats.org/drawingml/2006/main">
-            <a:r>
-              <a:t>./handout.md；课堂示例与构造数据见 ../../course/reading-card-case.md</a:t>
-            </a:r>
-          </a:p>
-          <a:p xmlns:a="http://schemas.openxmlformats.org/drawingml/2006/main">
-            <a:r>
-              <a:t/>
-            </a:r>
-          </a:p>
-          <a:p xmlns:a="http://schemas.openxmlformats.org/drawingml/2006/main">
-            <a:r>
-              <a:t>[Sources]</a:t>
-            </a:r>
-          </a:p>
-          <a:p xmlns:a="http://schemas.openxmlformats.org/drawingml/2006/main">
-            <a:r>
-              <a:t/>
-            </a:r>
-          </a:p>
-          <a:p xmlns:a="http://schemas.openxmlformats.org/drawingml/2006/main">
-            <a:r>
-              <a:t>- https://press.uchicago.edu/ucp/books/book/chicago/C/bo215874008</a:t>
-            </a:r>
-          </a:p>
-          <a:p xmlns:a="http://schemas.openxmlformats.org/drawingml/2006/main">
-            <a:r>
-              <a:t/>
-            </a:r>
-          </a:p>
-          <a:p xmlns:a="http://schemas.openxmlformats.org/drawingml/2006/main">
-            <a:r>
-              <a:t>- 本课 handout.md 与 slides.md</a:t>
-            </a:r>
-          </a:p>
-          <a:p xmlns:a="http://schemas.openxmlformats.org/drawingml/2006/main">
-            <a:r>
-              <a:t/>
-            </a:r>
-          </a:p>
-          <a:p xmlns:a="http://schemas.openxmlformats.org/drawingml/2006/main">
-            <a:r>
-              <a:t>- ../../course/reading-card-case.md</a:t>
-            </a:r>
-          </a:p>
-          <a:p xmlns:a="http://schemas.openxmlformats.org/drawingml/2006/main">
-            <a:r>
-              <a:t/>
+              <a:t>本课 handout.md、judgment-task.md；../../course/judgment-path.md。</a:t>
             </a:r>
           </a:p>
           <a:p xmlns:a="http://schemas.openxmlformats.org/drawingml/2006/main">
@@ -9469,127 +8264,22 @@
       </p:grpSpPr>
       <p:sp>
         <p:nvSpPr>
-          <p:cNvPr id="4" name="Text Placeholder 3">
-            <a:extLst xmlns:a="http://schemas.openxmlformats.org/drawingml/2006/main">
-              <a:ext uri="{FF2B5EF4-FFF2-40B4-BE49-F238E27FC236}">
-                <a16:creationId xmlns:a16="http://schemas.microsoft.com/office/drawing/2014/main" id="{4D941B40-7A0A-534E-3563-CA11753C8E3F}"/>
-              </a:ext>
-            </a:extLst>
-          </p:cNvPr>
-          <p:cNvSpPr>
-            <a:spLocks xmlns:a="http://schemas.openxmlformats.org/drawingml/2006/main" noGrp="1"/>
-          </p:cNvSpPr>
-          <p:nvPr>
-            <p:ph type="body" idx="14"/>
-          </p:nvPr>
-        </p:nvSpPr>
-        <p:spPr>
-          <a:xfrm xmlns:a="http://schemas.openxmlformats.org/drawingml/2006/main">
-            <a:off x="1028700" y="57150"/>
-            <a:ext cx="10668000" cy="571500"/>
-          </a:xfrm>
-        </p:spPr>
-        <p:txBody>
-          <a:bodyPr xmlns:a="http://schemas.openxmlformats.org/drawingml/2006/main" lIns="0" tIns="0" rIns="0" bIns="0" anchor="ctr"/>
-          <a:lstStyle xmlns:a="http://schemas.openxmlformats.org/drawingml/2006/main"/>
-          <a:p xmlns:a="http://schemas.openxmlformats.org/drawingml/2006/main">
-            <a:pPr algn="l">
-              <a:lnSpc>
-                <a:spcPct val="118000"/>
-              </a:lnSpc>
-              <a:buNone/>
-            </a:pPr>
-            <a:r>
-              <a:rPr sz="3000" b="1">
-                <a:solidFill>
-                  <a:srgbClr val="FFFFFF"/>
-                </a:solidFill>
-                <a:latin typeface="微软雅黑"/>
-                <a:ea typeface="微软雅黑"/>
-                <a:cs typeface="微软雅黑"/>
-              </a:rPr>
-              <a:t>带着这份初稿进入真实评审</a:t>
-            </a:r>
-            <a:endParaRPr/>
-          </a:p>
-        </p:txBody>
-      </p:sp>
-      <p:sp>
-        <p:nvSpPr>
-          <p:cNvPr id="5" name="Slide Number Placeholder 4">
-            <a:extLst xmlns:a="http://schemas.openxmlformats.org/drawingml/2006/main">
-              <a:ext uri="{FF2B5EF4-FFF2-40B4-BE49-F238E27FC236}">
-                <a16:creationId xmlns:a16="http://schemas.microsoft.com/office/drawing/2014/main" id="{EBA5909F-738E-F60C-BE8C-B3F1D94548E5}"/>
-              </a:ext>
-            </a:extLst>
-          </p:cNvPr>
-          <p:cNvSpPr>
-            <a:spLocks xmlns:a="http://schemas.openxmlformats.org/drawingml/2006/main" noGrp="1"/>
-          </p:cNvSpPr>
-          <p:nvPr>
-            <p:ph type="sldNum" idx="10"/>
-          </p:nvPr>
-        </p:nvSpPr>
-        <p:spPr/>
-        <p:txBody>
-          <a:bodyPr xmlns:a="http://schemas.openxmlformats.org/drawingml/2006/main"/>
-          <a:lstStyle xmlns:a="http://schemas.openxmlformats.org/drawingml/2006/main"/>
-          <a:p xmlns:a="http://schemas.openxmlformats.org/drawingml/2006/main">
-            <a:fld id="{DC9C7607-4BA3-B4DC-A00F-2E67A9FCFF7E}" type="slidenum">
-              <a:t>16</a:t>
-            </a:fld>
-            <a:endParaRPr/>
-          </a:p>
-        </p:txBody>
-      </p:sp>
-      <p:sp>
-        <p:nvSpPr>
-          <p:cNvPr id="6" name="handoff-top">
-            <a:extLst xmlns:a="http://schemas.openxmlformats.org/drawingml/2006/main">
-              <a:ext uri="{FF2B5EF4-FFF2-40B4-BE49-F238E27FC236}">
-                <a16:creationId xmlns:a16="http://schemas.microsoft.com/office/drawing/2014/main" id="{E70A8CC6-9A8D-498F-BB44-683FD446800C}"/>
-              </a:ext>
-            </a:extLst>
-          </p:cNvPr>
-          <p:cNvSpPr>
-            <a:spLocks xmlns:a="http://schemas.openxmlformats.org/drawingml/2006/main" noGrp="1"/>
-          </p:cNvSpPr>
-          <p:nvPr/>
-        </p:nvSpPr>
-        <p:spPr>
-          <a:xfrm xmlns:a="http://schemas.openxmlformats.org/drawingml/2006/main">
-            <a:off x="609600" y="1381125"/>
-            <a:ext cx="7353300" cy="14288"/>
-          </a:xfrm>
-          <a:prstGeom xmlns:a="http://schemas.openxmlformats.org/drawingml/2006/main" prst="rect">
-            <a:avLst/>
-          </a:prstGeom>
-          <a:solidFill xmlns:a="http://schemas.openxmlformats.org/drawingml/2006/main">
-            <a:srgbClr val="1F4D78"/>
-          </a:solidFill>
-          <a:ln xmlns:a="http://schemas.openxmlformats.org/drawingml/2006/main" w="0">
-            <a:noFill/>
-          </a:ln>
-        </p:spPr>
-      </p:sp>
-      <p:sp>
-        <p:nvSpPr>
-          <p:cNvPr id="7" name="handoff-file">
-            <a:extLst xmlns:a="http://schemas.openxmlformats.org/drawingml/2006/main">
-              <a:ext uri="{FF2B5EF4-FFF2-40B4-BE49-F238E27FC236}">
-                <a16:creationId xmlns:a16="http://schemas.microsoft.com/office/drawing/2014/main" id="{2232B7F3-BF1E-4053-84FD-F295C2D7EBFF}"/>
-              </a:ext>
-            </a:extLst>
-          </p:cNvPr>
-          <p:cNvSpPr>
-            <a:spLocks xmlns:a="http://schemas.openxmlformats.org/drawingml/2006/main" noGrp="1"/>
-          </p:cNvSpPr>
-          <p:nvPr/>
-        </p:nvSpPr>
-        <p:spPr>
-          <a:xfrm xmlns:a="http://schemas.openxmlformats.org/drawingml/2006/main">
-            <a:off x="609600" y="1533525"/>
-            <a:ext cx="7353300" cy="333375"/>
+          <p:cNvPr id="7" name="judgment-title">
+            <a:extLst xmlns:a="http://schemas.openxmlformats.org/drawingml/2006/main">
+              <a:ext uri="{FF2B5EF4-FFF2-40B4-BE49-F238E27FC236}">
+                <a16:creationId xmlns:a16="http://schemas.microsoft.com/office/drawing/2014/main" id="{253A42C1-5028-4BC3-BDB6-CB966B8D16CF}"/>
+              </a:ext>
+            </a:extLst>
+          </p:cNvPr>
+          <p:cNvSpPr>
+            <a:spLocks xmlns:a="http://schemas.openxmlformats.org/drawingml/2006/main" noGrp="1"/>
+          </p:cNvSpPr>
+          <p:nvPr/>
+        </p:nvSpPr>
+        <p:spPr>
+          <a:xfrm xmlns:a="http://schemas.openxmlformats.org/drawingml/2006/main">
+            <a:off x="1028700" y="76200"/>
+            <a:ext cx="10687050" cy="514350"/>
           </a:xfrm>
           <a:prstGeom xmlns:a="http://schemas.openxmlformats.org/drawingml/2006/main" prst="rect">
             <a:avLst/>
@@ -9601,54 +8291,61 @@
         </p:spPr>
         <p:txBody>
           <a:bodyPr xmlns:a="http://schemas.openxmlformats.org/drawingml/2006/main" lIns="0" tIns="0" rIns="0" bIns="0" anchor="t"/>
-          <a:lstStyle xmlns:a="http://schemas.openxmlformats.org/drawingml/2006/main"/>
+          <a:lstStyle xmlns:a="http://schemas.openxmlformats.org/drawingml/2006/main">
+            <a:defPPr algn="l">
+              <a:defRPr sz="3000" b="1">
+                <a:solidFill>
+                  <a:srgbClr val="FFFFFF"/>
+                </a:solidFill>
+                <a:latin typeface="微软雅黑"/>
+                <a:ea typeface="微软雅黑"/>
+                <a:cs typeface="微软雅黑"/>
+              </a:defRPr>
+            </a:defPPr>
+          </a:lstStyle>
           <a:p xmlns:a="http://schemas.openxmlformats.org/drawingml/2006/main">
             <a:pPr algn="l">
-              <a:lnSpc>
-                <a:spcPct val="118000"/>
-              </a:lnSpc>
-              <a:buNone/>
-              <a:defRPr sz="1800" b="0">
-                <a:solidFill>
-                  <a:srgbClr val="1F4D78"/>
-                </a:solidFill>
-                <a:latin typeface="Consolas"/>
-                <a:ea typeface="Consolas"/>
-                <a:cs typeface="Consolas"/>
-              </a:defRPr>
-            </a:pPr>
-            <a:r>
-              <a:rPr sz="1800" b="0">
-                <a:solidFill>
-                  <a:srgbClr val="1F4D78"/>
-                </a:solidFill>
-                <a:latin typeface="Consolas"/>
-                <a:ea typeface="Consolas"/>
-                <a:cs typeface="Consolas"/>
+              <a:defRPr sz="3000" b="1">
+                <a:solidFill>
+                  <a:srgbClr val="FFFFFF"/>
+                </a:solidFill>
+                <a:latin typeface="微软雅黑"/>
+                <a:ea typeface="微软雅黑"/>
+                <a:cs typeface="微软雅黑"/>
+              </a:defRPr>
+            </a:pPr>
+            <a:r>
+              <a:rPr sz="3000" b="1">
+                <a:solidFill>
+                  <a:srgbClr val="FFFFFF"/>
+                </a:solidFill>
+                <a:latin typeface="微软雅黑"/>
+                <a:ea typeface="微软雅黑"/>
+                <a:cs typeface="微软雅黑"/>
               </a:rPr>
-              <a:t>第 15 课 · 真实同行评审</a:t>
-            </a:r>
-          </a:p>
-        </p:txBody>
-      </p:sp>
-      <p:sp>
-        <p:nvSpPr>
-          <p:cNvPr id="8" name="handoff-line0">
-            <a:extLst xmlns:a="http://schemas.openxmlformats.org/drawingml/2006/main">
-              <a:ext uri="{FF2B5EF4-FFF2-40B4-BE49-F238E27FC236}">
-                <a16:creationId xmlns:a16="http://schemas.microsoft.com/office/drawing/2014/main" id="{9C7E7C15-7CEB-4CD9-AAF4-E021B21CA9DA}"/>
-              </a:ext>
-            </a:extLst>
-          </p:cNvPr>
-          <p:cNvSpPr>
-            <a:spLocks xmlns:a="http://schemas.openxmlformats.org/drawingml/2006/main" noGrp="1"/>
-          </p:cNvSpPr>
-          <p:nvPr/>
-        </p:nvSpPr>
-        <p:spPr>
-          <a:xfrm xmlns:a="http://schemas.openxmlformats.org/drawingml/2006/main">
-            <a:off x="723900" y="2066925"/>
-            <a:ext cx="7124700" cy="828675"/>
+              <a:t>保留本课决定，准备下一课输入</a:t>
+            </a:r>
+          </a:p>
+        </p:txBody>
+      </p:sp>
+      <p:sp>
+        <p:nvSpPr>
+          <p:cNvPr id="2" name="judgment-body-0">
+            <a:extLst xmlns:a="http://schemas.openxmlformats.org/drawingml/2006/main">
+              <a:ext uri="{FF2B5EF4-FFF2-40B4-BE49-F238E27FC236}">
+                <a16:creationId xmlns:a16="http://schemas.microsoft.com/office/drawing/2014/main" id="{59A75EA8-F3FA-46C6-8666-29A8FC7813A6}"/>
+              </a:ext>
+            </a:extLst>
+          </p:cNvPr>
+          <p:cNvSpPr>
+            <a:spLocks xmlns:a="http://schemas.openxmlformats.org/drawingml/2006/main" noGrp="1"/>
+          </p:cNvSpPr>
+          <p:nvPr/>
+        </p:nvSpPr>
+        <p:spPr>
+          <a:xfrm xmlns:a="http://schemas.openxmlformats.org/drawingml/2006/main">
+            <a:off x="666750" y="1066800"/>
+            <a:ext cx="10858500" cy="1009650"/>
           </a:xfrm>
           <a:prstGeom xmlns:a="http://schemas.openxmlformats.org/drawingml/2006/main" prst="rect">
             <a:avLst/>
@@ -9660,54 +8357,61 @@
         </p:spPr>
         <p:txBody>
           <a:bodyPr xmlns:a="http://schemas.openxmlformats.org/drawingml/2006/main" lIns="0" tIns="0" rIns="0" bIns="0" anchor="t"/>
-          <a:lstStyle xmlns:a="http://schemas.openxmlformats.org/drawingml/2006/main"/>
+          <a:lstStyle xmlns:a="http://schemas.openxmlformats.org/drawingml/2006/main">
+            <a:defPPr algn="l">
+              <a:defRPr sz="2400" b="0">
+                <a:solidFill>
+                  <a:srgbClr val="263746"/>
+                </a:solidFill>
+                <a:latin typeface="微软雅黑"/>
+                <a:ea typeface="微软雅黑"/>
+                <a:cs typeface="微软雅黑"/>
+              </a:defRPr>
+            </a:defPPr>
+          </a:lstStyle>
           <a:p xmlns:a="http://schemas.openxmlformats.org/drawingml/2006/main">
             <a:pPr algn="l">
-              <a:lnSpc>
-                <a:spcPct val="118000"/>
-              </a:lnSpc>
-              <a:buNone/>
-              <a:defRPr sz="2200" b="0">
-                <a:solidFill>
-                  <a:srgbClr val="27333D"/>
-                </a:solidFill>
-                <a:latin typeface="微软雅黑"/>
-                <a:ea typeface="微软雅黑"/>
-                <a:cs typeface="微软雅黑"/>
-              </a:defRPr>
-            </a:pPr>
-            <a:r>
-              <a:rPr sz="2200" b="0">
-                <a:solidFill>
-                  <a:srgbClr val="27333D"/>
+              <a:defRPr sz="2400" b="0">
+                <a:solidFill>
+                  <a:srgbClr val="263746"/>
+                </a:solidFill>
+                <a:latin typeface="微软雅黑"/>
+                <a:ea typeface="微软雅黑"/>
+                <a:cs typeface="微软雅黑"/>
+              </a:defRPr>
+            </a:pPr>
+            <a:r>
+              <a:rPr sz="2400" b="0">
+                <a:solidFill>
+                  <a:srgbClr val="263746"/>
                 </a:solidFill>
                 <a:latin typeface="微软雅黑"/>
                 <a:ea typeface="微软雅黑"/>
                 <a:cs typeface="微软雅黑"/>
               </a:rPr>
-              <a:t>report.md 初版</a:t>
-            </a:r>
-          </a:p>
-        </p:txBody>
-      </p:sp>
-      <p:sp>
-        <p:nvSpPr>
-          <p:cNvPr id="9" name="handoff-line1">
-            <a:extLst xmlns:a="http://schemas.openxmlformats.org/drawingml/2006/main">
-              <a:ext uri="{FF2B5EF4-FFF2-40B4-BE49-F238E27FC236}">
-                <a16:creationId xmlns:a16="http://schemas.microsoft.com/office/drawing/2014/main" id="{A43F9AB4-B08A-4988-9F3C-DAA9708CEC39}"/>
-              </a:ext>
-            </a:extLst>
-          </p:cNvPr>
-          <p:cNvSpPr>
-            <a:spLocks xmlns:a="http://schemas.openxmlformats.org/drawingml/2006/main" noGrp="1"/>
-          </p:cNvSpPr>
-          <p:nvPr/>
-        </p:nvSpPr>
-        <p:spPr>
-          <a:xfrm xmlns:a="http://schemas.openxmlformats.org/drawingml/2006/main">
-            <a:off x="723900" y="2895600"/>
-            <a:ext cx="7124700" cy="828675"/>
+              <a:t>L15 以这份实际初稿进行同行评审。</a:t>
+            </a:r>
+          </a:p>
+        </p:txBody>
+      </p:sp>
+      <p:sp>
+        <p:nvSpPr>
+          <p:cNvPr id="3" name="judgment-body-1">
+            <a:extLst xmlns:a="http://schemas.openxmlformats.org/drawingml/2006/main">
+              <a:ext uri="{FF2B5EF4-FFF2-40B4-BE49-F238E27FC236}">
+                <a16:creationId xmlns:a16="http://schemas.microsoft.com/office/drawing/2014/main" id="{7D5690B2-2B66-446A-BF52-B365BEFB4A39}"/>
+              </a:ext>
+            </a:extLst>
+          </p:cNvPr>
+          <p:cNvSpPr>
+            <a:spLocks xmlns:a="http://schemas.openxmlformats.org/drawingml/2006/main" noGrp="1"/>
+          </p:cNvSpPr>
+          <p:nvPr/>
+        </p:nvSpPr>
+        <p:spPr>
+          <a:xfrm xmlns:a="http://schemas.openxmlformats.org/drawingml/2006/main">
+            <a:off x="666750" y="2238375"/>
+            <a:ext cx="10858500" cy="2076450"/>
           </a:xfrm>
           <a:prstGeom xmlns:a="http://schemas.openxmlformats.org/drawingml/2006/main" prst="rect">
             <a:avLst/>
@@ -9719,54 +8423,61 @@
         </p:spPr>
         <p:txBody>
           <a:bodyPr xmlns:a="http://schemas.openxmlformats.org/drawingml/2006/main" lIns="0" tIns="0" rIns="0" bIns="0" anchor="t"/>
-          <a:lstStyle xmlns:a="http://schemas.openxmlformats.org/drawingml/2006/main"/>
+          <a:lstStyle xmlns:a="http://schemas.openxmlformats.org/drawingml/2006/main">
+            <a:defPPr algn="l">
+              <a:defRPr sz="2400" b="0">
+                <a:solidFill>
+                  <a:srgbClr val="263746"/>
+                </a:solidFill>
+                <a:latin typeface="微软雅黑"/>
+                <a:ea typeface="微软雅黑"/>
+                <a:cs typeface="微软雅黑"/>
+              </a:defRPr>
+            </a:defPPr>
+          </a:lstStyle>
           <a:p xmlns:a="http://schemas.openxmlformats.org/drawingml/2006/main">
             <a:pPr algn="l">
-              <a:lnSpc>
-                <a:spcPct val="118000"/>
-              </a:lnSpc>
-              <a:buNone/>
-              <a:defRPr sz="2200" b="0">
-                <a:solidFill>
-                  <a:srgbClr val="27333D"/>
-                </a:solidFill>
-                <a:latin typeface="微软雅黑"/>
-                <a:ea typeface="微软雅黑"/>
-                <a:cs typeface="微软雅黑"/>
-              </a:defRPr>
-            </a:pPr>
-            <a:r>
-              <a:rPr sz="2200" b="0">
-                <a:solidFill>
-                  <a:srgbClr val="27333D"/>
+              <a:defRPr sz="2400" b="0">
+                <a:solidFill>
+                  <a:srgbClr val="263746"/>
+                </a:solidFill>
+                <a:latin typeface="微软雅黑"/>
+                <a:ea typeface="微软雅黑"/>
+                <a:cs typeface="微软雅黑"/>
+              </a:defRPr>
+            </a:pPr>
+            <a:r>
+              <a:rPr sz="2400" b="0">
+                <a:solidFill>
+                  <a:srgbClr val="263746"/>
                 </a:solidFill>
                 <a:latin typeface="微软雅黑"/>
                 <a:ea typeface="微软雅黑"/>
                 <a:cs typeface="微软雅黑"/>
               </a:rPr>
-              <a:t>结论追踪记录</a:t>
-            </a:r>
-          </a:p>
-        </p:txBody>
-      </p:sp>
-      <p:sp>
-        <p:nvSpPr>
-          <p:cNvPr id="10" name="handoff-line2">
-            <a:extLst xmlns:a="http://schemas.openxmlformats.org/drawingml/2006/main">
-              <a:ext uri="{FF2B5EF4-FFF2-40B4-BE49-F238E27FC236}">
-                <a16:creationId xmlns:a16="http://schemas.microsoft.com/office/drawing/2014/main" id="{CB1A7594-ECD2-4453-B44D-9DD4CA70A789}"/>
-              </a:ext>
-            </a:extLst>
-          </p:cNvPr>
-          <p:cNvSpPr>
-            <a:spLocks xmlns:a="http://schemas.openxmlformats.org/drawingml/2006/main" noGrp="1"/>
-          </p:cNvSpPr>
-          <p:nvPr/>
-        </p:nvSpPr>
-        <p:spPr>
-          <a:xfrm xmlns:a="http://schemas.openxmlformats.org/drawingml/2006/main">
-            <a:off x="723900" y="3724275"/>
-            <a:ext cx="7124700" cy="828675"/>
+              <a:t>回写已有项目：report.md 或主文档中的论证段、完整骨架与追踪条目</a:t>
+            </a:r>
+          </a:p>
+        </p:txBody>
+      </p:sp>
+      <p:sp>
+        <p:nvSpPr>
+          <p:cNvPr id="4" name="judgment-body-2">
+            <a:extLst xmlns:a="http://schemas.openxmlformats.org/drawingml/2006/main">
+              <a:ext uri="{FF2B5EF4-FFF2-40B4-BE49-F238E27FC236}">
+                <a16:creationId xmlns:a16="http://schemas.microsoft.com/office/drawing/2014/main" id="{B92F6F7E-8E4C-4727-9E30-74AA8B589475}"/>
+              </a:ext>
+            </a:extLst>
+          </p:cNvPr>
+          <p:cNvSpPr>
+            <a:spLocks xmlns:a="http://schemas.openxmlformats.org/drawingml/2006/main" noGrp="1"/>
+          </p:cNvSpPr>
+          <p:nvPr/>
+        </p:nvSpPr>
+        <p:spPr>
+          <a:xfrm xmlns:a="http://schemas.openxmlformats.org/drawingml/2006/main">
+            <a:off x="666750" y="4495800"/>
+            <a:ext cx="10858500" cy="1409700"/>
           </a:xfrm>
           <a:prstGeom xmlns:a="http://schemas.openxmlformats.org/drawingml/2006/main" prst="rect">
             <a:avLst/>
@@ -9778,16 +8489,23 @@
         </p:spPr>
         <p:txBody>
           <a:bodyPr xmlns:a="http://schemas.openxmlformats.org/drawingml/2006/main" lIns="0" tIns="0" rIns="0" bIns="0" anchor="t"/>
-          <a:lstStyle xmlns:a="http://schemas.openxmlformats.org/drawingml/2006/main"/>
+          <a:lstStyle xmlns:a="http://schemas.openxmlformats.org/drawingml/2006/main">
+            <a:defPPr algn="l">
+              <a:defRPr sz="2200" b="0">
+                <a:solidFill>
+                  <a:srgbClr val="1F4D78"/>
+                </a:solidFill>
+                <a:latin typeface="微软雅黑"/>
+                <a:ea typeface="微软雅黑"/>
+                <a:cs typeface="微软雅黑"/>
+              </a:defRPr>
+            </a:defPPr>
+          </a:lstStyle>
           <a:p xmlns:a="http://schemas.openxmlformats.org/drawingml/2006/main">
             <a:pPr algn="l">
-              <a:lnSpc>
-                <a:spcPct val="118000"/>
-              </a:lnSpc>
-              <a:buNone/>
               <a:defRPr sz="2200" b="0">
                 <a:solidFill>
-                  <a:srgbClr val="27333D"/>
+                  <a:srgbClr val="1F4D78"/>
                 </a:solidFill>
                 <a:latin typeface="微软雅黑"/>
                 <a:ea typeface="微软雅黑"/>
@@ -9797,35 +8515,35 @@
             <a:r>
               <a:rPr sz="2200" b="0">
                 <a:solidFill>
-                  <a:srgbClr val="27333D"/>
+                  <a:srgbClr val="1F4D78"/>
                 </a:solidFill>
                 <a:latin typeface="微软雅黑"/>
                 <a:ea typeface="微软雅黑"/>
                 <a:cs typeface="微软雅黑"/>
               </a:rPr>
-              <a:t>AI 使用披露摘要</a:t>
-            </a:r>
-          </a:p>
-        </p:txBody>
-      </p:sp>
-      <p:sp>
-        <p:nvSpPr>
-          <p:cNvPr id="11" name="handoff-line3">
-            <a:extLst xmlns:a="http://schemas.openxmlformats.org/drawingml/2006/main">
-              <a:ext uri="{FF2B5EF4-FFF2-40B4-BE49-F238E27FC236}">
-                <a16:creationId xmlns:a16="http://schemas.microsoft.com/office/drawing/2014/main" id="{268C67F4-C2A5-4FC8-936B-CDB17468655F}"/>
-              </a:ext>
-            </a:extLst>
-          </p:cNvPr>
-          <p:cNvSpPr>
-            <a:spLocks xmlns:a="http://schemas.openxmlformats.org/drawingml/2006/main" noGrp="1"/>
-          </p:cNvSpPr>
-          <p:nvPr/>
-        </p:nvSpPr>
-        <p:spPr>
-          <a:xfrm xmlns:a="http://schemas.openxmlformats.org/drawingml/2006/main">
-            <a:off x="723900" y="4552950"/>
-            <a:ext cx="7124700" cy="828675"/>
+              <a:t>只读指定段落，补课堂留下的真实缺口。安装与排障计入课外总预算。</a:t>
+            </a:r>
+          </a:p>
+        </p:txBody>
+      </p:sp>
+      <p:sp>
+        <p:nvSpPr>
+          <p:cNvPr id="5" name="judgment-source">
+            <a:extLst xmlns:a="http://schemas.openxmlformats.org/drawingml/2006/main">
+              <a:ext uri="{FF2B5EF4-FFF2-40B4-BE49-F238E27FC236}">
+                <a16:creationId xmlns:a16="http://schemas.microsoft.com/office/drawing/2014/main" id="{A80CBEAD-7DCB-4F72-8365-E2D38D956BC8}"/>
+              </a:ext>
+            </a:extLst>
+          </p:cNvPr>
+          <p:cNvSpPr>
+            <a:spLocks xmlns:a="http://schemas.openxmlformats.org/drawingml/2006/main" noGrp="1"/>
+          </p:cNvSpPr>
+          <p:nvPr/>
+        </p:nvSpPr>
+        <p:spPr>
+          <a:xfrm xmlns:a="http://schemas.openxmlformats.org/drawingml/2006/main">
+            <a:off x="666750" y="6276975"/>
+            <a:ext cx="10572750" cy="209550"/>
           </a:xfrm>
           <a:prstGeom xmlns:a="http://schemas.openxmlformats.org/drawingml/2006/main" prst="rect">
             <a:avLst/>
@@ -9837,54 +8555,61 @@
         </p:spPr>
         <p:txBody>
           <a:bodyPr xmlns:a="http://schemas.openxmlformats.org/drawingml/2006/main" lIns="0" tIns="0" rIns="0" bIns="0" anchor="t"/>
-          <a:lstStyle xmlns:a="http://schemas.openxmlformats.org/drawingml/2006/main"/>
+          <a:lstStyle xmlns:a="http://schemas.openxmlformats.org/drawingml/2006/main">
+            <a:defPPr algn="l">
+              <a:defRPr sz="1100" b="0">
+                <a:solidFill>
+                  <a:srgbClr val="667684"/>
+                </a:solidFill>
+                <a:latin typeface="微软雅黑"/>
+                <a:ea typeface="微软雅黑"/>
+                <a:cs typeface="微软雅黑"/>
+              </a:defRPr>
+            </a:defPPr>
+          </a:lstStyle>
           <a:p xmlns:a="http://schemas.openxmlformats.org/drawingml/2006/main">
             <a:pPr algn="l">
-              <a:lnSpc>
-                <a:spcPct val="118000"/>
-              </a:lnSpc>
-              <a:buNone/>
-              <a:defRPr sz="2200" b="0">
-                <a:solidFill>
-                  <a:srgbClr val="27333D"/>
-                </a:solidFill>
-                <a:latin typeface="微软雅黑"/>
-                <a:ea typeface="微软雅黑"/>
-                <a:cs typeface="微软雅黑"/>
-              </a:defRPr>
-            </a:pPr>
-            <a:r>
-              <a:rPr sz="2200" b="0">
-                <a:solidFill>
-                  <a:srgbClr val="27333D"/>
+              <a:defRPr sz="1100" b="0">
+                <a:solidFill>
+                  <a:srgbClr val="667684"/>
+                </a:solidFill>
+                <a:latin typeface="微软雅黑"/>
+                <a:ea typeface="微软雅黑"/>
+                <a:cs typeface="微软雅黑"/>
+              </a:defRPr>
+            </a:pPr>
+            <a:r>
+              <a:rPr sz="1100" b="0">
+                <a:solidFill>
+                  <a:srgbClr val="667684"/>
                 </a:solidFill>
                 <a:latin typeface="微软雅黑"/>
                 <a:ea typeface="微软雅黑"/>
                 <a:cs typeface="微软雅黑"/>
               </a:rPr>
-              <a:t>可定位的证据与运行记录</a:t>
-            </a:r>
-          </a:p>
-        </p:txBody>
-      </p:sp>
-      <p:sp>
-        <p:nvSpPr>
-          <p:cNvPr id="12" name="action">
-            <a:extLst xmlns:a="http://schemas.openxmlformats.org/drawingml/2006/main">
-              <a:ext uri="{FF2B5EF4-FFF2-40B4-BE49-F238E27FC236}">
-                <a16:creationId xmlns:a16="http://schemas.microsoft.com/office/drawing/2014/main" id="{187324D8-7B20-45DF-9BC3-112631A73324}"/>
-              </a:ext>
-            </a:extLst>
-          </p:cNvPr>
-          <p:cNvSpPr>
-            <a:spLocks xmlns:a="http://schemas.openxmlformats.org/drawingml/2006/main" noGrp="1"/>
-          </p:cNvSpPr>
-          <p:nvPr/>
-        </p:nvSpPr>
-        <p:spPr>
-          <a:xfrm xmlns:a="http://schemas.openxmlformats.org/drawingml/2006/main">
-            <a:off x="8629650" y="2190750"/>
-            <a:ext cx="2905125" cy="1295400"/>
+              <a:t>来源：本课判断任务与讲义；构造材料及真实来源按材料包标识</a:t>
+            </a:r>
+          </a:p>
+        </p:txBody>
+      </p:sp>
+      <p:sp>
+        <p:nvSpPr>
+          <p:cNvPr id="6" name="judgment-page">
+            <a:extLst xmlns:a="http://schemas.openxmlformats.org/drawingml/2006/main">
+              <a:ext uri="{FF2B5EF4-FFF2-40B4-BE49-F238E27FC236}">
+                <a16:creationId xmlns:a16="http://schemas.microsoft.com/office/drawing/2014/main" id="{A9367BEF-711C-4C9C-96B8-55C774F2A670}"/>
+              </a:ext>
+            </a:extLst>
+          </p:cNvPr>
+          <p:cNvSpPr>
+            <a:spLocks xmlns:a="http://schemas.openxmlformats.org/drawingml/2006/main" noGrp="1"/>
+          </p:cNvSpPr>
+          <p:nvPr/>
+        </p:nvSpPr>
+        <p:spPr>
+          <a:xfrm xmlns:a="http://schemas.openxmlformats.org/drawingml/2006/main">
+            <a:off x="11715750" y="6562725"/>
+            <a:ext cx="238125" cy="171450"/>
           </a:xfrm>
           <a:prstGeom xmlns:a="http://schemas.openxmlformats.org/drawingml/2006/main" prst="rect">
             <a:avLst/>
@@ -9896,177 +8621,39 @@
         </p:spPr>
         <p:txBody>
           <a:bodyPr xmlns:a="http://schemas.openxmlformats.org/drawingml/2006/main" lIns="0" tIns="0" rIns="0" bIns="0" anchor="t"/>
-          <a:lstStyle xmlns:a="http://schemas.openxmlformats.org/drawingml/2006/main"/>
+          <a:lstStyle xmlns:a="http://schemas.openxmlformats.org/drawingml/2006/main">
+            <a:defPPr algn="l">
+              <a:defRPr sz="900" b="0">
+                <a:solidFill>
+                  <a:srgbClr val="A5A5A5"/>
+                </a:solidFill>
+                <a:latin typeface="微软雅黑"/>
+                <a:ea typeface="微软雅黑"/>
+                <a:cs typeface="微软雅黑"/>
+              </a:defRPr>
+            </a:defPPr>
+          </a:lstStyle>
           <a:p xmlns:a="http://schemas.openxmlformats.org/drawingml/2006/main">
             <a:pPr algn="l">
-              <a:lnSpc>
-                <a:spcPct val="118000"/>
-              </a:lnSpc>
-              <a:buNone/>
-              <a:defRPr sz="2800" b="1">
-                <a:solidFill>
-                  <a:srgbClr val="1F4D78"/>
-                </a:solidFill>
-                <a:latin typeface="微软雅黑"/>
-                <a:ea typeface="微软雅黑"/>
-                <a:cs typeface="微软雅黑"/>
-              </a:defRPr>
-            </a:pPr>
-            <a:r>
-              <a:rPr sz="2800" b="1">
-                <a:solidFill>
-                  <a:srgbClr val="1F4D78"/>
+              <a:defRPr sz="900" b="0">
+                <a:solidFill>
+                  <a:srgbClr val="A5A5A5"/>
+                </a:solidFill>
+                <a:latin typeface="微软雅黑"/>
+                <a:ea typeface="微软雅黑"/>
+                <a:cs typeface="微软雅黑"/>
+              </a:defRPr>
+            </a:pPr>
+            <a:r>
+              <a:rPr sz="900" b="0">
+                <a:solidFill>
+                  <a:srgbClr val="A5A5A5"/>
                 </a:solidFill>
                 <a:latin typeface="微软雅黑"/>
                 <a:ea typeface="微软雅黑"/>
                 <a:cs typeface="微软雅黑"/>
               </a:rPr>
-              <a:t>请确认同伴</a:t>
-            </a:r>
-          </a:p>
-          <a:p xmlns:a="http://schemas.openxmlformats.org/drawingml/2006/main">
-            <a:pPr algn="l">
-              <a:lnSpc>
-                <a:spcPct val="118000"/>
-              </a:lnSpc>
-              <a:buNone/>
-              <a:defRPr sz="2800" b="1">
-                <a:solidFill>
-                  <a:srgbClr val="1F4D78"/>
-                </a:solidFill>
-                <a:latin typeface="微软雅黑"/>
-                <a:ea typeface="微软雅黑"/>
-                <a:cs typeface="微软雅黑"/>
-              </a:defRPr>
-            </a:pPr>
-            <a:r>
-              <a:rPr sz="2800" b="1">
-                <a:solidFill>
-                  <a:srgbClr val="1F4D78"/>
-                </a:solidFill>
-                <a:latin typeface="微软雅黑"/>
-                <a:ea typeface="微软雅黑"/>
-                <a:cs typeface="微软雅黑"/>
-              </a:rPr>
-              <a:t>能够打开材料。</a:t>
-            </a:r>
-          </a:p>
-        </p:txBody>
-      </p:sp>
-      <p:sp>
-        <p:nvSpPr>
-          <p:cNvPr id="13" name="object">
-            <a:extLst xmlns:a="http://schemas.openxmlformats.org/drawingml/2006/main">
-              <a:ext uri="{FF2B5EF4-FFF2-40B4-BE49-F238E27FC236}">
-                <a16:creationId xmlns:a16="http://schemas.microsoft.com/office/drawing/2014/main" id="{007F6658-E4E4-491F-9667-F2A66830625A}"/>
-              </a:ext>
-            </a:extLst>
-          </p:cNvPr>
-          <p:cNvSpPr>
-            <a:spLocks xmlns:a="http://schemas.openxmlformats.org/drawingml/2006/main" noGrp="1"/>
-          </p:cNvSpPr>
-          <p:nvPr/>
-        </p:nvSpPr>
-        <p:spPr>
-          <a:xfrm xmlns:a="http://schemas.openxmlformats.org/drawingml/2006/main">
-            <a:off x="8629650" y="4419600"/>
-            <a:ext cx="2905125" cy="895350"/>
-          </a:xfrm>
-          <a:prstGeom xmlns:a="http://schemas.openxmlformats.org/drawingml/2006/main" prst="rect">
-            <a:avLst/>
-          </a:prstGeom>
-          <a:noFill xmlns:a="http://schemas.openxmlformats.org/drawingml/2006/main"/>
-          <a:ln xmlns:a="http://schemas.openxmlformats.org/drawingml/2006/main" w="0">
-            <a:noFill/>
-          </a:ln>
-        </p:spPr>
-        <p:txBody>
-          <a:bodyPr xmlns:a="http://schemas.openxmlformats.org/drawingml/2006/main" lIns="0" tIns="0" rIns="0" bIns="0" anchor="t"/>
-          <a:lstStyle xmlns:a="http://schemas.openxmlformats.org/drawingml/2006/main"/>
-          <a:p xmlns:a="http://schemas.openxmlformats.org/drawingml/2006/main">
-            <a:pPr algn="l">
-              <a:lnSpc>
-                <a:spcPct val="118000"/>
-              </a:lnSpc>
-              <a:buNone/>
-              <a:defRPr sz="2200" b="0">
-                <a:solidFill>
-                  <a:srgbClr val="27333D"/>
-                </a:solidFill>
-                <a:latin typeface="微软雅黑"/>
-                <a:ea typeface="微软雅黑"/>
-                <a:cs typeface="微软雅黑"/>
-              </a:defRPr>
-            </a:pPr>
-            <a:r>
-              <a:rPr sz="2200" b="0">
-                <a:solidFill>
-                  <a:srgbClr val="27333D"/>
-                </a:solidFill>
-                <a:latin typeface="微软雅黑"/>
-                <a:ea typeface="微软雅黑"/>
-                <a:cs typeface="微软雅黑"/>
-              </a:rPr>
-              <a:t>评审对象：论证链</a:t>
-            </a:r>
-          </a:p>
-        </p:txBody>
-      </p:sp>
-      <p:sp>
-        <p:nvSpPr>
-          <p:cNvPr id="14" name="source">
-            <a:extLst xmlns:a="http://schemas.openxmlformats.org/drawingml/2006/main">
-              <a:ext uri="{FF2B5EF4-FFF2-40B4-BE49-F238E27FC236}">
-                <a16:creationId xmlns:a16="http://schemas.microsoft.com/office/drawing/2014/main" id="{4EC80649-12DD-4B7E-9DD3-E7D7F907C728}"/>
-              </a:ext>
-            </a:extLst>
-          </p:cNvPr>
-          <p:cNvSpPr>
-            <a:spLocks xmlns:a="http://schemas.openxmlformats.org/drawingml/2006/main" noGrp="1"/>
-          </p:cNvSpPr>
-          <p:nvPr/>
-        </p:nvSpPr>
-        <p:spPr>
-          <a:xfrm xmlns:a="http://schemas.openxmlformats.org/drawingml/2006/main">
-            <a:off x="609600" y="6067425"/>
-            <a:ext cx="10763250" cy="209550"/>
-          </a:xfrm>
-          <a:prstGeom xmlns:a="http://schemas.openxmlformats.org/drawingml/2006/main" prst="rect">
-            <a:avLst/>
-          </a:prstGeom>
-          <a:noFill xmlns:a="http://schemas.openxmlformats.org/drawingml/2006/main"/>
-          <a:ln xmlns:a="http://schemas.openxmlformats.org/drawingml/2006/main" w="0">
-            <a:noFill/>
-          </a:ln>
-        </p:spPr>
-        <p:txBody>
-          <a:bodyPr xmlns:a="http://schemas.openxmlformats.org/drawingml/2006/main" lIns="0" tIns="0" rIns="0" bIns="0" anchor="t"/>
-          <a:lstStyle xmlns:a="http://schemas.openxmlformats.org/drawingml/2006/main"/>
-          <a:p xmlns:a="http://schemas.openxmlformats.org/drawingml/2006/main">
-            <a:pPr algn="l">
-              <a:lnSpc>
-                <a:spcPct val="118000"/>
-              </a:lnSpc>
-              <a:buNone/>
-              <a:defRPr sz="1100" b="0">
-                <a:solidFill>
-                  <a:srgbClr val="66727D"/>
-                </a:solidFill>
-                <a:latin typeface="微软雅黑"/>
-                <a:ea typeface="微软雅黑"/>
-                <a:cs typeface="微软雅黑"/>
-              </a:defRPr>
-            </a:pPr>
-            <a:r>
-              <a:rPr sz="1100" b="0">
-                <a:solidFill>
-                  <a:srgbClr val="66727D"/>
-                </a:solidFill>
-                <a:latin typeface="微软雅黑"/>
-                <a:ea typeface="微软雅黑"/>
-                <a:cs typeface="微软雅黑"/>
-              </a:rPr>
-              <a:t>来源：本课讲义；第 13 课评价报告；课程研究门规范 · 虚构数据不作为研究证据</a:t>
+              <a:t>16</a:t>
             </a:r>
           </a:p>
         </p:txBody>
@@ -10871,97 +9458,22 @@
       </p:grpSpPr>
       <p:sp>
         <p:nvSpPr>
-          <p:cNvPr id="4" name="Text Placeholder 3">
-            <a:extLst xmlns:a="http://schemas.openxmlformats.org/drawingml/2006/main">
-              <a:ext uri="{FF2B5EF4-FFF2-40B4-BE49-F238E27FC236}">
-                <a16:creationId xmlns:a16="http://schemas.microsoft.com/office/drawing/2014/main" id="{4D941B40-7A0A-534E-3563-CA11753C8E3F}"/>
-              </a:ext>
-            </a:extLst>
-          </p:cNvPr>
-          <p:cNvSpPr>
-            <a:spLocks xmlns:a="http://schemas.openxmlformats.org/drawingml/2006/main" noGrp="1"/>
-          </p:cNvSpPr>
-          <p:nvPr>
-            <p:ph type="body" idx="14"/>
-          </p:nvPr>
-        </p:nvSpPr>
-        <p:spPr>
-          <a:xfrm xmlns:a="http://schemas.openxmlformats.org/drawingml/2006/main">
-            <a:off x="1028700" y="57150"/>
-            <a:ext cx="10668000" cy="571500"/>
-          </a:xfrm>
-        </p:spPr>
-        <p:txBody>
-          <a:bodyPr xmlns:a="http://schemas.openxmlformats.org/drawingml/2006/main" lIns="0" tIns="0" rIns="0" bIns="0" anchor="ctr"/>
-          <a:lstStyle xmlns:a="http://schemas.openxmlformats.org/drawingml/2006/main"/>
-          <a:p xmlns:a="http://schemas.openxmlformats.org/drawingml/2006/main">
-            <a:pPr algn="l">
-              <a:lnSpc>
-                <a:spcPct val="118000"/>
-              </a:lnSpc>
-              <a:buNone/>
-            </a:pPr>
-            <a:r>
-              <a:rPr sz="3000" b="1">
-                <a:solidFill>
-                  <a:srgbClr val="FFFFFF"/>
-                </a:solidFill>
-                <a:latin typeface="微软雅黑"/>
-                <a:ea typeface="微软雅黑"/>
-                <a:cs typeface="微软雅黑"/>
-              </a:rPr>
-              <a:t>先选一个能反查的结果</a:t>
-            </a:r>
-            <a:endParaRPr/>
-          </a:p>
-        </p:txBody>
-      </p:sp>
-      <p:sp>
-        <p:nvSpPr>
-          <p:cNvPr id="5" name="Slide Number Placeholder 4">
-            <a:extLst xmlns:a="http://schemas.openxmlformats.org/drawingml/2006/main">
-              <a:ext uri="{FF2B5EF4-FFF2-40B4-BE49-F238E27FC236}">
-                <a16:creationId xmlns:a16="http://schemas.microsoft.com/office/drawing/2014/main" id="{EBA5909F-738E-F60C-BE8C-B3F1D94548E5}"/>
-              </a:ext>
-            </a:extLst>
-          </p:cNvPr>
-          <p:cNvSpPr>
-            <a:spLocks xmlns:a="http://schemas.openxmlformats.org/drawingml/2006/main" noGrp="1"/>
-          </p:cNvSpPr>
-          <p:nvPr>
-            <p:ph type="sldNum" idx="10"/>
-          </p:nvPr>
-        </p:nvSpPr>
-        <p:spPr/>
-        <p:txBody>
-          <a:bodyPr xmlns:a="http://schemas.openxmlformats.org/drawingml/2006/main"/>
-          <a:lstStyle xmlns:a="http://schemas.openxmlformats.org/drawingml/2006/main"/>
-          <a:p xmlns:a="http://schemas.openxmlformats.org/drawingml/2006/main">
-            <a:fld id="{202359C0-8A7A-196E-DD58-8E6569619F09}" type="slidenum">
-              <a:t>3</a:t>
-            </a:fld>
-            <a:endParaRPr/>
-          </a:p>
-        </p:txBody>
-      </p:sp>
-      <p:sp>
-        <p:nvSpPr>
-          <p:cNvPr id="6" name="content-111">
-            <a:extLst xmlns:a="http://schemas.openxmlformats.org/drawingml/2006/main">
-              <a:ext uri="{FF2B5EF4-FFF2-40B4-BE49-F238E27FC236}">
-                <a16:creationId xmlns:a16="http://schemas.microsoft.com/office/drawing/2014/main" id="{83C1D8FA-322F-4E9D-9180-D725DE12B1FF}"/>
-              </a:ext>
-            </a:extLst>
-          </p:cNvPr>
-          <p:cNvSpPr>
-            <a:spLocks xmlns:a="http://schemas.openxmlformats.org/drawingml/2006/main" noGrp="1"/>
-          </p:cNvSpPr>
-          <p:nvPr/>
-        </p:nvSpPr>
-        <p:spPr>
-          <a:xfrm xmlns:a="http://schemas.openxmlformats.org/drawingml/2006/main">
-            <a:off x="609600" y="1581150"/>
-            <a:ext cx="2333625" cy="609600"/>
+          <p:cNvPr id="7" name="judgment-title">
+            <a:extLst xmlns:a="http://schemas.openxmlformats.org/drawingml/2006/main">
+              <a:ext uri="{FF2B5EF4-FFF2-40B4-BE49-F238E27FC236}">
+                <a16:creationId xmlns:a16="http://schemas.microsoft.com/office/drawing/2014/main" id="{A208AFB0-27AA-43FF-83AE-2F852B1C3323}"/>
+              </a:ext>
+            </a:extLst>
+          </p:cNvPr>
+          <p:cNvSpPr>
+            <a:spLocks xmlns:a="http://schemas.openxmlformats.org/drawingml/2006/main" noGrp="1"/>
+          </p:cNvSpPr>
+          <p:nvPr/>
+        </p:nvSpPr>
+        <p:spPr>
+          <a:xfrm xmlns:a="http://schemas.openxmlformats.org/drawingml/2006/main">
+            <a:off x="1028700" y="76200"/>
+            <a:ext cx="10687050" cy="514350"/>
           </a:xfrm>
           <a:prstGeom xmlns:a="http://schemas.openxmlformats.org/drawingml/2006/main" prst="rect">
             <a:avLst/>
@@ -10973,54 +9485,61 @@
         </p:spPr>
         <p:txBody>
           <a:bodyPr xmlns:a="http://schemas.openxmlformats.org/drawingml/2006/main" lIns="0" tIns="0" rIns="0" bIns="0" anchor="t"/>
-          <a:lstStyle xmlns:a="http://schemas.openxmlformats.org/drawingml/2006/main"/>
+          <a:lstStyle xmlns:a="http://schemas.openxmlformats.org/drawingml/2006/main">
+            <a:defPPr algn="l">
+              <a:defRPr sz="3000" b="1">
+                <a:solidFill>
+                  <a:srgbClr val="FFFFFF"/>
+                </a:solidFill>
+                <a:latin typeface="微软雅黑"/>
+                <a:ea typeface="微软雅黑"/>
+                <a:cs typeface="微软雅黑"/>
+              </a:defRPr>
+            </a:defPPr>
+          </a:lstStyle>
           <a:p xmlns:a="http://schemas.openxmlformats.org/drawingml/2006/main">
             <a:pPr algn="l">
-              <a:lnSpc>
-                <a:spcPct val="118000"/>
-              </a:lnSpc>
-              <a:buNone/>
-              <a:defRPr sz="2400" b="1">
-                <a:solidFill>
-                  <a:srgbClr val="1F4D78"/>
-                </a:solidFill>
-                <a:latin typeface="微软雅黑"/>
-                <a:ea typeface="微软雅黑"/>
-                <a:cs typeface="微软雅黑"/>
-              </a:defRPr>
-            </a:pPr>
-            <a:r>
-              <a:rPr sz="2400" b="1">
-                <a:solidFill>
-                  <a:srgbClr val="1F4D78"/>
+              <a:defRPr sz="3000" b="1">
+                <a:solidFill>
+                  <a:srgbClr val="FFFFFF"/>
+                </a:solidFill>
+                <a:latin typeface="微软雅黑"/>
+                <a:ea typeface="微软雅黑"/>
+                <a:cs typeface="微软雅黑"/>
+              </a:defRPr>
+            </a:pPr>
+            <a:r>
+              <a:rPr sz="3000" b="1">
+                <a:solidFill>
+                  <a:srgbClr val="FFFFFF"/>
                 </a:solidFill>
                 <a:latin typeface="微软雅黑"/>
                 <a:ea typeface="微软雅黑"/>
                 <a:cs typeface="微软雅黑"/>
               </a:rPr>
-              <a:t>结果</a:t>
-            </a:r>
-          </a:p>
-        </p:txBody>
-      </p:sp>
-      <p:sp>
-        <p:nvSpPr>
-          <p:cNvPr id="7" name="content-112">
-            <a:extLst xmlns:a="http://schemas.openxmlformats.org/drawingml/2006/main">
-              <a:ext uri="{FF2B5EF4-FFF2-40B4-BE49-F238E27FC236}">
-                <a16:creationId xmlns:a16="http://schemas.microsoft.com/office/drawing/2014/main" id="{FDE9A375-5D38-4B7F-8237-C51A6F75DDBA}"/>
-              </a:ext>
-            </a:extLst>
-          </p:cNvPr>
-          <p:cNvSpPr>
-            <a:spLocks xmlns:a="http://schemas.openxmlformats.org/drawingml/2006/main" noGrp="1"/>
-          </p:cNvSpPr>
-          <p:nvPr/>
-        </p:nvSpPr>
-        <p:spPr>
-          <a:xfrm xmlns:a="http://schemas.openxmlformats.org/drawingml/2006/main">
-            <a:off x="3181350" y="1581150"/>
-            <a:ext cx="8286750" cy="666750"/>
+              <a:t>结果表述与证据强度</a:t>
+            </a:r>
+          </a:p>
+        </p:txBody>
+      </p:sp>
+      <p:sp>
+        <p:nvSpPr>
+          <p:cNvPr id="2" name="judgment-body-0">
+            <a:extLst xmlns:a="http://schemas.openxmlformats.org/drawingml/2006/main">
+              <a:ext uri="{FF2B5EF4-FFF2-40B4-BE49-F238E27FC236}">
+                <a16:creationId xmlns:a16="http://schemas.microsoft.com/office/drawing/2014/main" id="{604E6168-CEE4-445A-8B57-92EA604EEC06}"/>
+              </a:ext>
+            </a:extLst>
+          </p:cNvPr>
+          <p:cNvSpPr>
+            <a:spLocks xmlns:a="http://schemas.openxmlformats.org/drawingml/2006/main" noGrp="1"/>
+          </p:cNvSpPr>
+          <p:nvPr/>
+        </p:nvSpPr>
+        <p:spPr>
+          <a:xfrm xmlns:a="http://schemas.openxmlformats.org/drawingml/2006/main">
+            <a:off x="666750" y="1066800"/>
+            <a:ext cx="10858500" cy="1009650"/>
           </a:xfrm>
           <a:prstGeom xmlns:a="http://schemas.openxmlformats.org/drawingml/2006/main" prst="rect">
             <a:avLst/>
@@ -11032,84 +9551,61 @@
         </p:spPr>
         <p:txBody>
           <a:bodyPr xmlns:a="http://schemas.openxmlformats.org/drawingml/2006/main" lIns="0" tIns="0" rIns="0" bIns="0" anchor="t"/>
-          <a:lstStyle xmlns:a="http://schemas.openxmlformats.org/drawingml/2006/main"/>
+          <a:lstStyle xmlns:a="http://schemas.openxmlformats.org/drawingml/2006/main">
+            <a:defPPr algn="l">
+              <a:defRPr sz="2400" b="0">
+                <a:solidFill>
+                  <a:srgbClr val="263746"/>
+                </a:solidFill>
+                <a:latin typeface="微软雅黑"/>
+                <a:ea typeface="微软雅黑"/>
+                <a:cs typeface="微软雅黑"/>
+              </a:defRPr>
+            </a:defPPr>
+          </a:lstStyle>
           <a:p xmlns:a="http://schemas.openxmlformats.org/drawingml/2006/main">
             <a:pPr algn="l">
-              <a:lnSpc>
-                <a:spcPct val="118000"/>
-              </a:lnSpc>
-              <a:buNone/>
-              <a:defRPr sz="2300" b="0">
-                <a:solidFill>
-                  <a:srgbClr val="27333D"/>
-                </a:solidFill>
-                <a:latin typeface="微软雅黑"/>
-                <a:ea typeface="微软雅黑"/>
-                <a:cs typeface="微软雅黑"/>
-              </a:defRPr>
-            </a:pPr>
-            <a:r>
-              <a:rPr sz="2300" b="0">
-                <a:solidFill>
-                  <a:srgbClr val="27333D"/>
+              <a:defRPr sz="2400" b="0">
+                <a:solidFill>
+                  <a:srgbClr val="263746"/>
+                </a:solidFill>
+                <a:latin typeface="微软雅黑"/>
+                <a:ea typeface="微软雅黑"/>
+                <a:cs typeface="微软雅黑"/>
+              </a:defRPr>
+            </a:pPr>
+            <a:r>
+              <a:rPr sz="2400" b="0">
+                <a:solidFill>
+                  <a:srgbClr val="263746"/>
                 </a:solidFill>
                 <a:latin typeface="微软雅黑"/>
                 <a:ea typeface="微软雅黑"/>
                 <a:cs typeface="微软雅黑"/>
               </a:rPr>
-              <a:t>构造小包总遗漏率 3/8 与 4/8。</a:t>
-            </a:r>
-          </a:p>
-        </p:txBody>
-      </p:sp>
-      <p:sp>
-        <p:nvSpPr>
-          <p:cNvPr id="8" name="rule-113">
-            <a:extLst xmlns:a="http://schemas.openxmlformats.org/drawingml/2006/main">
-              <a:ext uri="{FF2B5EF4-FFF2-40B4-BE49-F238E27FC236}">
-                <a16:creationId xmlns:a16="http://schemas.microsoft.com/office/drawing/2014/main" id="{FA42AA39-E2AF-496A-8CDD-1886D6659086}"/>
-              </a:ext>
-            </a:extLst>
-          </p:cNvPr>
-          <p:cNvSpPr>
-            <a:spLocks xmlns:a="http://schemas.openxmlformats.org/drawingml/2006/main" noGrp="1"/>
-          </p:cNvSpPr>
-          <p:nvPr/>
-        </p:nvSpPr>
-        <p:spPr>
-          <a:xfrm xmlns:a="http://schemas.openxmlformats.org/drawingml/2006/main">
-            <a:off x="609600" y="2343150"/>
-            <a:ext cx="10858500" cy="14288"/>
-          </a:xfrm>
-          <a:prstGeom xmlns:a="http://schemas.openxmlformats.org/drawingml/2006/main" prst="rect">
-            <a:avLst/>
-          </a:prstGeom>
-          <a:solidFill xmlns:a="http://schemas.openxmlformats.org/drawingml/2006/main">
-            <a:srgbClr val="CDD5DB"/>
-          </a:solidFill>
-          <a:ln xmlns:a="http://schemas.openxmlformats.org/drawingml/2006/main" w="0">
-            <a:noFill/>
-          </a:ln>
-        </p:spPr>
-      </p:sp>
-      <p:sp>
-        <p:nvSpPr>
-          <p:cNvPr id="9" name="content-114">
-            <a:extLst xmlns:a="http://schemas.openxmlformats.org/drawingml/2006/main">
-              <a:ext uri="{FF2B5EF4-FFF2-40B4-BE49-F238E27FC236}">
-                <a16:creationId xmlns:a16="http://schemas.microsoft.com/office/drawing/2014/main" id="{0731BAF7-9D3F-4EF2-ACB4-D08C994A5EBD}"/>
-              </a:ext>
-            </a:extLst>
-          </p:cNvPr>
-          <p:cNvSpPr>
-            <a:spLocks xmlns:a="http://schemas.openxmlformats.org/drawingml/2006/main" noGrp="1"/>
-          </p:cNvSpPr>
-          <p:nvPr/>
-        </p:nvSpPr>
-        <p:spPr>
-          <a:xfrm xmlns:a="http://schemas.openxmlformats.org/drawingml/2006/main">
-            <a:off x="609600" y="2609850"/>
-            <a:ext cx="2333625" cy="609600"/>
+              <a:t>公开构造输出：3/8 vs 4/8；T03 反向；无机制区分实验</a:t>
+            </a:r>
+          </a:p>
+        </p:txBody>
+      </p:sp>
+      <p:sp>
+        <p:nvSpPr>
+          <p:cNvPr id="3" name="judgment-body-1">
+            <a:extLst xmlns:a="http://schemas.openxmlformats.org/drawingml/2006/main">
+              <a:ext uri="{FF2B5EF4-FFF2-40B4-BE49-F238E27FC236}">
+                <a16:creationId xmlns:a16="http://schemas.microsoft.com/office/drawing/2014/main" id="{98E9A1BD-EB51-4F9A-BE0D-E68D159B0957}"/>
+              </a:ext>
+            </a:extLst>
+          </p:cNvPr>
+          <p:cNvSpPr>
+            <a:spLocks xmlns:a="http://schemas.openxmlformats.org/drawingml/2006/main" noGrp="1"/>
+          </p:cNvSpPr>
+          <p:nvPr/>
+        </p:nvSpPr>
+        <p:spPr>
+          <a:xfrm xmlns:a="http://schemas.openxmlformats.org/drawingml/2006/main">
+            <a:off x="666750" y="2238375"/>
+            <a:ext cx="10858500" cy="2076450"/>
           </a:xfrm>
           <a:prstGeom xmlns:a="http://schemas.openxmlformats.org/drawingml/2006/main" prst="rect">
             <a:avLst/>
@@ -11121,54 +9617,107 @@
         </p:spPr>
         <p:txBody>
           <a:bodyPr xmlns:a="http://schemas.openxmlformats.org/drawingml/2006/main" lIns="0" tIns="0" rIns="0" bIns="0" anchor="t"/>
-          <a:lstStyle xmlns:a="http://schemas.openxmlformats.org/drawingml/2006/main"/>
+          <a:lstStyle xmlns:a="http://schemas.openxmlformats.org/drawingml/2006/main">
+            <a:defPPr algn="l">
+              <a:defRPr sz="2400" b="0">
+                <a:solidFill>
+                  <a:srgbClr val="263746"/>
+                </a:solidFill>
+                <a:latin typeface="微软雅黑"/>
+                <a:ea typeface="微软雅黑"/>
+                <a:cs typeface="微软雅黑"/>
+              </a:defRPr>
+            </a:defPPr>
+          </a:lstStyle>
           <a:p xmlns:a="http://schemas.openxmlformats.org/drawingml/2006/main">
             <a:pPr algn="l">
-              <a:lnSpc>
-                <a:spcPct val="118000"/>
-              </a:lnSpc>
-              <a:buNone/>
-              <a:defRPr sz="2400" b="1">
-                <a:solidFill>
-                  <a:srgbClr val="1F4D78"/>
-                </a:solidFill>
-                <a:latin typeface="微软雅黑"/>
-                <a:ea typeface="微软雅黑"/>
-                <a:cs typeface="微软雅黑"/>
-              </a:defRPr>
-            </a:pPr>
-            <a:r>
-              <a:rPr sz="2400" b="1">
-                <a:solidFill>
-                  <a:srgbClr val="1F4D78"/>
+              <a:defRPr sz="2400" b="0">
+                <a:solidFill>
+                  <a:srgbClr val="263746"/>
+                </a:solidFill>
+                <a:latin typeface="微软雅黑"/>
+                <a:ea typeface="微软雅黑"/>
+                <a:cs typeface="微软雅黑"/>
+              </a:defRPr>
+            </a:pPr>
+            <a:r>
+              <a:rPr sz="2400" b="0">
+                <a:solidFill>
+                  <a:srgbClr val="263746"/>
                 </a:solidFill>
                 <a:latin typeface="微软雅黑"/>
                 <a:ea typeface="微软雅黑"/>
                 <a:cs typeface="微软雅黑"/>
               </a:rPr>
-              <a:t>原始对象</a:t>
-            </a:r>
-          </a:p>
-        </p:txBody>
-      </p:sp>
-      <p:sp>
-        <p:nvSpPr>
-          <p:cNvPr id="10" name="content-115">
-            <a:extLst xmlns:a="http://schemas.openxmlformats.org/drawingml/2006/main">
-              <a:ext uri="{FF2B5EF4-FFF2-40B4-BE49-F238E27FC236}">
-                <a16:creationId xmlns:a16="http://schemas.microsoft.com/office/drawing/2014/main" id="{A4950005-A10E-4ABE-B408-FD9007B2D725}"/>
-              </a:ext>
-            </a:extLst>
-          </p:cNvPr>
-          <p:cNvSpPr>
-            <a:spLocks xmlns:a="http://schemas.openxmlformats.org/drawingml/2006/main" noGrp="1"/>
-          </p:cNvSpPr>
-          <p:nvPr/>
-        </p:nvSpPr>
-        <p:spPr>
-          <a:xfrm xmlns:a="http://schemas.openxmlformats.org/drawingml/2006/main">
-            <a:off x="3181350" y="2609850"/>
-            <a:ext cx="8286750" cy="666750"/>
+              <a:t>A｜显著提高科研质量，机制已证实</a:t>
+            </a:r>
+          </a:p>
+          <a:p xmlns:a="http://schemas.openxmlformats.org/drawingml/2006/main">
+            <a:pPr algn="l">
+              <a:defRPr sz="2400" b="0">
+                <a:solidFill>
+                  <a:srgbClr val="263746"/>
+                </a:solidFill>
+                <a:latin typeface="微软雅黑"/>
+                <a:ea typeface="微软雅黑"/>
+                <a:cs typeface="微软雅黑"/>
+              </a:defRPr>
+            </a:pPr>
+            <a:r>
+              <a:rPr sz="2400" b="0">
+                <a:solidFill>
+                  <a:srgbClr val="263746"/>
+                </a:solidFill>
+                <a:latin typeface="微软雅黑"/>
+                <a:ea typeface="微软雅黑"/>
+                <a:cs typeface="微软雅黑"/>
+              </a:rPr>
+              <a:t>B｜样本小，没有任何可报告结果</a:t>
+            </a:r>
+          </a:p>
+          <a:p xmlns:a="http://schemas.openxmlformats.org/drawingml/2006/main">
+            <a:pPr algn="l">
+              <a:defRPr sz="2400" b="0">
+                <a:solidFill>
+                  <a:srgbClr val="263746"/>
+                </a:solidFill>
+                <a:latin typeface="微软雅黑"/>
+                <a:ea typeface="微软雅黑"/>
+                <a:cs typeface="微软雅黑"/>
+              </a:defRPr>
+            </a:pPr>
+            <a:r>
+              <a:rPr sz="2400" b="0">
+                <a:solidFill>
+                  <a:srgbClr val="263746"/>
+                </a:solidFill>
+                <a:latin typeface="微软雅黑"/>
+                <a:ea typeface="微软雅黑"/>
+                <a:cs typeface="微软雅黑"/>
+              </a:rPr>
+              <a:t>C｜此输出集遗漏率差 -0.125；保留负例与范围</a:t>
+            </a:r>
+          </a:p>
+        </p:txBody>
+      </p:sp>
+      <p:sp>
+        <p:nvSpPr>
+          <p:cNvPr id="4" name="judgment-body-2">
+            <a:extLst xmlns:a="http://schemas.openxmlformats.org/drawingml/2006/main">
+              <a:ext uri="{FF2B5EF4-FFF2-40B4-BE49-F238E27FC236}">
+                <a16:creationId xmlns:a16="http://schemas.microsoft.com/office/drawing/2014/main" id="{946FFCFF-E538-4837-A942-6BA877EB2B00}"/>
+              </a:ext>
+            </a:extLst>
+          </p:cNvPr>
+          <p:cNvSpPr>
+            <a:spLocks xmlns:a="http://schemas.openxmlformats.org/drawingml/2006/main" noGrp="1"/>
+          </p:cNvSpPr>
+          <p:nvPr/>
+        </p:nvSpPr>
+        <p:spPr>
+          <a:xfrm xmlns:a="http://schemas.openxmlformats.org/drawingml/2006/main">
+            <a:off x="666750" y="4495800"/>
+            <a:ext cx="10858500" cy="1409700"/>
           </a:xfrm>
           <a:prstGeom xmlns:a="http://schemas.openxmlformats.org/drawingml/2006/main" prst="rect">
             <a:avLst/>
@@ -11180,84 +9729,61 @@
         </p:spPr>
         <p:txBody>
           <a:bodyPr xmlns:a="http://schemas.openxmlformats.org/drawingml/2006/main" lIns="0" tIns="0" rIns="0" bIns="0" anchor="t"/>
-          <a:lstStyle xmlns:a="http://schemas.openxmlformats.org/drawingml/2006/main"/>
+          <a:lstStyle xmlns:a="http://schemas.openxmlformats.org/drawingml/2006/main">
+            <a:defPPr algn="l">
+              <a:defRPr sz="2200" b="0">
+                <a:solidFill>
+                  <a:srgbClr val="1F4D78"/>
+                </a:solidFill>
+                <a:latin typeface="微软雅黑"/>
+                <a:ea typeface="微软雅黑"/>
+                <a:cs typeface="微软雅黑"/>
+              </a:defRPr>
+            </a:defPPr>
+          </a:lstStyle>
           <a:p xmlns:a="http://schemas.openxmlformats.org/drawingml/2006/main">
             <a:pPr algn="l">
-              <a:lnSpc>
-                <a:spcPct val="118000"/>
-              </a:lnSpc>
-              <a:buNone/>
-              <a:defRPr sz="2300" b="0">
-                <a:solidFill>
-                  <a:srgbClr val="27333D"/>
-                </a:solidFill>
-                <a:latin typeface="微软雅黑"/>
-                <a:ea typeface="微软雅黑"/>
-                <a:cs typeface="微软雅黑"/>
-              </a:defRPr>
-            </a:pPr>
-            <a:r>
-              <a:rPr sz="2300" b="0">
-                <a:solidFill>
-                  <a:srgbClr val="27333D"/>
+              <a:defRPr sz="2200" b="0">
+                <a:solidFill>
+                  <a:srgbClr val="1F4D78"/>
+                </a:solidFill>
+                <a:latin typeface="微软雅黑"/>
+                <a:ea typeface="微软雅黑"/>
+                <a:cs typeface="微软雅黑"/>
+              </a:defRPr>
+            </a:pPr>
+            <a:r>
+              <a:rPr sz="2200" b="0">
+                <a:solidFill>
+                  <a:srgbClr val="1F4D78"/>
                 </a:solidFill>
                 <a:latin typeface="微软雅黑"/>
                 <a:ea typeface="微软雅黑"/>
                 <a:cs typeface="微软雅黑"/>
               </a:rPr>
-              <a:t>T01–T03、输出原句与逐项标注。</a:t>
-            </a:r>
-          </a:p>
-        </p:txBody>
-      </p:sp>
-      <p:sp>
-        <p:nvSpPr>
-          <p:cNvPr id="11" name="rule-116">
-            <a:extLst xmlns:a="http://schemas.openxmlformats.org/drawingml/2006/main">
-              <a:ext uri="{FF2B5EF4-FFF2-40B4-BE49-F238E27FC236}">
-                <a16:creationId xmlns:a16="http://schemas.microsoft.com/office/drawing/2014/main" id="{29E4BCCB-85FC-403A-BA6D-B76B3ED47E99}"/>
-              </a:ext>
-            </a:extLst>
-          </p:cNvPr>
-          <p:cNvSpPr>
-            <a:spLocks xmlns:a="http://schemas.openxmlformats.org/drawingml/2006/main" noGrp="1"/>
-          </p:cNvSpPr>
-          <p:nvPr/>
-        </p:nvSpPr>
-        <p:spPr>
-          <a:xfrm xmlns:a="http://schemas.openxmlformats.org/drawingml/2006/main">
-            <a:off x="609600" y="3371850"/>
-            <a:ext cx="10858500" cy="14288"/>
-          </a:xfrm>
-          <a:prstGeom xmlns:a="http://schemas.openxmlformats.org/drawingml/2006/main" prst="rect">
-            <a:avLst/>
-          </a:prstGeom>
-          <a:solidFill xmlns:a="http://schemas.openxmlformats.org/drawingml/2006/main">
-            <a:srgbClr val="CDD5DB"/>
-          </a:solidFill>
-          <a:ln xmlns:a="http://schemas.openxmlformats.org/drawingml/2006/main" w="0">
-            <a:noFill/>
-          </a:ln>
-        </p:spPr>
-      </p:sp>
-      <p:sp>
-        <p:nvSpPr>
-          <p:cNvPr id="12" name="content-117">
-            <a:extLst xmlns:a="http://schemas.openxmlformats.org/drawingml/2006/main">
-              <a:ext uri="{FF2B5EF4-FFF2-40B4-BE49-F238E27FC236}">
-                <a16:creationId xmlns:a16="http://schemas.microsoft.com/office/drawing/2014/main" id="{2B66CF9E-0309-4D14-988D-C6619E1D260C}"/>
-              </a:ext>
-            </a:extLst>
-          </p:cNvPr>
-          <p:cNvSpPr>
-            <a:spLocks xmlns:a="http://schemas.openxmlformats.org/drawingml/2006/main" noGrp="1"/>
-          </p:cNvSpPr>
-          <p:nvPr/>
-        </p:nvSpPr>
-        <p:spPr>
-          <a:xfrm xmlns:a="http://schemas.openxmlformats.org/drawingml/2006/main">
-            <a:off x="609600" y="3638550"/>
-            <a:ext cx="2333625" cy="609600"/>
+              <a:t>修订一句并接上本人记录 ID、上游判断和未决项。</a:t>
+            </a:r>
+          </a:p>
+        </p:txBody>
+      </p:sp>
+      <p:sp>
+        <p:nvSpPr>
+          <p:cNvPr id="5" name="judgment-source">
+            <a:extLst xmlns:a="http://schemas.openxmlformats.org/drawingml/2006/main">
+              <a:ext uri="{FF2B5EF4-FFF2-40B4-BE49-F238E27FC236}">
+                <a16:creationId xmlns:a16="http://schemas.microsoft.com/office/drawing/2014/main" id="{CCE7BB96-60CD-4991-AE20-3B03A3F62A53}"/>
+              </a:ext>
+            </a:extLst>
+          </p:cNvPr>
+          <p:cNvSpPr>
+            <a:spLocks xmlns:a="http://schemas.openxmlformats.org/drawingml/2006/main" noGrp="1"/>
+          </p:cNvSpPr>
+          <p:nvPr/>
+        </p:nvSpPr>
+        <p:spPr>
+          <a:xfrm xmlns:a="http://schemas.openxmlformats.org/drawingml/2006/main">
+            <a:off x="666750" y="6276975"/>
+            <a:ext cx="10572750" cy="209550"/>
           </a:xfrm>
           <a:prstGeom xmlns:a="http://schemas.openxmlformats.org/drawingml/2006/main" prst="rect">
             <a:avLst/>
@@ -11269,54 +9795,61 @@
         </p:spPr>
         <p:txBody>
           <a:bodyPr xmlns:a="http://schemas.openxmlformats.org/drawingml/2006/main" lIns="0" tIns="0" rIns="0" bIns="0" anchor="t"/>
-          <a:lstStyle xmlns:a="http://schemas.openxmlformats.org/drawingml/2006/main"/>
+          <a:lstStyle xmlns:a="http://schemas.openxmlformats.org/drawingml/2006/main">
+            <a:defPPr algn="l">
+              <a:defRPr sz="1100" b="0">
+                <a:solidFill>
+                  <a:srgbClr val="667684"/>
+                </a:solidFill>
+                <a:latin typeface="微软雅黑"/>
+                <a:ea typeface="微软雅黑"/>
+                <a:cs typeface="微软雅黑"/>
+              </a:defRPr>
+            </a:defPPr>
+          </a:lstStyle>
           <a:p xmlns:a="http://schemas.openxmlformats.org/drawingml/2006/main">
             <a:pPr algn="l">
-              <a:lnSpc>
-                <a:spcPct val="118000"/>
-              </a:lnSpc>
-              <a:buNone/>
-              <a:defRPr sz="2400" b="1">
-                <a:solidFill>
-                  <a:srgbClr val="1F4D78"/>
-                </a:solidFill>
-                <a:latin typeface="微软雅黑"/>
-                <a:ea typeface="微软雅黑"/>
-                <a:cs typeface="微软雅黑"/>
-              </a:defRPr>
-            </a:pPr>
-            <a:r>
-              <a:rPr sz="2400" b="1">
-                <a:solidFill>
-                  <a:srgbClr val="1F4D78"/>
+              <a:defRPr sz="1100" b="0">
+                <a:solidFill>
+                  <a:srgbClr val="667684"/>
+                </a:solidFill>
+                <a:latin typeface="微软雅黑"/>
+                <a:ea typeface="微软雅黑"/>
+                <a:cs typeface="微软雅黑"/>
+              </a:defRPr>
+            </a:pPr>
+            <a:r>
+              <a:rPr sz="1100" b="0">
+                <a:solidFill>
+                  <a:srgbClr val="667684"/>
                 </a:solidFill>
                 <a:latin typeface="微软雅黑"/>
                 <a:ea typeface="微软雅黑"/>
                 <a:cs typeface="微软雅黑"/>
               </a:rPr>
-              <a:t>反例</a:t>
-            </a:r>
-          </a:p>
-        </p:txBody>
-      </p:sp>
-      <p:sp>
-        <p:nvSpPr>
-          <p:cNvPr id="13" name="content-118">
-            <a:extLst xmlns:a="http://schemas.openxmlformats.org/drawingml/2006/main">
-              <a:ext uri="{FF2B5EF4-FFF2-40B4-BE49-F238E27FC236}">
-                <a16:creationId xmlns:a16="http://schemas.microsoft.com/office/drawing/2014/main" id="{2C0575B6-D0B7-4989-8ED4-A51D64730B15}"/>
-              </a:ext>
-            </a:extLst>
-          </p:cNvPr>
-          <p:cNvSpPr>
-            <a:spLocks xmlns:a="http://schemas.openxmlformats.org/drawingml/2006/main" noGrp="1"/>
-          </p:cNvSpPr>
-          <p:nvPr/>
-        </p:nvSpPr>
-        <p:spPr>
-          <a:xfrm xmlns:a="http://schemas.openxmlformats.org/drawingml/2006/main">
-            <a:off x="3181350" y="3638550"/>
-            <a:ext cx="8286750" cy="666750"/>
+              <a:t>来源：本课判断任务与讲义；构造材料及真实来源按材料包标识</a:t>
+            </a:r>
+          </a:p>
+        </p:txBody>
+      </p:sp>
+      <p:sp>
+        <p:nvSpPr>
+          <p:cNvPr id="6" name="judgment-page">
+            <a:extLst xmlns:a="http://schemas.openxmlformats.org/drawingml/2006/main">
+              <a:ext uri="{FF2B5EF4-FFF2-40B4-BE49-F238E27FC236}">
+                <a16:creationId xmlns:a16="http://schemas.microsoft.com/office/drawing/2014/main" id="{6809A5A6-8AC4-4E0F-8E67-6E6C7D7E7AB4}"/>
+              </a:ext>
+            </a:extLst>
+          </p:cNvPr>
+          <p:cNvSpPr>
+            <a:spLocks xmlns:a="http://schemas.openxmlformats.org/drawingml/2006/main" noGrp="1"/>
+          </p:cNvSpPr>
+          <p:nvPr/>
+        </p:nvSpPr>
+        <p:spPr>
+          <a:xfrm xmlns:a="http://schemas.openxmlformats.org/drawingml/2006/main">
+            <a:off x="11715750" y="6562725"/>
+            <a:ext cx="238125" cy="171450"/>
           </a:xfrm>
           <a:prstGeom xmlns:a="http://schemas.openxmlformats.org/drawingml/2006/main" prst="rect">
             <a:avLst/>
@@ -11328,213 +9861,42 @@
         </p:spPr>
         <p:txBody>
           <a:bodyPr xmlns:a="http://schemas.openxmlformats.org/drawingml/2006/main" lIns="0" tIns="0" rIns="0" bIns="0" anchor="t"/>
-          <a:lstStyle xmlns:a="http://schemas.openxmlformats.org/drawingml/2006/main"/>
+          <a:lstStyle xmlns:a="http://schemas.openxmlformats.org/drawingml/2006/main">
+            <a:defPPr algn="l">
+              <a:defRPr sz="900" b="0">
+                <a:solidFill>
+                  <a:srgbClr val="A5A5A5"/>
+                </a:solidFill>
+                <a:latin typeface="微软雅黑"/>
+                <a:ea typeface="微软雅黑"/>
+                <a:cs typeface="微软雅黑"/>
+              </a:defRPr>
+            </a:defPPr>
+          </a:lstStyle>
           <a:p xmlns:a="http://schemas.openxmlformats.org/drawingml/2006/main">
             <a:pPr algn="l">
-              <a:lnSpc>
-                <a:spcPct val="118000"/>
-              </a:lnSpc>
-              <a:buNone/>
-              <a:defRPr sz="2300" b="0">
-                <a:solidFill>
-                  <a:srgbClr val="27333D"/>
-                </a:solidFill>
-                <a:latin typeface="微软雅黑"/>
-                <a:ea typeface="微软雅黑"/>
-                <a:cs typeface="微软雅黑"/>
-              </a:defRPr>
-            </a:pPr>
-            <a:r>
-              <a:rPr sz="2300" b="0">
-                <a:solidFill>
-                  <a:srgbClr val="27333D"/>
+              <a:defRPr sz="900" b="0">
+                <a:solidFill>
+                  <a:srgbClr val="A5A5A5"/>
+                </a:solidFill>
+                <a:latin typeface="微软雅黑"/>
+                <a:ea typeface="微软雅黑"/>
+                <a:cs typeface="微软雅黑"/>
+              </a:defRPr>
+            </a:pPr>
+            <a:r>
+              <a:rPr sz="900" b="0">
+                <a:solidFill>
+                  <a:srgbClr val="A5A5A5"/>
                 </a:solidFill>
                 <a:latin typeface="微软雅黑"/>
                 <a:ea typeface="微软雅黑"/>
                 <a:cs typeface="微软雅黑"/>
               </a:rPr>
-              <a:t>T03。</a:t>
-            </a:r>
-          </a:p>
-        </p:txBody>
-      </p:sp>
-      <p:sp>
-        <p:nvSpPr>
-          <p:cNvPr id="14" name="rule-119">
-            <a:extLst xmlns:a="http://schemas.openxmlformats.org/drawingml/2006/main">
-              <a:ext uri="{FF2B5EF4-FFF2-40B4-BE49-F238E27FC236}">
-                <a16:creationId xmlns:a16="http://schemas.microsoft.com/office/drawing/2014/main" id="{9B27C02A-C731-4494-A351-CC2C8F01E8B2}"/>
-              </a:ext>
-            </a:extLst>
-          </p:cNvPr>
-          <p:cNvSpPr>
-            <a:spLocks xmlns:a="http://schemas.openxmlformats.org/drawingml/2006/main" noGrp="1"/>
-          </p:cNvSpPr>
-          <p:nvPr/>
-        </p:nvSpPr>
-        <p:spPr>
-          <a:xfrm xmlns:a="http://schemas.openxmlformats.org/drawingml/2006/main">
-            <a:off x="609600" y="4400550"/>
-            <a:ext cx="10858500" cy="14288"/>
-          </a:xfrm>
-          <a:prstGeom xmlns:a="http://schemas.openxmlformats.org/drawingml/2006/main" prst="rect">
-            <a:avLst/>
-          </a:prstGeom>
-          <a:solidFill xmlns:a="http://schemas.openxmlformats.org/drawingml/2006/main">
-            <a:srgbClr val="CDD5DB"/>
-          </a:solidFill>
-          <a:ln xmlns:a="http://schemas.openxmlformats.org/drawingml/2006/main" w="0">
-            <a:noFill/>
-          </a:ln>
-        </p:spPr>
-      </p:sp>
-      <p:sp>
-        <p:nvSpPr>
-          <p:cNvPr id="15" name="content-120">
-            <a:extLst xmlns:a="http://schemas.openxmlformats.org/drawingml/2006/main">
-              <a:ext uri="{FF2B5EF4-FFF2-40B4-BE49-F238E27FC236}">
-                <a16:creationId xmlns:a16="http://schemas.microsoft.com/office/drawing/2014/main" id="{58D36E32-030A-4CA9-A641-7270B57B5109}"/>
-              </a:ext>
-            </a:extLst>
-          </p:cNvPr>
-          <p:cNvSpPr>
-            <a:spLocks xmlns:a="http://schemas.openxmlformats.org/drawingml/2006/main" noGrp="1"/>
-          </p:cNvSpPr>
-          <p:nvPr/>
-        </p:nvSpPr>
-        <p:spPr>
-          <a:xfrm xmlns:a="http://schemas.openxmlformats.org/drawingml/2006/main">
-            <a:off x="609600" y="4667250"/>
-            <a:ext cx="2333625" cy="609600"/>
-          </a:xfrm>
-          <a:prstGeom xmlns:a="http://schemas.openxmlformats.org/drawingml/2006/main" prst="rect">
-            <a:avLst/>
-          </a:prstGeom>
-          <a:noFill xmlns:a="http://schemas.openxmlformats.org/drawingml/2006/main"/>
-          <a:ln xmlns:a="http://schemas.openxmlformats.org/drawingml/2006/main" w="0">
-            <a:noFill/>
-          </a:ln>
-        </p:spPr>
-        <p:txBody>
-          <a:bodyPr xmlns:a="http://schemas.openxmlformats.org/drawingml/2006/main" lIns="0" tIns="0" rIns="0" bIns="0" anchor="t"/>
-          <a:lstStyle xmlns:a="http://schemas.openxmlformats.org/drawingml/2006/main"/>
-          <a:p xmlns:a="http://schemas.openxmlformats.org/drawingml/2006/main">
-            <a:pPr algn="l">
-              <a:lnSpc>
-                <a:spcPct val="118000"/>
-              </a:lnSpc>
-              <a:buNone/>
-              <a:defRPr sz="2400" b="1">
-                <a:solidFill>
-                  <a:srgbClr val="1F4D78"/>
-                </a:solidFill>
-                <a:latin typeface="微软雅黑"/>
-                <a:ea typeface="微软雅黑"/>
-                <a:cs typeface="微软雅黑"/>
-              </a:defRPr>
-            </a:pPr>
-            <a:r>
-              <a:rPr sz="2400" b="1">
-                <a:solidFill>
-                  <a:srgbClr val="1F4D78"/>
-                </a:solidFill>
-                <a:latin typeface="微软雅黑"/>
-                <a:ea typeface="微软雅黑"/>
-                <a:cs typeface="微软雅黑"/>
-              </a:rPr>
-              <a:t>未决</a:t>
-            </a:r>
-          </a:p>
-        </p:txBody>
-      </p:sp>
-      <p:sp>
-        <p:nvSpPr>
-          <p:cNvPr id="16" name="content-121">
-            <a:extLst xmlns:a="http://schemas.openxmlformats.org/drawingml/2006/main">
-              <a:ext uri="{FF2B5EF4-FFF2-40B4-BE49-F238E27FC236}">
-                <a16:creationId xmlns:a16="http://schemas.microsoft.com/office/drawing/2014/main" id="{BE9383E8-404A-4578-A2D7-393E935A2D14}"/>
-              </a:ext>
-            </a:extLst>
-          </p:cNvPr>
-          <p:cNvSpPr>
-            <a:spLocks xmlns:a="http://schemas.openxmlformats.org/drawingml/2006/main" noGrp="1"/>
-          </p:cNvSpPr>
-          <p:nvPr/>
-        </p:nvSpPr>
-        <p:spPr>
-          <a:xfrm xmlns:a="http://schemas.openxmlformats.org/drawingml/2006/main">
-            <a:off x="3181350" y="4667250"/>
-            <a:ext cx="8286750" cy="666750"/>
-          </a:xfrm>
-          <a:prstGeom xmlns:a="http://schemas.openxmlformats.org/drawingml/2006/main" prst="rect">
-            <a:avLst/>
-          </a:prstGeom>
-          <a:noFill xmlns:a="http://schemas.openxmlformats.org/drawingml/2006/main"/>
-          <a:ln xmlns:a="http://schemas.openxmlformats.org/drawingml/2006/main" w="0">
-            <a:noFill/>
-          </a:ln>
-        </p:spPr>
-        <p:txBody>
-          <a:bodyPr xmlns:a="http://schemas.openxmlformats.org/drawingml/2006/main" lIns="0" tIns="0" rIns="0" bIns="0" anchor="t"/>
-          <a:lstStyle xmlns:a="http://schemas.openxmlformats.org/drawingml/2006/main"/>
-          <a:p xmlns:a="http://schemas.openxmlformats.org/drawingml/2006/main">
-            <a:pPr algn="l">
-              <a:lnSpc>
-                <a:spcPct val="118000"/>
-              </a:lnSpc>
-              <a:buNone/>
-              <a:defRPr sz="2300" b="0">
-                <a:solidFill>
-                  <a:srgbClr val="27333D"/>
-                </a:solidFill>
-                <a:latin typeface="微软雅黑"/>
-                <a:ea typeface="微软雅黑"/>
-                <a:cs typeface="微软雅黑"/>
-              </a:defRPr>
-            </a:pPr>
-            <a:r>
-              <a:rPr sz="2300" b="0">
-                <a:solidFill>
-                  <a:srgbClr val="27333D"/>
-                </a:solidFill>
-                <a:latin typeface="微软雅黑"/>
-                <a:ea typeface="微软雅黑"/>
-                <a:cs typeface="微软雅黑"/>
-              </a:rPr>
-              <a:t>H1/A2、其他质量与外推范围。</a:t>
-            </a:r>
-          </a:p>
-        </p:txBody>
-      </p:sp>
-      <p:sp>
-        <p:nvSpPr>
-          <p:cNvPr id="17" name="rule-122">
-            <a:extLst xmlns:a="http://schemas.openxmlformats.org/drawingml/2006/main">
-              <a:ext uri="{FF2B5EF4-FFF2-40B4-BE49-F238E27FC236}">
-                <a16:creationId xmlns:a16="http://schemas.microsoft.com/office/drawing/2014/main" id="{5A33F10C-7C39-4A1E-A6DF-94CEC7DFB034}"/>
-              </a:ext>
-            </a:extLst>
-          </p:cNvPr>
-          <p:cNvSpPr>
-            <a:spLocks xmlns:a="http://schemas.openxmlformats.org/drawingml/2006/main" noGrp="1"/>
-          </p:cNvSpPr>
-          <p:nvPr/>
-        </p:nvSpPr>
-        <p:spPr>
-          <a:xfrm xmlns:a="http://schemas.openxmlformats.org/drawingml/2006/main">
-            <a:off x="609600" y="5429250"/>
-            <a:ext cx="10858500" cy="14288"/>
-          </a:xfrm>
-          <a:prstGeom xmlns:a="http://schemas.openxmlformats.org/drawingml/2006/main" prst="rect">
-            <a:avLst/>
-          </a:prstGeom>
-          <a:solidFill xmlns:a="http://schemas.openxmlformats.org/drawingml/2006/main">
-            <a:srgbClr val="CDD5DB"/>
-          </a:solidFill>
-          <a:ln xmlns:a="http://schemas.openxmlformats.org/drawingml/2006/main" w="0">
-            <a:noFill/>
-          </a:ln>
-        </p:spPr>
+              <a:t>3</a:t>
+            </a:r>
+          </a:p>
+        </p:txBody>
       </p:sp>
     </p:spTree>
     <p:extLst>
@@ -13463,97 +11825,22 @@
       </p:grpSpPr>
       <p:sp>
         <p:nvSpPr>
-          <p:cNvPr id="4" name="Text Placeholder 3">
-            <a:extLst xmlns:a="http://schemas.openxmlformats.org/drawingml/2006/main">
-              <a:ext uri="{FF2B5EF4-FFF2-40B4-BE49-F238E27FC236}">
-                <a16:creationId xmlns:a16="http://schemas.microsoft.com/office/drawing/2014/main" id="{4D941B40-7A0A-534E-3563-CA11753C8E3F}"/>
-              </a:ext>
-            </a:extLst>
-          </p:cNvPr>
-          <p:cNvSpPr>
-            <a:spLocks xmlns:a="http://schemas.openxmlformats.org/drawingml/2006/main" noGrp="1"/>
-          </p:cNvSpPr>
-          <p:nvPr>
-            <p:ph type="body" idx="14"/>
-          </p:nvPr>
-        </p:nvSpPr>
-        <p:spPr>
-          <a:xfrm xmlns:a="http://schemas.openxmlformats.org/drawingml/2006/main">
-            <a:off x="1028700" y="57150"/>
-            <a:ext cx="10668000" cy="571500"/>
-          </a:xfrm>
-        </p:spPr>
-        <p:txBody>
-          <a:bodyPr xmlns:a="http://schemas.openxmlformats.org/drawingml/2006/main" lIns="0" tIns="0" rIns="0" bIns="0" anchor="ctr"/>
-          <a:lstStyle xmlns:a="http://schemas.openxmlformats.org/drawingml/2006/main"/>
-          <a:p xmlns:a="http://schemas.openxmlformats.org/drawingml/2006/main">
-            <a:pPr algn="l">
-              <a:lnSpc>
-                <a:spcPct val="118000"/>
-              </a:lnSpc>
-              <a:buNone/>
-            </a:pPr>
-            <a:r>
-              <a:rPr sz="3000" b="1">
-                <a:solidFill>
-                  <a:srgbClr val="FFFFFF"/>
-                </a:solidFill>
-                <a:latin typeface="微软雅黑"/>
-                <a:ea typeface="微软雅黑"/>
-                <a:cs typeface="微软雅黑"/>
-              </a:rPr>
-              <a:t>四句话写出可追溯论证</a:t>
-            </a:r>
-            <a:endParaRPr/>
-          </a:p>
-        </p:txBody>
-      </p:sp>
-      <p:sp>
-        <p:nvSpPr>
-          <p:cNvPr id="5" name="Slide Number Placeholder 4">
-            <a:extLst xmlns:a="http://schemas.openxmlformats.org/drawingml/2006/main">
-              <a:ext uri="{FF2B5EF4-FFF2-40B4-BE49-F238E27FC236}">
-                <a16:creationId xmlns:a16="http://schemas.microsoft.com/office/drawing/2014/main" id="{EBA5909F-738E-F60C-BE8C-B3F1D94548E5}"/>
-              </a:ext>
-            </a:extLst>
-          </p:cNvPr>
-          <p:cNvSpPr>
-            <a:spLocks xmlns:a="http://schemas.openxmlformats.org/drawingml/2006/main" noGrp="1"/>
-          </p:cNvSpPr>
-          <p:nvPr>
-            <p:ph type="sldNum" idx="10"/>
-          </p:nvPr>
-        </p:nvSpPr>
-        <p:spPr/>
-        <p:txBody>
-          <a:bodyPr xmlns:a="http://schemas.openxmlformats.org/drawingml/2006/main"/>
-          <a:lstStyle xmlns:a="http://schemas.openxmlformats.org/drawingml/2006/main"/>
-          <a:p xmlns:a="http://schemas.openxmlformats.org/drawingml/2006/main">
-            <a:fld id="{BA58DA2A-B818-18A9-29C1-B697728D5BCE}" type="slidenum">
-              <a:t>8</a:t>
-            </a:fld>
-            <a:endParaRPr/>
-          </a:p>
-        </p:txBody>
-      </p:sp>
-      <p:sp>
-        <p:nvSpPr>
-          <p:cNvPr id="6" name="content-149">
-            <a:extLst xmlns:a="http://schemas.openxmlformats.org/drawingml/2006/main">
-              <a:ext uri="{FF2B5EF4-FFF2-40B4-BE49-F238E27FC236}">
-                <a16:creationId xmlns:a16="http://schemas.microsoft.com/office/drawing/2014/main" id="{98B3514B-67E4-43DF-8D6A-C308671F0F08}"/>
-              </a:ext>
-            </a:extLst>
-          </p:cNvPr>
-          <p:cNvSpPr>
-            <a:spLocks xmlns:a="http://schemas.openxmlformats.org/drawingml/2006/main" noGrp="1"/>
-          </p:cNvSpPr>
-          <p:nvPr/>
-        </p:nvSpPr>
-        <p:spPr>
-          <a:xfrm xmlns:a="http://schemas.openxmlformats.org/drawingml/2006/main">
-            <a:off x="609600" y="1581150"/>
-            <a:ext cx="2333625" cy="609600"/>
+          <p:cNvPr id="7" name="judgment-title">
+            <a:extLst xmlns:a="http://schemas.openxmlformats.org/drawingml/2006/main">
+              <a:ext uri="{FF2B5EF4-FFF2-40B4-BE49-F238E27FC236}">
+                <a16:creationId xmlns:a16="http://schemas.microsoft.com/office/drawing/2014/main" id="{688B4D01-2A96-4ADE-96AD-EBDC009C76B5}"/>
+              </a:ext>
+            </a:extLst>
+          </p:cNvPr>
+          <p:cNvSpPr>
+            <a:spLocks xmlns:a="http://schemas.openxmlformats.org/drawingml/2006/main" noGrp="1"/>
+          </p:cNvSpPr>
+          <p:nvPr/>
+        </p:nvSpPr>
+        <p:spPr>
+          <a:xfrm xmlns:a="http://schemas.openxmlformats.org/drawingml/2006/main">
+            <a:off x="1028700" y="76200"/>
+            <a:ext cx="10687050" cy="514350"/>
           </a:xfrm>
           <a:prstGeom xmlns:a="http://schemas.openxmlformats.org/drawingml/2006/main" prst="rect">
             <a:avLst/>
@@ -13565,54 +11852,61 @@
         </p:spPr>
         <p:txBody>
           <a:bodyPr xmlns:a="http://schemas.openxmlformats.org/drawingml/2006/main" lIns="0" tIns="0" rIns="0" bIns="0" anchor="t"/>
-          <a:lstStyle xmlns:a="http://schemas.openxmlformats.org/drawingml/2006/main"/>
+          <a:lstStyle xmlns:a="http://schemas.openxmlformats.org/drawingml/2006/main">
+            <a:defPPr algn="l">
+              <a:defRPr sz="3000" b="1">
+                <a:solidFill>
+                  <a:srgbClr val="FFFFFF"/>
+                </a:solidFill>
+                <a:latin typeface="微软雅黑"/>
+                <a:ea typeface="微软雅黑"/>
+                <a:cs typeface="微软雅黑"/>
+              </a:defRPr>
+            </a:defPPr>
+          </a:lstStyle>
           <a:p xmlns:a="http://schemas.openxmlformats.org/drawingml/2006/main">
             <a:pPr algn="l">
-              <a:lnSpc>
-                <a:spcPct val="118000"/>
-              </a:lnSpc>
-              <a:buNone/>
-              <a:defRPr sz="2400" b="1">
-                <a:solidFill>
-                  <a:srgbClr val="1F4D78"/>
-                </a:solidFill>
-                <a:latin typeface="微软雅黑"/>
-                <a:ea typeface="微软雅黑"/>
-                <a:cs typeface="微软雅黑"/>
-              </a:defRPr>
-            </a:pPr>
-            <a:r>
-              <a:rPr sz="2400" b="1">
-                <a:solidFill>
-                  <a:srgbClr val="1F4D78"/>
+              <a:defRPr sz="3000" b="1">
+                <a:solidFill>
+                  <a:srgbClr val="FFFFFF"/>
+                </a:solidFill>
+                <a:latin typeface="微软雅黑"/>
+                <a:ea typeface="微软雅黑"/>
+                <a:cs typeface="微软雅黑"/>
+              </a:defRPr>
+            </a:pPr>
+            <a:r>
+              <a:rPr sz="3000" b="1">
+                <a:solidFill>
+                  <a:srgbClr val="FFFFFF"/>
                 </a:solidFill>
                 <a:latin typeface="微软雅黑"/>
                 <a:ea typeface="微软雅黑"/>
                 <a:cs typeface="微软雅黑"/>
               </a:rPr>
-              <a:t>主张</a:t>
-            </a:r>
-          </a:p>
-        </p:txBody>
-      </p:sp>
-      <p:sp>
-        <p:nvSpPr>
-          <p:cNvPr id="7" name="content-150">
-            <a:extLst xmlns:a="http://schemas.openxmlformats.org/drawingml/2006/main">
-              <a:ext uri="{FF2B5EF4-FFF2-40B4-BE49-F238E27FC236}">
-                <a16:creationId xmlns:a16="http://schemas.microsoft.com/office/drawing/2014/main" id="{C3E0A192-B3AF-4A67-AEB7-DFC509EFF627}"/>
-              </a:ext>
-            </a:extLst>
-          </p:cNvPr>
-          <p:cNvSpPr>
-            <a:spLocks xmlns:a="http://schemas.openxmlformats.org/drawingml/2006/main" noGrp="1"/>
-          </p:cNvSpPr>
-          <p:nvPr/>
-        </p:nvSpPr>
-        <p:spPr>
-          <a:xfrm xmlns:a="http://schemas.openxmlformats.org/drawingml/2006/main">
-            <a:off x="3181350" y="1581150"/>
-            <a:ext cx="8286750" cy="666750"/>
+              <a:t>本人项目：决定、核验与回写</a:t>
+            </a:r>
+          </a:p>
+        </p:txBody>
+      </p:sp>
+      <p:sp>
+        <p:nvSpPr>
+          <p:cNvPr id="2" name="judgment-body-0">
+            <a:extLst xmlns:a="http://schemas.openxmlformats.org/drawingml/2006/main">
+              <a:ext uri="{FF2B5EF4-FFF2-40B4-BE49-F238E27FC236}">
+                <a16:creationId xmlns:a16="http://schemas.microsoft.com/office/drawing/2014/main" id="{1BA45594-C309-4D05-85B6-64B945620A35}"/>
+              </a:ext>
+            </a:extLst>
+          </p:cNvPr>
+          <p:cNvSpPr>
+            <a:spLocks xmlns:a="http://schemas.openxmlformats.org/drawingml/2006/main" noGrp="1"/>
+          </p:cNvSpPr>
+          <p:nvPr/>
+        </p:nvSpPr>
+        <p:spPr>
+          <a:xfrm xmlns:a="http://schemas.openxmlformats.org/drawingml/2006/main">
+            <a:off x="666750" y="1066800"/>
+            <a:ext cx="10858500" cy="1476375"/>
           </a:xfrm>
           <a:prstGeom xmlns:a="http://schemas.openxmlformats.org/drawingml/2006/main" prst="rect">
             <a:avLst/>
@@ -13624,84 +11918,61 @@
         </p:spPr>
         <p:txBody>
           <a:bodyPr xmlns:a="http://schemas.openxmlformats.org/drawingml/2006/main" lIns="0" tIns="0" rIns="0" bIns="0" anchor="t"/>
-          <a:lstStyle xmlns:a="http://schemas.openxmlformats.org/drawingml/2006/main"/>
+          <a:lstStyle xmlns:a="http://schemas.openxmlformats.org/drawingml/2006/main">
+            <a:defPPr algn="l">
+              <a:defRPr sz="2400" b="0">
+                <a:solidFill>
+                  <a:srgbClr val="263746"/>
+                </a:solidFill>
+                <a:latin typeface="微软雅黑"/>
+                <a:ea typeface="微软雅黑"/>
+                <a:cs typeface="微软雅黑"/>
+              </a:defRPr>
+            </a:defPPr>
+          </a:lstStyle>
           <a:p xmlns:a="http://schemas.openxmlformats.org/drawingml/2006/main">
             <a:pPr algn="l">
-              <a:lnSpc>
-                <a:spcPct val="118000"/>
-              </a:lnSpc>
-              <a:buNone/>
-              <a:defRPr sz="2300" b="0">
-                <a:solidFill>
-                  <a:srgbClr val="27333D"/>
-                </a:solidFill>
-                <a:latin typeface="微软雅黑"/>
-                <a:ea typeface="微软雅黑"/>
-                <a:cs typeface="微软雅黑"/>
-              </a:defRPr>
-            </a:pPr>
-            <a:r>
-              <a:rPr sz="2300" b="0">
-                <a:solidFill>
-                  <a:srgbClr val="27333D"/>
+              <a:defRPr sz="2400" b="0">
+                <a:solidFill>
+                  <a:srgbClr val="263746"/>
+                </a:solidFill>
+                <a:latin typeface="微软雅黑"/>
+                <a:ea typeface="微软雅黑"/>
+                <a:cs typeface="微软雅黑"/>
+              </a:defRPr>
+            </a:pPr>
+            <a:r>
+              <a:rPr sz="2400" b="0">
+                <a:solidFill>
+                  <a:srgbClr val="263746"/>
                 </a:solidFill>
                 <a:latin typeface="微软雅黑"/>
                 <a:ea typeface="微软雅黑"/>
                 <a:cs typeface="微软雅黑"/>
               </a:rPr>
-              <a:t>本构造小包中，阅读卡的总遗漏率较低。</a:t>
-            </a:r>
-          </a:p>
-        </p:txBody>
-      </p:sp>
-      <p:sp>
-        <p:nvSpPr>
-          <p:cNvPr id="8" name="rule-151">
-            <a:extLst xmlns:a="http://schemas.openxmlformats.org/drawingml/2006/main">
-              <a:ext uri="{FF2B5EF4-FFF2-40B4-BE49-F238E27FC236}">
-                <a16:creationId xmlns:a16="http://schemas.microsoft.com/office/drawing/2014/main" id="{39918E0F-85E7-4FAB-96BF-B412BA92820B}"/>
-              </a:ext>
-            </a:extLst>
-          </p:cNvPr>
-          <p:cNvSpPr>
-            <a:spLocks xmlns:a="http://schemas.openxmlformats.org/drawingml/2006/main" noGrp="1"/>
-          </p:cNvSpPr>
-          <p:nvPr/>
-        </p:nvSpPr>
-        <p:spPr>
-          <a:xfrm xmlns:a="http://schemas.openxmlformats.org/drawingml/2006/main">
-            <a:off x="609600" y="2343150"/>
-            <a:ext cx="10858500" cy="14288"/>
-          </a:xfrm>
-          <a:prstGeom xmlns:a="http://schemas.openxmlformats.org/drawingml/2006/main" prst="rect">
-            <a:avLst/>
-          </a:prstGeom>
-          <a:solidFill xmlns:a="http://schemas.openxmlformats.org/drawingml/2006/main">
-            <a:srgbClr val="CDD5DB"/>
-          </a:solidFill>
-          <a:ln xmlns:a="http://schemas.openxmlformats.org/drawingml/2006/main" w="0">
-            <a:noFill/>
-          </a:ln>
-        </p:spPr>
-      </p:sp>
-      <p:sp>
-        <p:nvSpPr>
-          <p:cNvPr id="9" name="content-152">
-            <a:extLst xmlns:a="http://schemas.openxmlformats.org/drawingml/2006/main">
-              <a:ext uri="{FF2B5EF4-FFF2-40B4-BE49-F238E27FC236}">
-                <a16:creationId xmlns:a16="http://schemas.microsoft.com/office/drawing/2014/main" id="{AD27B227-D18C-43F0-B4BE-FE17F8AD3079}"/>
-              </a:ext>
-            </a:extLst>
-          </p:cNvPr>
-          <p:cNvSpPr>
-            <a:spLocks xmlns:a="http://schemas.openxmlformats.org/drawingml/2006/main" noGrp="1"/>
-          </p:cNvSpPr>
-          <p:nvPr/>
-        </p:nvSpPr>
-        <p:spPr>
-          <a:xfrm xmlns:a="http://schemas.openxmlformats.org/drawingml/2006/main">
-            <a:off x="609600" y="2609850"/>
-            <a:ext cx="2333625" cy="609600"/>
+              <a:t>用本人真实比较写一个论证段，附一条结论追踪和实际 AI 披露；把已积累的问题、方法、评价、局限直接组织成短报告初稿。</a:t>
+            </a:r>
+          </a:p>
+        </p:txBody>
+      </p:sp>
+      <p:sp>
+        <p:nvSpPr>
+          <p:cNvPr id="3" name="judgment-body-1">
+            <a:extLst xmlns:a="http://schemas.openxmlformats.org/drawingml/2006/main">
+              <a:ext uri="{FF2B5EF4-FFF2-40B4-BE49-F238E27FC236}">
+                <a16:creationId xmlns:a16="http://schemas.microsoft.com/office/drawing/2014/main" id="{B3921167-96A6-45FF-BF9D-EE28364CAF5D}"/>
+              </a:ext>
+            </a:extLst>
+          </p:cNvPr>
+          <p:cNvSpPr>
+            <a:spLocks xmlns:a="http://schemas.openxmlformats.org/drawingml/2006/main" noGrp="1"/>
+          </p:cNvSpPr>
+          <p:nvPr/>
+        </p:nvSpPr>
+        <p:spPr>
+          <a:xfrm xmlns:a="http://schemas.openxmlformats.org/drawingml/2006/main">
+            <a:off x="666750" y="2724150"/>
+            <a:ext cx="10858500" cy="1524000"/>
           </a:xfrm>
           <a:prstGeom xmlns:a="http://schemas.openxmlformats.org/drawingml/2006/main" prst="rect">
             <a:avLst/>
@@ -13713,54 +11984,61 @@
         </p:spPr>
         <p:txBody>
           <a:bodyPr xmlns:a="http://schemas.openxmlformats.org/drawingml/2006/main" lIns="0" tIns="0" rIns="0" bIns="0" anchor="t"/>
-          <a:lstStyle xmlns:a="http://schemas.openxmlformats.org/drawingml/2006/main"/>
+          <a:lstStyle xmlns:a="http://schemas.openxmlformats.org/drawingml/2006/main">
+            <a:defPPr algn="l">
+              <a:defRPr sz="2400" b="0">
+                <a:solidFill>
+                  <a:srgbClr val="263746"/>
+                </a:solidFill>
+                <a:latin typeface="微软雅黑"/>
+                <a:ea typeface="微软雅黑"/>
+                <a:cs typeface="微软雅黑"/>
+              </a:defRPr>
+            </a:defPPr>
+          </a:lstStyle>
           <a:p xmlns:a="http://schemas.openxmlformats.org/drawingml/2006/main">
             <a:pPr algn="l">
-              <a:lnSpc>
-                <a:spcPct val="118000"/>
-              </a:lnSpc>
-              <a:buNone/>
-              <a:defRPr sz="2400" b="1">
-                <a:solidFill>
-                  <a:srgbClr val="1F4D78"/>
-                </a:solidFill>
-                <a:latin typeface="微软雅黑"/>
-                <a:ea typeface="微软雅黑"/>
-                <a:cs typeface="微软雅黑"/>
-              </a:defRPr>
-            </a:pPr>
-            <a:r>
-              <a:rPr sz="2400" b="1">
-                <a:solidFill>
-                  <a:srgbClr val="1F4D78"/>
+              <a:defRPr sz="2400" b="0">
+                <a:solidFill>
+                  <a:srgbClr val="263746"/>
+                </a:solidFill>
+                <a:latin typeface="微软雅黑"/>
+                <a:ea typeface="微软雅黑"/>
+                <a:cs typeface="微软雅黑"/>
+              </a:defRPr>
+            </a:pPr>
+            <a:r>
+              <a:rPr sz="2400" b="0">
+                <a:solidFill>
+                  <a:srgbClr val="263746"/>
                 </a:solidFill>
                 <a:latin typeface="微软雅黑"/>
                 <a:ea typeface="微软雅黑"/>
                 <a:cs typeface="微软雅黑"/>
               </a:rPr>
-              <a:t>证据</a:t>
-            </a:r>
-          </a:p>
-        </p:txBody>
-      </p:sp>
-      <p:sp>
-        <p:nvSpPr>
-          <p:cNvPr id="10" name="content-153">
-            <a:extLst xmlns:a="http://schemas.openxmlformats.org/drawingml/2006/main">
-              <a:ext uri="{FF2B5EF4-FFF2-40B4-BE49-F238E27FC236}">
-                <a16:creationId xmlns:a16="http://schemas.microsoft.com/office/drawing/2014/main" id="{555AD51A-1368-442F-A3B3-1C2C309479A4}"/>
-              </a:ext>
-            </a:extLst>
-          </p:cNvPr>
-          <p:cNvSpPr>
-            <a:spLocks xmlns:a="http://schemas.openxmlformats.org/drawingml/2006/main" noGrp="1"/>
-          </p:cNvSpPr>
-          <p:nvPr/>
-        </p:nvSpPr>
-        <p:spPr>
-          <a:xfrm xmlns:a="http://schemas.openxmlformats.org/drawingml/2006/main">
-            <a:off x="3181350" y="2609850"/>
-            <a:ext cx="8286750" cy="666750"/>
+              <a:t>同伴从句子找到记录 ID 和评价定义；检查“显著”“证明”“消除”等词是否有证据。报告长度服务论证，不新建平行文档。</a:t>
+            </a:r>
+          </a:p>
+        </p:txBody>
+      </p:sp>
+      <p:sp>
+        <p:nvSpPr>
+          <p:cNvPr id="4" name="judgment-body-2">
+            <a:extLst xmlns:a="http://schemas.openxmlformats.org/drawingml/2006/main">
+              <a:ext uri="{FF2B5EF4-FFF2-40B4-BE49-F238E27FC236}">
+                <a16:creationId xmlns:a16="http://schemas.microsoft.com/office/drawing/2014/main" id="{8897D7F3-3730-4F0B-B591-3B24EB533BA1}"/>
+              </a:ext>
+            </a:extLst>
+          </p:cNvPr>
+          <p:cNvSpPr>
+            <a:spLocks xmlns:a="http://schemas.openxmlformats.org/drawingml/2006/main" noGrp="1"/>
+          </p:cNvSpPr>
+          <p:nvPr/>
+        </p:nvSpPr>
+        <p:spPr>
+          <a:xfrm xmlns:a="http://schemas.openxmlformats.org/drawingml/2006/main">
+            <a:off x="666750" y="4457700"/>
+            <a:ext cx="10858500" cy="1466850"/>
           </a:xfrm>
           <a:prstGeom xmlns:a="http://schemas.openxmlformats.org/drawingml/2006/main" prst="rect">
             <a:avLst/>
@@ -13772,84 +12050,61 @@
         </p:spPr>
         <p:txBody>
           <a:bodyPr xmlns:a="http://schemas.openxmlformats.org/drawingml/2006/main" lIns="0" tIns="0" rIns="0" bIns="0" anchor="t"/>
-          <a:lstStyle xmlns:a="http://schemas.openxmlformats.org/drawingml/2006/main"/>
+          <a:lstStyle xmlns:a="http://schemas.openxmlformats.org/drawingml/2006/main">
+            <a:defPPr algn="l">
+              <a:defRPr sz="2200" b="0">
+                <a:solidFill>
+                  <a:srgbClr val="1F4D78"/>
+                </a:solidFill>
+                <a:latin typeface="微软雅黑"/>
+                <a:ea typeface="微软雅黑"/>
+                <a:cs typeface="微软雅黑"/>
+              </a:defRPr>
+            </a:defPPr>
+          </a:lstStyle>
           <a:p xmlns:a="http://schemas.openxmlformats.org/drawingml/2006/main">
             <a:pPr algn="l">
-              <a:lnSpc>
-                <a:spcPct val="118000"/>
-              </a:lnSpc>
-              <a:buNone/>
-              <a:defRPr sz="2300" b="0">
-                <a:solidFill>
-                  <a:srgbClr val="27333D"/>
-                </a:solidFill>
-                <a:latin typeface="微软雅黑"/>
-                <a:ea typeface="微软雅黑"/>
-                <a:cs typeface="微软雅黑"/>
-              </a:defRPr>
-            </a:pPr>
-            <a:r>
-              <a:rPr sz="2300" b="0">
-                <a:solidFill>
-                  <a:srgbClr val="27333D"/>
+              <a:defRPr sz="2200" b="0">
+                <a:solidFill>
+                  <a:srgbClr val="1F4D78"/>
+                </a:solidFill>
+                <a:latin typeface="微软雅黑"/>
+                <a:ea typeface="微软雅黑"/>
+                <a:cs typeface="微软雅黑"/>
+              </a:defRPr>
+            </a:pPr>
+            <a:r>
+              <a:rPr sz="2200" b="0">
+                <a:solidFill>
+                  <a:srgbClr val="1F4D78"/>
                 </a:solidFill>
                 <a:latin typeface="微软雅黑"/>
                 <a:ea typeface="微软雅黑"/>
                 <a:cs typeface="微软雅黑"/>
               </a:rPr>
-              <a:t>阅读卡3/8，自由摘要4/8，见逐项标注。</a:t>
-            </a:r>
-          </a:p>
-        </p:txBody>
-      </p:sp>
-      <p:sp>
-        <p:nvSpPr>
-          <p:cNvPr id="11" name="rule-154">
-            <a:extLst xmlns:a="http://schemas.openxmlformats.org/drawingml/2006/main">
-              <a:ext uri="{FF2B5EF4-FFF2-40B4-BE49-F238E27FC236}">
-                <a16:creationId xmlns:a16="http://schemas.microsoft.com/office/drawing/2014/main" id="{40BB5DD4-BE62-4D39-819E-FCC4DD896D0D}"/>
-              </a:ext>
-            </a:extLst>
-          </p:cNvPr>
-          <p:cNvSpPr>
-            <a:spLocks xmlns:a="http://schemas.openxmlformats.org/drawingml/2006/main" noGrp="1"/>
-          </p:cNvSpPr>
-          <p:nvPr/>
-        </p:nvSpPr>
-        <p:spPr>
-          <a:xfrm xmlns:a="http://schemas.openxmlformats.org/drawingml/2006/main">
-            <a:off x="609600" y="3371850"/>
-            <a:ext cx="10858500" cy="14288"/>
-          </a:xfrm>
-          <a:prstGeom xmlns:a="http://schemas.openxmlformats.org/drawingml/2006/main" prst="rect">
-            <a:avLst/>
-          </a:prstGeom>
-          <a:solidFill xmlns:a="http://schemas.openxmlformats.org/drawingml/2006/main">
-            <a:srgbClr val="CDD5DB"/>
-          </a:solidFill>
-          <a:ln xmlns:a="http://schemas.openxmlformats.org/drawingml/2006/main" w="0">
-            <a:noFill/>
-          </a:ln>
-        </p:spPr>
-      </p:sp>
-      <p:sp>
-        <p:nvSpPr>
-          <p:cNvPr id="12" name="content-155">
-            <a:extLst xmlns:a="http://schemas.openxmlformats.org/drawingml/2006/main">
-              <a:ext uri="{FF2B5EF4-FFF2-40B4-BE49-F238E27FC236}">
-                <a16:creationId xmlns:a16="http://schemas.microsoft.com/office/drawing/2014/main" id="{19D7EB13-093E-4E56-9AA4-F753EC95BF28}"/>
-              </a:ext>
-            </a:extLst>
-          </p:cNvPr>
-          <p:cNvSpPr>
-            <a:spLocks xmlns:a="http://schemas.openxmlformats.org/drawingml/2006/main" noGrp="1"/>
-          </p:cNvSpPr>
-          <p:nvPr/>
-        </p:nvSpPr>
-        <p:spPr>
-          <a:xfrm xmlns:a="http://schemas.openxmlformats.org/drawingml/2006/main">
-            <a:off x="609600" y="3638550"/>
-            <a:ext cx="2333625" cy="609600"/>
+              <a:t>保存：report.md 或主文档中的论证段、完整骨架与追踪条目</a:t>
+            </a:r>
+          </a:p>
+        </p:txBody>
+      </p:sp>
+      <p:sp>
+        <p:nvSpPr>
+          <p:cNvPr id="5" name="judgment-source">
+            <a:extLst xmlns:a="http://schemas.openxmlformats.org/drawingml/2006/main">
+              <a:ext uri="{FF2B5EF4-FFF2-40B4-BE49-F238E27FC236}">
+                <a16:creationId xmlns:a16="http://schemas.microsoft.com/office/drawing/2014/main" id="{F62DCF7E-E904-4A86-BEE8-A22A69F467BF}"/>
+              </a:ext>
+            </a:extLst>
+          </p:cNvPr>
+          <p:cNvSpPr>
+            <a:spLocks xmlns:a="http://schemas.openxmlformats.org/drawingml/2006/main" noGrp="1"/>
+          </p:cNvSpPr>
+          <p:nvPr/>
+        </p:nvSpPr>
+        <p:spPr>
+          <a:xfrm xmlns:a="http://schemas.openxmlformats.org/drawingml/2006/main">
+            <a:off x="666750" y="6276975"/>
+            <a:ext cx="10572750" cy="209550"/>
           </a:xfrm>
           <a:prstGeom xmlns:a="http://schemas.openxmlformats.org/drawingml/2006/main" prst="rect">
             <a:avLst/>
@@ -13861,54 +12116,61 @@
         </p:spPr>
         <p:txBody>
           <a:bodyPr xmlns:a="http://schemas.openxmlformats.org/drawingml/2006/main" lIns="0" tIns="0" rIns="0" bIns="0" anchor="t"/>
-          <a:lstStyle xmlns:a="http://schemas.openxmlformats.org/drawingml/2006/main"/>
+          <a:lstStyle xmlns:a="http://schemas.openxmlformats.org/drawingml/2006/main">
+            <a:defPPr algn="l">
+              <a:defRPr sz="1100" b="0">
+                <a:solidFill>
+                  <a:srgbClr val="667684"/>
+                </a:solidFill>
+                <a:latin typeface="微软雅黑"/>
+                <a:ea typeface="微软雅黑"/>
+                <a:cs typeface="微软雅黑"/>
+              </a:defRPr>
+            </a:defPPr>
+          </a:lstStyle>
           <a:p xmlns:a="http://schemas.openxmlformats.org/drawingml/2006/main">
             <a:pPr algn="l">
-              <a:lnSpc>
-                <a:spcPct val="118000"/>
-              </a:lnSpc>
-              <a:buNone/>
-              <a:defRPr sz="2400" b="1">
-                <a:solidFill>
-                  <a:srgbClr val="1F4D78"/>
-                </a:solidFill>
-                <a:latin typeface="微软雅黑"/>
-                <a:ea typeface="微软雅黑"/>
-                <a:cs typeface="微软雅黑"/>
-              </a:defRPr>
-            </a:pPr>
-            <a:r>
-              <a:rPr sz="2400" b="1">
-                <a:solidFill>
-                  <a:srgbClr val="1F4D78"/>
+              <a:defRPr sz="1100" b="0">
+                <a:solidFill>
+                  <a:srgbClr val="667684"/>
+                </a:solidFill>
+                <a:latin typeface="微软雅黑"/>
+                <a:ea typeface="微软雅黑"/>
+                <a:cs typeface="微软雅黑"/>
+              </a:defRPr>
+            </a:pPr>
+            <a:r>
+              <a:rPr sz="1100" b="0">
+                <a:solidFill>
+                  <a:srgbClr val="667684"/>
                 </a:solidFill>
                 <a:latin typeface="微软雅黑"/>
                 <a:ea typeface="微软雅黑"/>
                 <a:cs typeface="微软雅黑"/>
               </a:rPr>
-              <a:t>推理</a:t>
-            </a:r>
-          </a:p>
-        </p:txBody>
-      </p:sp>
-      <p:sp>
-        <p:nvSpPr>
-          <p:cNvPr id="13" name="content-156">
-            <a:extLst xmlns:a="http://schemas.openxmlformats.org/drawingml/2006/main">
-              <a:ext uri="{FF2B5EF4-FFF2-40B4-BE49-F238E27FC236}">
-                <a16:creationId xmlns:a16="http://schemas.microsoft.com/office/drawing/2014/main" id="{FB783C31-A523-4B48-947E-89C2894FA000}"/>
-              </a:ext>
-            </a:extLst>
-          </p:cNvPr>
-          <p:cNvSpPr>
-            <a:spLocks xmlns:a="http://schemas.openxmlformats.org/drawingml/2006/main" noGrp="1"/>
-          </p:cNvSpPr>
-          <p:nvPr/>
-        </p:nvSpPr>
-        <p:spPr>
-          <a:xfrm xmlns:a="http://schemas.openxmlformats.org/drawingml/2006/main">
-            <a:off x="3181350" y="3638550"/>
-            <a:ext cx="8286750" cy="666750"/>
+              <a:t>来源：本课判断任务与讲义；构造材料及真实来源按材料包标识</a:t>
+            </a:r>
+          </a:p>
+        </p:txBody>
+      </p:sp>
+      <p:sp>
+        <p:nvSpPr>
+          <p:cNvPr id="6" name="judgment-page">
+            <a:extLst xmlns:a="http://schemas.openxmlformats.org/drawingml/2006/main">
+              <a:ext uri="{FF2B5EF4-FFF2-40B4-BE49-F238E27FC236}">
+                <a16:creationId xmlns:a16="http://schemas.microsoft.com/office/drawing/2014/main" id="{1D4070CA-879F-4014-A426-3797146D9629}"/>
+              </a:ext>
+            </a:extLst>
+          </p:cNvPr>
+          <p:cNvSpPr>
+            <a:spLocks xmlns:a="http://schemas.openxmlformats.org/drawingml/2006/main" noGrp="1"/>
+          </p:cNvSpPr>
+          <p:nvPr/>
+        </p:nvSpPr>
+        <p:spPr>
+          <a:xfrm xmlns:a="http://schemas.openxmlformats.org/drawingml/2006/main">
+            <a:off x="11715750" y="6562725"/>
+            <a:ext cx="238125" cy="171450"/>
           </a:xfrm>
           <a:prstGeom xmlns:a="http://schemas.openxmlformats.org/drawingml/2006/main" prst="rect">
             <a:avLst/>
@@ -13920,213 +12182,42 @@
         </p:spPr>
         <p:txBody>
           <a:bodyPr xmlns:a="http://schemas.openxmlformats.org/drawingml/2006/main" lIns="0" tIns="0" rIns="0" bIns="0" anchor="t"/>
-          <a:lstStyle xmlns:a="http://schemas.openxmlformats.org/drawingml/2006/main"/>
+          <a:lstStyle xmlns:a="http://schemas.openxmlformats.org/drawingml/2006/main">
+            <a:defPPr algn="l">
+              <a:defRPr sz="900" b="0">
+                <a:solidFill>
+                  <a:srgbClr val="A5A5A5"/>
+                </a:solidFill>
+                <a:latin typeface="微软雅黑"/>
+                <a:ea typeface="微软雅黑"/>
+                <a:cs typeface="微软雅黑"/>
+              </a:defRPr>
+            </a:defPPr>
+          </a:lstStyle>
           <a:p xmlns:a="http://schemas.openxmlformats.org/drawingml/2006/main">
             <a:pPr algn="l">
-              <a:lnSpc>
-                <a:spcPct val="118000"/>
-              </a:lnSpc>
-              <a:buNone/>
-              <a:defRPr sz="2300" b="0">
-                <a:solidFill>
-                  <a:srgbClr val="27333D"/>
-                </a:solidFill>
-                <a:latin typeface="微软雅黑"/>
-                <a:ea typeface="微软雅黑"/>
-                <a:cs typeface="微软雅黑"/>
-              </a:defRPr>
-            </a:pPr>
-            <a:r>
-              <a:rPr sz="2300" b="0">
-                <a:solidFill>
-                  <a:srgbClr val="27333D"/>
+              <a:defRPr sz="900" b="0">
+                <a:solidFill>
+                  <a:srgbClr val="A5A5A5"/>
+                </a:solidFill>
+                <a:latin typeface="微软雅黑"/>
+                <a:ea typeface="微软雅黑"/>
+                <a:cs typeface="微软雅黑"/>
+              </a:defRPr>
+            </a:pPr>
+            <a:r>
+              <a:rPr sz="900" b="0">
+                <a:solidFill>
+                  <a:srgbClr val="A5A5A5"/>
                 </a:solidFill>
                 <a:latin typeface="微软雅黑"/>
                 <a:ea typeface="微软雅黑"/>
                 <a:cs typeface="微软雅黑"/>
               </a:rPr>
-              <a:t>同口径汇总与Q1方向一致，不能识别机制。</a:t>
-            </a:r>
-          </a:p>
-        </p:txBody>
-      </p:sp>
-      <p:sp>
-        <p:nvSpPr>
-          <p:cNvPr id="14" name="rule-157">
-            <a:extLst xmlns:a="http://schemas.openxmlformats.org/drawingml/2006/main">
-              <a:ext uri="{FF2B5EF4-FFF2-40B4-BE49-F238E27FC236}">
-                <a16:creationId xmlns:a16="http://schemas.microsoft.com/office/drawing/2014/main" id="{080A0172-5E23-4797-911C-EA9ADC3E6464}"/>
-              </a:ext>
-            </a:extLst>
-          </p:cNvPr>
-          <p:cNvSpPr>
-            <a:spLocks xmlns:a="http://schemas.openxmlformats.org/drawingml/2006/main" noGrp="1"/>
-          </p:cNvSpPr>
-          <p:nvPr/>
-        </p:nvSpPr>
-        <p:spPr>
-          <a:xfrm xmlns:a="http://schemas.openxmlformats.org/drawingml/2006/main">
-            <a:off x="609600" y="4400550"/>
-            <a:ext cx="10858500" cy="14288"/>
-          </a:xfrm>
-          <a:prstGeom xmlns:a="http://schemas.openxmlformats.org/drawingml/2006/main" prst="rect">
-            <a:avLst/>
-          </a:prstGeom>
-          <a:solidFill xmlns:a="http://schemas.openxmlformats.org/drawingml/2006/main">
-            <a:srgbClr val="CDD5DB"/>
-          </a:solidFill>
-          <a:ln xmlns:a="http://schemas.openxmlformats.org/drawingml/2006/main" w="0">
-            <a:noFill/>
-          </a:ln>
-        </p:spPr>
-      </p:sp>
-      <p:sp>
-        <p:nvSpPr>
-          <p:cNvPr id="15" name="content-158">
-            <a:extLst xmlns:a="http://schemas.openxmlformats.org/drawingml/2006/main">
-              <a:ext uri="{FF2B5EF4-FFF2-40B4-BE49-F238E27FC236}">
-                <a16:creationId xmlns:a16="http://schemas.microsoft.com/office/drawing/2014/main" id="{9CE333E9-6E19-4AB9-B5B5-82D65004D140}"/>
-              </a:ext>
-            </a:extLst>
-          </p:cNvPr>
-          <p:cNvSpPr>
-            <a:spLocks xmlns:a="http://schemas.openxmlformats.org/drawingml/2006/main" noGrp="1"/>
-          </p:cNvSpPr>
-          <p:nvPr/>
-        </p:nvSpPr>
-        <p:spPr>
-          <a:xfrm xmlns:a="http://schemas.openxmlformats.org/drawingml/2006/main">
-            <a:off x="609600" y="4667250"/>
-            <a:ext cx="2333625" cy="609600"/>
-          </a:xfrm>
-          <a:prstGeom xmlns:a="http://schemas.openxmlformats.org/drawingml/2006/main" prst="rect">
-            <a:avLst/>
-          </a:prstGeom>
-          <a:noFill xmlns:a="http://schemas.openxmlformats.org/drawingml/2006/main"/>
-          <a:ln xmlns:a="http://schemas.openxmlformats.org/drawingml/2006/main" w="0">
-            <a:noFill/>
-          </a:ln>
-        </p:spPr>
-        <p:txBody>
-          <a:bodyPr xmlns:a="http://schemas.openxmlformats.org/drawingml/2006/main" lIns="0" tIns="0" rIns="0" bIns="0" anchor="t"/>
-          <a:lstStyle xmlns:a="http://schemas.openxmlformats.org/drawingml/2006/main"/>
-          <a:p xmlns:a="http://schemas.openxmlformats.org/drawingml/2006/main">
-            <a:pPr algn="l">
-              <a:lnSpc>
-                <a:spcPct val="118000"/>
-              </a:lnSpc>
-              <a:buNone/>
-              <a:defRPr sz="2400" b="1">
-                <a:solidFill>
-                  <a:srgbClr val="1F4D78"/>
-                </a:solidFill>
-                <a:latin typeface="微软雅黑"/>
-                <a:ea typeface="微软雅黑"/>
-                <a:cs typeface="微软雅黑"/>
-              </a:defRPr>
-            </a:pPr>
-            <a:r>
-              <a:rPr sz="2400" b="1">
-                <a:solidFill>
-                  <a:srgbClr val="1F4D78"/>
-                </a:solidFill>
-                <a:latin typeface="微软雅黑"/>
-                <a:ea typeface="微软雅黑"/>
-                <a:cs typeface="微软雅黑"/>
-              </a:rPr>
-              <a:t>边界</a:t>
-            </a:r>
-          </a:p>
-        </p:txBody>
-      </p:sp>
-      <p:sp>
-        <p:nvSpPr>
-          <p:cNvPr id="16" name="content-159">
-            <a:extLst xmlns:a="http://schemas.openxmlformats.org/drawingml/2006/main">
-              <a:ext uri="{FF2B5EF4-FFF2-40B4-BE49-F238E27FC236}">
-                <a16:creationId xmlns:a16="http://schemas.microsoft.com/office/drawing/2014/main" id="{692DBFF3-A432-47BB-B789-79414E6AFB6D}"/>
-              </a:ext>
-            </a:extLst>
-          </p:cNvPr>
-          <p:cNvSpPr>
-            <a:spLocks xmlns:a="http://schemas.openxmlformats.org/drawingml/2006/main" noGrp="1"/>
-          </p:cNvSpPr>
-          <p:nvPr/>
-        </p:nvSpPr>
-        <p:spPr>
-          <a:xfrm xmlns:a="http://schemas.openxmlformats.org/drawingml/2006/main">
-            <a:off x="3181350" y="4667250"/>
-            <a:ext cx="8286750" cy="666750"/>
-          </a:xfrm>
-          <a:prstGeom xmlns:a="http://schemas.openxmlformats.org/drawingml/2006/main" prst="rect">
-            <a:avLst/>
-          </a:prstGeom>
-          <a:noFill xmlns:a="http://schemas.openxmlformats.org/drawingml/2006/main"/>
-          <a:ln xmlns:a="http://schemas.openxmlformats.org/drawingml/2006/main" w="0">
-            <a:noFill/>
-          </a:ln>
-        </p:spPr>
-        <p:txBody>
-          <a:bodyPr xmlns:a="http://schemas.openxmlformats.org/drawingml/2006/main" lIns="0" tIns="0" rIns="0" bIns="0" anchor="t"/>
-          <a:lstStyle xmlns:a="http://schemas.openxmlformats.org/drawingml/2006/main"/>
-          <a:p xmlns:a="http://schemas.openxmlformats.org/drawingml/2006/main">
-            <a:pPr algn="l">
-              <a:lnSpc>
-                <a:spcPct val="118000"/>
-              </a:lnSpc>
-              <a:buNone/>
-              <a:defRPr sz="2300" b="0">
-                <a:solidFill>
-                  <a:srgbClr val="27333D"/>
-                </a:solidFill>
-                <a:latin typeface="微软雅黑"/>
-                <a:ea typeface="微软雅黑"/>
-                <a:cs typeface="微软雅黑"/>
-              </a:defRPr>
-            </a:pPr>
-            <a:r>
-              <a:rPr sz="2300" b="0">
-                <a:solidFill>
-                  <a:srgbClr val="27333D"/>
-                </a:solidFill>
-                <a:latin typeface="微软雅黑"/>
-                <a:ea typeface="微软雅黑"/>
-                <a:cs typeface="微软雅黑"/>
-              </a:rPr>
-              <a:t>T03负向，H1/A2未区分，其他质量未测。</a:t>
-            </a:r>
-          </a:p>
-        </p:txBody>
-      </p:sp>
-      <p:sp>
-        <p:nvSpPr>
-          <p:cNvPr id="17" name="rule-160">
-            <a:extLst xmlns:a="http://schemas.openxmlformats.org/drawingml/2006/main">
-              <a:ext uri="{FF2B5EF4-FFF2-40B4-BE49-F238E27FC236}">
-                <a16:creationId xmlns:a16="http://schemas.microsoft.com/office/drawing/2014/main" id="{552EFE35-2656-4EB9-B03E-891126F014B5}"/>
-              </a:ext>
-            </a:extLst>
-          </p:cNvPr>
-          <p:cNvSpPr>
-            <a:spLocks xmlns:a="http://schemas.openxmlformats.org/drawingml/2006/main" noGrp="1"/>
-          </p:cNvSpPr>
-          <p:nvPr/>
-        </p:nvSpPr>
-        <p:spPr>
-          <a:xfrm xmlns:a="http://schemas.openxmlformats.org/drawingml/2006/main">
-            <a:off x="609600" y="5429250"/>
-            <a:ext cx="10858500" cy="14288"/>
-          </a:xfrm>
-          <a:prstGeom xmlns:a="http://schemas.openxmlformats.org/drawingml/2006/main" prst="rect">
-            <a:avLst/>
-          </a:prstGeom>
-          <a:solidFill xmlns:a="http://schemas.openxmlformats.org/drawingml/2006/main">
-            <a:srgbClr val="CDD5DB"/>
-          </a:solidFill>
-          <a:ln xmlns:a="http://schemas.openxmlformats.org/drawingml/2006/main" w="0">
-            <a:noFill/>
-          </a:ln>
-        </p:spPr>
+              <a:t>8</a:t>
+            </a:r>
+          </a:p>
+        </p:txBody>
       </p:sp>
     </p:spTree>
     <p:extLst>
